--- a/Library_API.pptx
+++ b/Library_API.pptx
@@ -5,25 +5,27 @@
     <p:sldMasterId id="2147483648" r:id="rId4"/>
   </p:sldMasterIdLst>
   <p:notesMasterIdLst>
-    <p:notesMasterId r:id="rId21"/>
+    <p:notesMasterId r:id="rId23"/>
   </p:notesMasterIdLst>
   <p:sldIdLst>
     <p:sldId id="256" r:id="rId5"/>
     <p:sldId id="302" r:id="rId6"/>
     <p:sldId id="303" r:id="rId7"/>
     <p:sldId id="312" r:id="rId8"/>
-    <p:sldId id="280" r:id="rId9"/>
-    <p:sldId id="301" r:id="rId10"/>
-    <p:sldId id="305" r:id="rId11"/>
-    <p:sldId id="310" r:id="rId12"/>
-    <p:sldId id="306" r:id="rId13"/>
-    <p:sldId id="307" r:id="rId14"/>
-    <p:sldId id="309" r:id="rId15"/>
-    <p:sldId id="311" r:id="rId16"/>
-    <p:sldId id="304" r:id="rId17"/>
-    <p:sldId id="308" r:id="rId18"/>
-    <p:sldId id="300" r:id="rId19"/>
-    <p:sldId id="281" r:id="rId20"/>
+    <p:sldId id="313" r:id="rId9"/>
+    <p:sldId id="314" r:id="rId10"/>
+    <p:sldId id="280" r:id="rId11"/>
+    <p:sldId id="301" r:id="rId12"/>
+    <p:sldId id="305" r:id="rId13"/>
+    <p:sldId id="310" r:id="rId14"/>
+    <p:sldId id="306" r:id="rId15"/>
+    <p:sldId id="307" r:id="rId16"/>
+    <p:sldId id="309" r:id="rId17"/>
+    <p:sldId id="311" r:id="rId18"/>
+    <p:sldId id="304" r:id="rId19"/>
+    <p:sldId id="308" r:id="rId20"/>
+    <p:sldId id="300" r:id="rId21"/>
+    <p:sldId id="281" r:id="rId22"/>
   </p:sldIdLst>
   <p:sldSz cx="12192000" cy="6858000"/>
   <p:notesSz cx="6858000" cy="9144000"/>
@@ -1235,7 +1237,7 @@
           <a:p>
             <a:fld id="{D5C88E34-8C8C-8747-BADB-40E1ACC00129}" type="datetimeFigureOut">
               <a:rPr lang="en-US" smtClean="0"/>
-              <a:t>8/27/2026</a:t>
+              <a:t>8/28/2026</a:t>
             </a:fld>
             <a:endParaRPr lang="en-US" dirty="0"/>
           </a:p>
@@ -11784,10 +11786,10 @@
       </p:grpSpPr>
       <p:sp>
         <p:nvSpPr>
-          <p:cNvPr id="16" name="Title 15">
-            <a:extLst>
-              <a:ext uri="{FF2B5EF4-FFF2-40B4-BE49-F238E27FC236}">
-                <a16:creationId xmlns:a16="http://schemas.microsoft.com/office/drawing/2014/main" id="{599B5F29-ED3B-9B44-DBBE-FD28EE7733A7}"/>
+          <p:cNvPr id="6" name="Title 5">
+            <a:extLst>
+              <a:ext uri="{FF2B5EF4-FFF2-40B4-BE49-F238E27FC236}">
+                <a16:creationId xmlns:a16="http://schemas.microsoft.com/office/drawing/2014/main" id="{19B727DE-9C16-360C-F34F-96B63BA5504C}"/>
               </a:ext>
             </a:extLst>
           </p:cNvPr>
@@ -11805,25 +11807,25 @@
           <a:p>
             <a:r>
               <a:rPr lang="en-US" dirty="0"/>
-              <a:t>MEET OUR EXTENDED TEAM</a:t>
-            </a:r>
-          </a:p>
-        </p:txBody>
-      </p:sp>
-      <p:sp>
-        <p:nvSpPr>
-          <p:cNvPr id="2" name="Footer Placeholder 1">
-            <a:extLst>
-              <a:ext uri="{FF2B5EF4-FFF2-40B4-BE49-F238E27FC236}">
-                <a16:creationId xmlns:a16="http://schemas.microsoft.com/office/drawing/2014/main" id="{91A8AD5F-DCF2-F71C-E7E2-C2FD42878531}"/>
-              </a:ext>
-            </a:extLst>
-          </p:cNvPr>
-          <p:cNvSpPr>
-            <a:spLocks noGrp="1"/>
-          </p:cNvSpPr>
-          <p:nvPr>
-            <p:ph type="ftr" sz="quarter" idx="11"/>
+              <a:t>Business opportunities are like buses. There's always another one coming.</a:t>
+            </a:r>
+          </a:p>
+        </p:txBody>
+      </p:sp>
+      <p:sp>
+        <p:nvSpPr>
+          <p:cNvPr id="7" name="Text Placeholder 6">
+            <a:extLst>
+              <a:ext uri="{FF2B5EF4-FFF2-40B4-BE49-F238E27FC236}">
+                <a16:creationId xmlns:a16="http://schemas.microsoft.com/office/drawing/2014/main" id="{4067AB90-919C-547C-EA0C-C5763E0BC234}"/>
+              </a:ext>
+            </a:extLst>
+          </p:cNvPr>
+          <p:cNvSpPr>
+            <a:spLocks noGrp="1"/>
+          </p:cNvSpPr>
+          <p:nvPr>
+            <p:ph type="body" sz="quarter" idx="13"/>
           </p:nvPr>
         </p:nvSpPr>
         <p:spPr/>
@@ -11833,25 +11835,25 @@
           <a:p>
             <a:r>
               <a:rPr lang="en-US" dirty="0"/>
-              <a:t>PRESENTATION TITLE</a:t>
-            </a:r>
-          </a:p>
-        </p:txBody>
-      </p:sp>
-      <p:sp>
-        <p:nvSpPr>
-          <p:cNvPr id="8" name="Text Placeholder 7">
-            <a:extLst>
-              <a:ext uri="{FF2B5EF4-FFF2-40B4-BE49-F238E27FC236}">
-                <a16:creationId xmlns:a16="http://schemas.microsoft.com/office/drawing/2014/main" id="{F07ACA27-076A-FAA7-417C-5BC0A85F36AF}"/>
-              </a:ext>
-            </a:extLst>
-          </p:cNvPr>
-          <p:cNvSpPr>
-            <a:spLocks noGrp="1"/>
-          </p:cNvSpPr>
-          <p:nvPr>
-            <p:ph type="body" sz="quarter" idx="17"/>
+              <a:t>Richard Branson</a:t>
+            </a:r>
+          </a:p>
+        </p:txBody>
+      </p:sp>
+      <p:sp>
+        <p:nvSpPr>
+          <p:cNvPr id="11" name="Text Placeholder 10">
+            <a:extLst>
+              <a:ext uri="{FF2B5EF4-FFF2-40B4-BE49-F238E27FC236}">
+                <a16:creationId xmlns:a16="http://schemas.microsoft.com/office/drawing/2014/main" id="{838F1D27-7C00-ADDA-3E62-FDBF008D5DDE}"/>
+              </a:ext>
+            </a:extLst>
+          </p:cNvPr>
+          <p:cNvSpPr>
+            <a:spLocks noGrp="1"/>
+          </p:cNvSpPr>
+          <p:nvPr>
+            <p:ph type="body" sz="quarter" idx="15"/>
           </p:nvPr>
         </p:nvSpPr>
         <p:spPr/>
@@ -11861,25 +11863,25 @@
           <a:p>
             <a:r>
               <a:rPr lang="en-US" dirty="0"/>
-              <a:t>TAKUMA HAYASHI​</a:t>
-            </a:r>
-          </a:p>
-        </p:txBody>
-      </p:sp>
-      <p:sp>
-        <p:nvSpPr>
-          <p:cNvPr id="9" name="Text Placeholder 8">
-            <a:extLst>
-              <a:ext uri="{FF2B5EF4-FFF2-40B4-BE49-F238E27FC236}">
-                <a16:creationId xmlns:a16="http://schemas.microsoft.com/office/drawing/2014/main" id="{D59ACCB8-2E44-8B01-9BCD-7AD37DA20F2E}"/>
-              </a:ext>
-            </a:extLst>
-          </p:cNvPr>
-          <p:cNvSpPr>
-            <a:spLocks noGrp="1"/>
-          </p:cNvSpPr>
-          <p:nvPr>
-            <p:ph type="body" sz="quarter" idx="18"/>
+              <a:t>”</a:t>
+            </a:r>
+          </a:p>
+        </p:txBody>
+      </p:sp>
+      <p:sp>
+        <p:nvSpPr>
+          <p:cNvPr id="10" name="Text Placeholder 9">
+            <a:extLst>
+              <a:ext uri="{FF2B5EF4-FFF2-40B4-BE49-F238E27FC236}">
+                <a16:creationId xmlns:a16="http://schemas.microsoft.com/office/drawing/2014/main" id="{65E24183-EEFA-02B9-BFB3-2C57E0B5A3FD}"/>
+              </a:ext>
+            </a:extLst>
+          </p:cNvPr>
+          <p:cNvSpPr>
+            <a:spLocks noGrp="1"/>
+          </p:cNvSpPr>
+          <p:nvPr>
+            <p:ph type="body" sz="quarter" idx="14"/>
           </p:nvPr>
         </p:nvSpPr>
         <p:spPr/>
@@ -11889,654 +11891,15 @@
           <a:p>
             <a:r>
               <a:rPr lang="en-US" dirty="0"/>
-              <a:t>President</a:t>
-            </a:r>
-          </a:p>
-        </p:txBody>
-      </p:sp>
-      <p:sp>
-        <p:nvSpPr>
-          <p:cNvPr id="17" name="Text Placeholder 16">
-            <a:extLst>
-              <a:ext uri="{FF2B5EF4-FFF2-40B4-BE49-F238E27FC236}">
-                <a16:creationId xmlns:a16="http://schemas.microsoft.com/office/drawing/2014/main" id="{9802C12A-D232-CD35-1180-8544916BCE2B}"/>
-              </a:ext>
-            </a:extLst>
-          </p:cNvPr>
-          <p:cNvSpPr>
-            <a:spLocks noGrp="1"/>
-          </p:cNvSpPr>
-          <p:nvPr>
-            <p:ph type="body" sz="quarter" idx="29"/>
-          </p:nvPr>
-        </p:nvSpPr>
-        <p:spPr/>
-        <p:txBody>
-          <a:bodyPr/>
-          <a:lstStyle/>
-          <a:p>
-            <a:r>
-              <a:rPr lang="en-US" dirty="0"/>
-              <a:t>GRAHAM BARNES</a:t>
-            </a:r>
-          </a:p>
-        </p:txBody>
-      </p:sp>
-      <p:sp>
-        <p:nvSpPr>
-          <p:cNvPr id="19" name="Text Placeholder 18">
-            <a:extLst>
-              <a:ext uri="{FF2B5EF4-FFF2-40B4-BE49-F238E27FC236}">
-                <a16:creationId xmlns:a16="http://schemas.microsoft.com/office/drawing/2014/main" id="{29526A68-F582-4874-DA70-81D0841C1D1A}"/>
-              </a:ext>
-            </a:extLst>
-          </p:cNvPr>
-          <p:cNvSpPr>
-            <a:spLocks noGrp="1"/>
-          </p:cNvSpPr>
-          <p:nvPr>
-            <p:ph type="body" sz="quarter" idx="30"/>
-          </p:nvPr>
-        </p:nvSpPr>
-        <p:spPr/>
-        <p:txBody>
-          <a:bodyPr/>
-          <a:lstStyle/>
-          <a:p>
-            <a:r>
-              <a:rPr lang="en-US" dirty="0"/>
-              <a:t>VP Product</a:t>
-            </a:r>
-          </a:p>
-        </p:txBody>
-      </p:sp>
-      <p:pic>
-        <p:nvPicPr>
-          <p:cNvPr id="44" name="Picture Placeholder 43" descr="Team member head shot&#10;">
-            <a:extLst>
-              <a:ext uri="{FF2B5EF4-FFF2-40B4-BE49-F238E27FC236}">
-                <a16:creationId xmlns:a16="http://schemas.microsoft.com/office/drawing/2014/main" id="{8E4AE635-532E-6FC4-A155-AB3B0533A045}"/>
-              </a:ext>
-            </a:extLst>
-          </p:cNvPr>
-          <p:cNvPicPr>
-            <a:picLocks noGrp="1" noChangeAspect="1"/>
-          </p:cNvPicPr>
-          <p:nvPr>
-            <p:ph type="pic" sz="quarter" idx="13"/>
-          </p:nvPr>
-        </p:nvPicPr>
-        <p:blipFill rotWithShape="1">
-          <a:blip r:embed="rId2"/>
-          <a:srcRect/>
-          <a:stretch/>
-        </p:blipFill>
-        <p:spPr/>
-      </p:pic>
-      <p:pic>
-        <p:nvPicPr>
-          <p:cNvPr id="48" name="Picture Placeholder 47" descr="Team member head shot&#10;">
-            <a:extLst>
-              <a:ext uri="{FF2B5EF4-FFF2-40B4-BE49-F238E27FC236}">
-                <a16:creationId xmlns:a16="http://schemas.microsoft.com/office/drawing/2014/main" id="{3E5F6DD2-261B-76B8-29A7-384E2C07E182}"/>
-              </a:ext>
-            </a:extLst>
-          </p:cNvPr>
-          <p:cNvPicPr>
-            <a:picLocks noGrp="1" noChangeAspect="1"/>
-          </p:cNvPicPr>
-          <p:nvPr>
-            <p:ph type="pic" sz="quarter" idx="25"/>
-          </p:nvPr>
-        </p:nvPicPr>
-        <p:blipFill rotWithShape="1">
-          <a:blip r:embed="rId3"/>
-          <a:srcRect l="262" r="262"/>
-          <a:stretch/>
-        </p:blipFill>
-        <p:spPr/>
-      </p:pic>
-      <p:sp>
-        <p:nvSpPr>
-          <p:cNvPr id="10" name="Text Placeholder 9">
-            <a:extLst>
-              <a:ext uri="{FF2B5EF4-FFF2-40B4-BE49-F238E27FC236}">
-                <a16:creationId xmlns:a16="http://schemas.microsoft.com/office/drawing/2014/main" id="{5670C16D-9661-482A-986D-0D6CB98AB869}"/>
-              </a:ext>
-            </a:extLst>
-          </p:cNvPr>
-          <p:cNvSpPr>
-            <a:spLocks noGrp="1"/>
-          </p:cNvSpPr>
-          <p:nvPr>
-            <p:ph type="body" sz="quarter" idx="19"/>
-          </p:nvPr>
-        </p:nvSpPr>
-        <p:spPr/>
-        <p:txBody>
-          <a:bodyPr/>
-          <a:lstStyle/>
-          <a:p>
-            <a:r>
-              <a:rPr lang="en-US" dirty="0"/>
-              <a:t>MIRJAM NILSSON</a:t>
-            </a:r>
-          </a:p>
-        </p:txBody>
-      </p:sp>
-      <p:sp>
-        <p:nvSpPr>
-          <p:cNvPr id="11" name="Text Placeholder 10">
-            <a:extLst>
-              <a:ext uri="{FF2B5EF4-FFF2-40B4-BE49-F238E27FC236}">
-                <a16:creationId xmlns:a16="http://schemas.microsoft.com/office/drawing/2014/main" id="{22115526-AEC6-C024-712E-E6CC8FB60E4D}"/>
-              </a:ext>
-            </a:extLst>
-          </p:cNvPr>
-          <p:cNvSpPr>
-            <a:spLocks noGrp="1"/>
-          </p:cNvSpPr>
-          <p:nvPr>
-            <p:ph type="body" sz="quarter" idx="20"/>
-          </p:nvPr>
-        </p:nvSpPr>
-        <p:spPr/>
-        <p:txBody>
-          <a:bodyPr/>
-          <a:lstStyle/>
-          <a:p>
-            <a:r>
-              <a:rPr lang="en-US" dirty="0"/>
-              <a:t>Chief </a:t>
-            </a:r>
-            <a:br>
-              <a:rPr lang="en-US" dirty="0"/>
-            </a:br>
-            <a:r>
-              <a:rPr lang="en-US" dirty="0"/>
-              <a:t>Executive </a:t>
-            </a:r>
-            <a:br>
-              <a:rPr lang="en-US" dirty="0"/>
-            </a:br>
-            <a:r>
-              <a:rPr lang="en-US" dirty="0"/>
-              <a:t>Officer​</a:t>
-            </a:r>
-          </a:p>
-        </p:txBody>
-      </p:sp>
-      <p:sp>
-        <p:nvSpPr>
-          <p:cNvPr id="21" name="Text Placeholder 20">
-            <a:extLst>
-              <a:ext uri="{FF2B5EF4-FFF2-40B4-BE49-F238E27FC236}">
-                <a16:creationId xmlns:a16="http://schemas.microsoft.com/office/drawing/2014/main" id="{B2C6C37C-6141-B65E-91CC-6E6C4A9F6ECD}"/>
-              </a:ext>
-            </a:extLst>
-          </p:cNvPr>
-          <p:cNvSpPr>
-            <a:spLocks noGrp="1"/>
-          </p:cNvSpPr>
-          <p:nvPr>
-            <p:ph type="body" sz="quarter" idx="31"/>
-          </p:nvPr>
-        </p:nvSpPr>
-        <p:spPr/>
-        <p:txBody>
-          <a:bodyPr/>
-          <a:lstStyle/>
-          <a:p>
-            <a:r>
-              <a:rPr lang="en-US" dirty="0"/>
-              <a:t>ROWAN MURPHY</a:t>
-            </a:r>
-          </a:p>
-        </p:txBody>
-      </p:sp>
-      <p:sp>
-        <p:nvSpPr>
-          <p:cNvPr id="23" name="Text Placeholder 22">
-            <a:extLst>
-              <a:ext uri="{FF2B5EF4-FFF2-40B4-BE49-F238E27FC236}">
-                <a16:creationId xmlns:a16="http://schemas.microsoft.com/office/drawing/2014/main" id="{3C9D5E96-D043-255D-647E-931CF0782375}"/>
-              </a:ext>
-            </a:extLst>
-          </p:cNvPr>
-          <p:cNvSpPr>
-            <a:spLocks noGrp="1"/>
-          </p:cNvSpPr>
-          <p:nvPr>
-            <p:ph type="body" sz="quarter" idx="32"/>
-          </p:nvPr>
-        </p:nvSpPr>
-        <p:spPr/>
-        <p:txBody>
-          <a:bodyPr/>
-          <a:lstStyle/>
-          <a:p>
-            <a:r>
-              <a:rPr lang="en-US" dirty="0"/>
-              <a:t>SEO Strategist</a:t>
-            </a:r>
-          </a:p>
-        </p:txBody>
-      </p:sp>
-      <p:pic>
-        <p:nvPicPr>
-          <p:cNvPr id="42" name="Picture Placeholder 41" descr="Team member head shot&#10;">
-            <a:extLst>
-              <a:ext uri="{FF2B5EF4-FFF2-40B4-BE49-F238E27FC236}">
-                <a16:creationId xmlns:a16="http://schemas.microsoft.com/office/drawing/2014/main" id="{C51CA361-456A-1016-DFBD-C344466DD963}"/>
-              </a:ext>
-            </a:extLst>
-          </p:cNvPr>
-          <p:cNvPicPr>
-            <a:picLocks noGrp="1" noChangeAspect="1"/>
-          </p:cNvPicPr>
-          <p:nvPr>
-            <p:ph type="pic" sz="quarter" idx="14"/>
-          </p:nvPr>
-        </p:nvPicPr>
-        <p:blipFill rotWithShape="1">
-          <a:blip r:embed="rId4"/>
-          <a:srcRect t="68" b="68"/>
-          <a:stretch/>
-        </p:blipFill>
-        <p:spPr/>
-      </p:pic>
-      <p:pic>
-        <p:nvPicPr>
-          <p:cNvPr id="50" name="Picture Placeholder 49" descr="Team member head shot&#10;">
-            <a:extLst>
-              <a:ext uri="{FF2B5EF4-FFF2-40B4-BE49-F238E27FC236}">
-                <a16:creationId xmlns:a16="http://schemas.microsoft.com/office/drawing/2014/main" id="{2D9499A9-08D8-46CA-F959-DE882648A668}"/>
-              </a:ext>
-            </a:extLst>
-          </p:cNvPr>
-          <p:cNvPicPr>
-            <a:picLocks noGrp="1" noChangeAspect="1"/>
-          </p:cNvPicPr>
-          <p:nvPr>
-            <p:ph type="pic" sz="quarter" idx="26"/>
-          </p:nvPr>
-        </p:nvPicPr>
-        <p:blipFill rotWithShape="1">
-          <a:blip r:embed="rId5"/>
-          <a:srcRect t="68" b="68"/>
-          <a:stretch/>
-        </p:blipFill>
-        <p:spPr/>
-      </p:pic>
-      <p:sp>
-        <p:nvSpPr>
-          <p:cNvPr id="12" name="Text Placeholder 11">
-            <a:extLst>
-              <a:ext uri="{FF2B5EF4-FFF2-40B4-BE49-F238E27FC236}">
-                <a16:creationId xmlns:a16="http://schemas.microsoft.com/office/drawing/2014/main" id="{E26CB388-D0E5-9548-A57B-8A5352089E15}"/>
-              </a:ext>
-            </a:extLst>
-          </p:cNvPr>
-          <p:cNvSpPr>
-            <a:spLocks noGrp="1"/>
-          </p:cNvSpPr>
-          <p:nvPr>
-            <p:ph type="body" sz="quarter" idx="21"/>
-          </p:nvPr>
-        </p:nvSpPr>
-        <p:spPr/>
-        <p:txBody>
-          <a:bodyPr/>
-          <a:lstStyle/>
-          <a:p>
-            <a:r>
-              <a:rPr lang="en-US" dirty="0"/>
-              <a:t>FLORA BERGGREN</a:t>
-            </a:r>
-          </a:p>
-        </p:txBody>
-      </p:sp>
-      <p:sp>
-        <p:nvSpPr>
-          <p:cNvPr id="13" name="Text Placeholder 12">
-            <a:extLst>
-              <a:ext uri="{FF2B5EF4-FFF2-40B4-BE49-F238E27FC236}">
-                <a16:creationId xmlns:a16="http://schemas.microsoft.com/office/drawing/2014/main" id="{7DA1EEF4-1C46-B9FD-302F-61FC0265F748}"/>
-              </a:ext>
-            </a:extLst>
-          </p:cNvPr>
-          <p:cNvSpPr>
-            <a:spLocks noGrp="1"/>
-          </p:cNvSpPr>
-          <p:nvPr>
-            <p:ph type="body" sz="quarter" idx="22"/>
-          </p:nvPr>
-        </p:nvSpPr>
-        <p:spPr/>
-        <p:txBody>
-          <a:bodyPr/>
-          <a:lstStyle/>
-          <a:p>
-            <a:r>
-              <a:rPr lang="en-US" dirty="0"/>
-              <a:t>Chief </a:t>
-            </a:r>
-            <a:br>
-              <a:rPr lang="en-US" dirty="0"/>
-            </a:br>
-            <a:r>
-              <a:rPr lang="en-US" dirty="0"/>
-              <a:t>Operations Officer​</a:t>
-            </a:r>
-          </a:p>
-        </p:txBody>
-      </p:sp>
-      <p:sp>
-        <p:nvSpPr>
-          <p:cNvPr id="25" name="Text Placeholder 24">
-            <a:extLst>
-              <a:ext uri="{FF2B5EF4-FFF2-40B4-BE49-F238E27FC236}">
-                <a16:creationId xmlns:a16="http://schemas.microsoft.com/office/drawing/2014/main" id="{D3B414CD-2F59-EAB8-E6C8-D233BF953DC9}"/>
-              </a:ext>
-            </a:extLst>
-          </p:cNvPr>
-          <p:cNvSpPr>
-            <a:spLocks noGrp="1"/>
-          </p:cNvSpPr>
-          <p:nvPr>
-            <p:ph type="body" sz="quarter" idx="33"/>
-          </p:nvPr>
-        </p:nvSpPr>
-        <p:spPr/>
-        <p:txBody>
-          <a:bodyPr/>
-          <a:lstStyle/>
-          <a:p>
-            <a:r>
-              <a:rPr lang="en-US" dirty="0"/>
-              <a:t>ELIZABETH MOORE</a:t>
-            </a:r>
-          </a:p>
-        </p:txBody>
-      </p:sp>
-      <p:sp>
-        <p:nvSpPr>
-          <p:cNvPr id="26" name="Text Placeholder 25">
-            <a:extLst>
-              <a:ext uri="{FF2B5EF4-FFF2-40B4-BE49-F238E27FC236}">
-                <a16:creationId xmlns:a16="http://schemas.microsoft.com/office/drawing/2014/main" id="{98A87A1B-4C3D-5BB4-6449-1DB89F1926E3}"/>
-              </a:ext>
-            </a:extLst>
-          </p:cNvPr>
-          <p:cNvSpPr>
-            <a:spLocks noGrp="1"/>
-          </p:cNvSpPr>
-          <p:nvPr>
-            <p:ph type="body" sz="quarter" idx="34"/>
-          </p:nvPr>
-        </p:nvSpPr>
-        <p:spPr/>
-        <p:txBody>
-          <a:bodyPr/>
-          <a:lstStyle/>
-          <a:p>
-            <a:r>
-              <a:rPr lang="en-US" dirty="0"/>
-              <a:t>Product </a:t>
-            </a:r>
-          </a:p>
-          <a:p>
-            <a:r>
-              <a:rPr lang="en-US" dirty="0"/>
-              <a:t>Designer</a:t>
-            </a:r>
-          </a:p>
-        </p:txBody>
-      </p:sp>
-      <p:pic>
-        <p:nvPicPr>
-          <p:cNvPr id="40" name="Picture Placeholder 39" descr="Team member head shot&#10;">
-            <a:extLst>
-              <a:ext uri="{FF2B5EF4-FFF2-40B4-BE49-F238E27FC236}">
-                <a16:creationId xmlns:a16="http://schemas.microsoft.com/office/drawing/2014/main" id="{52D3D64F-21AD-0755-9EEF-13762D95D6E0}"/>
-              </a:ext>
-            </a:extLst>
-          </p:cNvPr>
-          <p:cNvPicPr>
-            <a:picLocks noGrp="1" noChangeAspect="1"/>
-          </p:cNvPicPr>
-          <p:nvPr>
-            <p:ph type="pic" sz="quarter" idx="15"/>
-          </p:nvPr>
-        </p:nvPicPr>
-        <p:blipFill rotWithShape="1">
-          <a:blip r:embed="rId6"/>
-          <a:srcRect t="2944" b="2944"/>
-          <a:stretch/>
-        </p:blipFill>
-        <p:spPr/>
-      </p:pic>
-      <p:pic>
-        <p:nvPicPr>
-          <p:cNvPr id="52" name="Picture Placeholder 51" descr="Team member head shot&#10;">
-            <a:extLst>
-              <a:ext uri="{FF2B5EF4-FFF2-40B4-BE49-F238E27FC236}">
-                <a16:creationId xmlns:a16="http://schemas.microsoft.com/office/drawing/2014/main" id="{22058AAC-5D9F-577D-B7B2-238391311514}"/>
-              </a:ext>
-            </a:extLst>
-          </p:cNvPr>
-          <p:cNvPicPr>
-            <a:picLocks noGrp="1" noChangeAspect="1"/>
-          </p:cNvPicPr>
-          <p:nvPr>
-            <p:ph type="pic" sz="quarter" idx="27"/>
-          </p:nvPr>
-        </p:nvPicPr>
-        <p:blipFill rotWithShape="1">
-          <a:blip r:embed="rId7"/>
-          <a:srcRect t="68" b="68"/>
-          <a:stretch/>
-        </p:blipFill>
-        <p:spPr/>
-      </p:pic>
-      <p:sp>
-        <p:nvSpPr>
-          <p:cNvPr id="14" name="Text Placeholder 13">
-            <a:extLst>
-              <a:ext uri="{FF2B5EF4-FFF2-40B4-BE49-F238E27FC236}">
-                <a16:creationId xmlns:a16="http://schemas.microsoft.com/office/drawing/2014/main" id="{519D9E81-2623-349E-904D-8BF6ECE353BA}"/>
-              </a:ext>
-            </a:extLst>
-          </p:cNvPr>
-          <p:cNvSpPr>
-            <a:spLocks noGrp="1"/>
-          </p:cNvSpPr>
-          <p:nvPr>
-            <p:ph type="body" sz="quarter" idx="23"/>
-          </p:nvPr>
-        </p:nvSpPr>
-        <p:spPr/>
-        <p:txBody>
-          <a:bodyPr/>
-          <a:lstStyle/>
-          <a:p>
-            <a:r>
-              <a:rPr lang="en-US" dirty="0"/>
-              <a:t>RAJESH SANTOSHI</a:t>
-            </a:r>
-          </a:p>
-        </p:txBody>
-      </p:sp>
-      <p:sp>
-        <p:nvSpPr>
-          <p:cNvPr id="15" name="Text Placeholder 14">
-            <a:extLst>
-              <a:ext uri="{FF2B5EF4-FFF2-40B4-BE49-F238E27FC236}">
-                <a16:creationId xmlns:a16="http://schemas.microsoft.com/office/drawing/2014/main" id="{2FC00352-D201-B54A-FE76-985161F19FEC}"/>
-              </a:ext>
-            </a:extLst>
-          </p:cNvPr>
-          <p:cNvSpPr>
-            <a:spLocks noGrp="1"/>
-          </p:cNvSpPr>
-          <p:nvPr>
-            <p:ph type="body" sz="quarter" idx="24"/>
-          </p:nvPr>
-        </p:nvSpPr>
-        <p:spPr/>
-        <p:txBody>
-          <a:bodyPr/>
-          <a:lstStyle/>
-          <a:p>
-            <a:r>
-              <a:rPr lang="en-US" dirty="0"/>
-              <a:t>VP Marketing​</a:t>
-            </a:r>
-          </a:p>
-        </p:txBody>
-      </p:sp>
-      <p:sp>
-        <p:nvSpPr>
-          <p:cNvPr id="27" name="Text Placeholder 26">
-            <a:extLst>
-              <a:ext uri="{FF2B5EF4-FFF2-40B4-BE49-F238E27FC236}">
-                <a16:creationId xmlns:a16="http://schemas.microsoft.com/office/drawing/2014/main" id="{C2D1179F-9CC5-E23D-37E2-BB999E68DE95}"/>
-              </a:ext>
-            </a:extLst>
-          </p:cNvPr>
-          <p:cNvSpPr>
-            <a:spLocks noGrp="1"/>
-          </p:cNvSpPr>
-          <p:nvPr>
-            <p:ph type="body" sz="quarter" idx="35"/>
-          </p:nvPr>
-        </p:nvSpPr>
-        <p:spPr/>
-        <p:txBody>
-          <a:bodyPr/>
-          <a:lstStyle/>
-          <a:p>
-            <a:r>
-              <a:rPr lang="en-US" dirty="0"/>
-              <a:t>ROBIN </a:t>
-            </a:r>
-          </a:p>
-          <a:p>
-            <a:r>
-              <a:rPr lang="en-US" dirty="0"/>
-              <a:t>KLINE</a:t>
-            </a:r>
-          </a:p>
-        </p:txBody>
-      </p:sp>
-      <p:sp>
-        <p:nvSpPr>
-          <p:cNvPr id="28" name="Text Placeholder 27">
-            <a:extLst>
-              <a:ext uri="{FF2B5EF4-FFF2-40B4-BE49-F238E27FC236}">
-                <a16:creationId xmlns:a16="http://schemas.microsoft.com/office/drawing/2014/main" id="{5D27B745-1B31-09CB-F001-4408E3D2F75A}"/>
-              </a:ext>
-            </a:extLst>
-          </p:cNvPr>
-          <p:cNvSpPr>
-            <a:spLocks noGrp="1"/>
-          </p:cNvSpPr>
-          <p:nvPr>
-            <p:ph type="body" sz="quarter" idx="36"/>
-          </p:nvPr>
-        </p:nvSpPr>
-        <p:spPr/>
-        <p:txBody>
-          <a:bodyPr/>
-          <a:lstStyle/>
-          <a:p>
-            <a:r>
-              <a:rPr lang="en-US" dirty="0"/>
-              <a:t>Content Developer</a:t>
-            </a:r>
-          </a:p>
-        </p:txBody>
-      </p:sp>
-      <p:pic>
-        <p:nvPicPr>
-          <p:cNvPr id="38" name="Picture Placeholder 37" descr="Team member head shot&#10;">
-            <a:extLst>
-              <a:ext uri="{FF2B5EF4-FFF2-40B4-BE49-F238E27FC236}">
-                <a16:creationId xmlns:a16="http://schemas.microsoft.com/office/drawing/2014/main" id="{E4C98BD3-8494-80AB-2E48-5F7B70FCDE48}"/>
-              </a:ext>
-            </a:extLst>
-          </p:cNvPr>
-          <p:cNvPicPr>
-            <a:picLocks noGrp="1" noChangeAspect="1"/>
-          </p:cNvPicPr>
-          <p:nvPr>
-            <p:ph type="pic" sz="quarter" idx="16"/>
-          </p:nvPr>
-        </p:nvPicPr>
-        <p:blipFill rotWithShape="1">
-          <a:blip r:embed="rId8"/>
-          <a:srcRect/>
-          <a:stretch/>
-        </p:blipFill>
-        <p:spPr/>
-      </p:pic>
-      <p:pic>
-        <p:nvPicPr>
-          <p:cNvPr id="54" name="Picture Placeholder 53" descr="Team member head shot&#10;">
-            <a:extLst>
-              <a:ext uri="{FF2B5EF4-FFF2-40B4-BE49-F238E27FC236}">
-                <a16:creationId xmlns:a16="http://schemas.microsoft.com/office/drawing/2014/main" id="{72EB0BF6-5AAA-BF98-00D4-C688D2CC92D1}"/>
-              </a:ext>
-            </a:extLst>
-          </p:cNvPr>
-          <p:cNvPicPr>
-            <a:picLocks noGrp="1" noChangeAspect="1"/>
-          </p:cNvPicPr>
-          <p:nvPr>
-            <p:ph type="pic" sz="quarter" idx="28"/>
-          </p:nvPr>
-        </p:nvPicPr>
-        <p:blipFill rotWithShape="1">
-          <a:blip r:embed="rId9"/>
-          <a:srcRect l="262" r="262"/>
-          <a:stretch/>
-        </p:blipFill>
-        <p:spPr/>
-      </p:pic>
-      <p:sp>
-        <p:nvSpPr>
-          <p:cNvPr id="3" name="Slide Number Placeholder 2">
-            <a:extLst>
-              <a:ext uri="{FF2B5EF4-FFF2-40B4-BE49-F238E27FC236}">
-                <a16:creationId xmlns:a16="http://schemas.microsoft.com/office/drawing/2014/main" id="{C11CC6B6-E9D4-1736-ABF6-727D2464A975}"/>
-              </a:ext>
-            </a:extLst>
-          </p:cNvPr>
-          <p:cNvSpPr>
-            <a:spLocks noGrp="1"/>
-          </p:cNvSpPr>
-          <p:nvPr>
-            <p:ph type="sldNum" sz="quarter" idx="12"/>
-          </p:nvPr>
-        </p:nvSpPr>
-        <p:spPr/>
-        <p:txBody>
-          <a:bodyPr/>
-          <a:lstStyle/>
-          <a:p>
-            <a:fld id="{294A09A9-5501-47C1-A89A-A340965A2BE2}" type="slidenum">
-              <a:rPr lang="en-US" smtClean="0"/>
-              <a:pPr/>
-              <a:t>10</a:t>
-            </a:fld>
-            <a:endParaRPr lang="en-US" dirty="0"/>
+              <a:t>“</a:t>
+            </a:r>
           </a:p>
         </p:txBody>
       </p:sp>
     </p:spTree>
     <p:extLst>
       <p:ext uri="{BB962C8B-B14F-4D97-AF65-F5344CB8AC3E}">
-        <p14:creationId xmlns:p14="http://schemas.microsoft.com/office/powerpoint/2010/main" val="1628771861"/>
+        <p14:creationId xmlns:p14="http://schemas.microsoft.com/office/powerpoint/2010/main" val="2113713740"/>
       </p:ext>
     </p:extLst>
   </p:cSld>
@@ -12565,10 +11928,10 @@
       </p:grpSpPr>
       <p:sp>
         <p:nvSpPr>
-          <p:cNvPr id="2" name="Title 1">
-            <a:extLst>
-              <a:ext uri="{FF2B5EF4-FFF2-40B4-BE49-F238E27FC236}">
-                <a16:creationId xmlns:a16="http://schemas.microsoft.com/office/drawing/2014/main" id="{08737D19-4D60-B5D0-74C9-46A5D81261BB}"/>
+          <p:cNvPr id="16" name="Title 15">
+            <a:extLst>
+              <a:ext uri="{FF2B5EF4-FFF2-40B4-BE49-F238E27FC236}">
+                <a16:creationId xmlns:a16="http://schemas.microsoft.com/office/drawing/2014/main" id="{599B5F29-ED3B-9B44-DBBE-FD28EE7733A7}"/>
               </a:ext>
             </a:extLst>
           </p:cNvPr>
@@ -12586,17 +11949,17 @@
           <a:p>
             <a:r>
               <a:rPr lang="en-US" dirty="0"/>
-              <a:t>PLAN FOR PRODUCT LAUNCH</a:t>
-            </a:r>
-          </a:p>
-        </p:txBody>
-      </p:sp>
-      <p:sp>
-        <p:nvSpPr>
-          <p:cNvPr id="7" name="Footer Placeholder 6">
-            <a:extLst>
-              <a:ext uri="{FF2B5EF4-FFF2-40B4-BE49-F238E27FC236}">
-                <a16:creationId xmlns:a16="http://schemas.microsoft.com/office/drawing/2014/main" id="{C9F924E8-B6E6-C266-842D-422148E57074}"/>
+              <a:t>MEET OUR TEAM</a:t>
+            </a:r>
+          </a:p>
+        </p:txBody>
+      </p:sp>
+      <p:sp>
+        <p:nvSpPr>
+          <p:cNvPr id="2" name="Footer Placeholder 1">
+            <a:extLst>
+              <a:ext uri="{FF2B5EF4-FFF2-40B4-BE49-F238E27FC236}">
+                <a16:creationId xmlns:a16="http://schemas.microsoft.com/office/drawing/2014/main" id="{91A8AD5F-DCF2-F71C-E7E2-C2FD42878531}"/>
               </a:ext>
             </a:extLst>
           </p:cNvPr>
@@ -12619,20 +11982,49 @@
           </a:p>
         </p:txBody>
       </p:sp>
-      <p:sp>
-        <p:nvSpPr>
-          <p:cNvPr id="3" name="Text Placeholder 2">
-            <a:extLst>
-              <a:ext uri="{FF2B5EF4-FFF2-40B4-BE49-F238E27FC236}">
-                <a16:creationId xmlns:a16="http://schemas.microsoft.com/office/drawing/2014/main" id="{9B0814BF-E9DC-8615-1CF0-1112CBD60A66}"/>
-              </a:ext>
-            </a:extLst>
-          </p:cNvPr>
-          <p:cNvSpPr>
-            <a:spLocks noGrp="1"/>
-          </p:cNvSpPr>
-          <p:nvPr>
-            <p:ph type="body" idx="1"/>
+      <p:pic>
+        <p:nvPicPr>
+          <p:cNvPr id="18" name="Picture Placeholder 17" descr="Team member head shot&#10;">
+            <a:extLst>
+              <a:ext uri="{FF2B5EF4-FFF2-40B4-BE49-F238E27FC236}">
+                <a16:creationId xmlns:a16="http://schemas.microsoft.com/office/drawing/2014/main" id="{0ECDCC4E-4E7F-362D-521D-CE5203600261}"/>
+              </a:ext>
+            </a:extLst>
+          </p:cNvPr>
+          <p:cNvPicPr>
+            <a:picLocks noGrp="1" noChangeAspect="1"/>
+          </p:cNvPicPr>
+          <p:nvPr>
+            <p:ph type="pic" sz="quarter" idx="13"/>
+          </p:nvPr>
+        </p:nvPicPr>
+        <p:blipFill rotWithShape="1">
+          <a:blip r:embed="rId2" cstate="email">
+            <a:extLst>
+              <a:ext uri="{28A0092B-C50C-407E-A947-70E740481C1C}">
+                <a14:useLocalDpi xmlns:a14="http://schemas.microsoft.com/office/drawing/2010/main"/>
+              </a:ext>
+            </a:extLst>
+          </a:blip>
+          <a:srcRect/>
+          <a:stretch/>
+        </p:blipFill>
+        <p:spPr/>
+      </p:pic>
+      <p:sp>
+        <p:nvSpPr>
+          <p:cNvPr id="8" name="Text Placeholder 7">
+            <a:extLst>
+              <a:ext uri="{FF2B5EF4-FFF2-40B4-BE49-F238E27FC236}">
+                <a16:creationId xmlns:a16="http://schemas.microsoft.com/office/drawing/2014/main" id="{F07ACA27-076A-FAA7-417C-5BC0A85F36AF}"/>
+              </a:ext>
+            </a:extLst>
+          </p:cNvPr>
+          <p:cNvSpPr>
+            <a:spLocks noGrp="1"/>
+          </p:cNvSpPr>
+          <p:nvPr>
+            <p:ph type="body" sz="quarter" idx="17"/>
           </p:nvPr>
         </p:nvSpPr>
         <p:spPr/>
@@ -12642,25 +12034,25 @@
           <a:p>
             <a:r>
               <a:rPr lang="en-US" dirty="0"/>
-              <a:t>PLANNING</a:t>
-            </a:r>
-          </a:p>
-        </p:txBody>
-      </p:sp>
-      <p:sp>
-        <p:nvSpPr>
-          <p:cNvPr id="23" name="Content Placeholder 22">
-            <a:extLst>
-              <a:ext uri="{FF2B5EF4-FFF2-40B4-BE49-F238E27FC236}">
-                <a16:creationId xmlns:a16="http://schemas.microsoft.com/office/drawing/2014/main" id="{2C051FD2-C541-D8EE-D263-DFD01AD1C602}"/>
-              </a:ext>
-            </a:extLst>
-          </p:cNvPr>
-          <p:cNvSpPr>
-            <a:spLocks noGrp="1"/>
-          </p:cNvSpPr>
-          <p:nvPr>
-            <p:ph sz="half" idx="2"/>
+              <a:t>TAKUMA HAYASHI​</a:t>
+            </a:r>
+          </a:p>
+        </p:txBody>
+      </p:sp>
+      <p:sp>
+        <p:nvSpPr>
+          <p:cNvPr id="9" name="Text Placeholder 8">
+            <a:extLst>
+              <a:ext uri="{FF2B5EF4-FFF2-40B4-BE49-F238E27FC236}">
+                <a16:creationId xmlns:a16="http://schemas.microsoft.com/office/drawing/2014/main" id="{D59ACCB8-2E44-8B01-9BCD-7AD37DA20F2E}"/>
+              </a:ext>
+            </a:extLst>
+          </p:cNvPr>
+          <p:cNvSpPr>
+            <a:spLocks noGrp="1"/>
+          </p:cNvSpPr>
+          <p:nvPr>
+            <p:ph type="body" sz="quarter" idx="18"/>
           </p:nvPr>
         </p:nvSpPr>
         <p:spPr/>
@@ -12670,28 +12062,54 @@
           <a:p>
             <a:r>
               <a:rPr lang="en-US" dirty="0"/>
-              <a:t>Synergize scalable e-commerce</a:t>
-            </a:r>
-          </a:p>
-          <a:p>
-            <a:endParaRPr lang="en-US" dirty="0"/>
-          </a:p>
-        </p:txBody>
-      </p:sp>
-      <p:sp>
-        <p:nvSpPr>
-          <p:cNvPr id="5" name="Text Placeholder 4">
-            <a:extLst>
-              <a:ext uri="{FF2B5EF4-FFF2-40B4-BE49-F238E27FC236}">
-                <a16:creationId xmlns:a16="http://schemas.microsoft.com/office/drawing/2014/main" id="{4714EE7D-83C7-DE47-C100-0904BB907007}"/>
-              </a:ext>
-            </a:extLst>
-          </p:cNvPr>
-          <p:cNvSpPr>
-            <a:spLocks noGrp="1"/>
-          </p:cNvSpPr>
-          <p:nvPr>
-            <p:ph type="body" sz="quarter" idx="3"/>
+              <a:t>President</a:t>
+            </a:r>
+          </a:p>
+        </p:txBody>
+      </p:sp>
+      <p:pic>
+        <p:nvPicPr>
+          <p:cNvPr id="20" name="Picture Placeholder 19" descr="Team member head shot&#10;">
+            <a:extLst>
+              <a:ext uri="{FF2B5EF4-FFF2-40B4-BE49-F238E27FC236}">
+                <a16:creationId xmlns:a16="http://schemas.microsoft.com/office/drawing/2014/main" id="{FB9E1045-489B-E8C3-F476-6AF4ED23D929}"/>
+              </a:ext>
+            </a:extLst>
+          </p:cNvPr>
+          <p:cNvPicPr>
+            <a:picLocks noGrp="1" noChangeAspect="1"/>
+          </p:cNvPicPr>
+          <p:nvPr>
+            <p:ph type="pic" sz="quarter" idx="14"/>
+          </p:nvPr>
+        </p:nvPicPr>
+        <p:blipFill rotWithShape="1">
+          <a:blip r:embed="rId3" cstate="email">
+            <a:extLst>
+              <a:ext uri="{28A0092B-C50C-407E-A947-70E740481C1C}">
+                <a14:useLocalDpi xmlns:a14="http://schemas.microsoft.com/office/drawing/2010/main"/>
+              </a:ext>
+            </a:extLst>
+          </a:blip>
+          <a:srcRect/>
+          <a:stretch/>
+        </p:blipFill>
+        <p:spPr/>
+      </p:pic>
+      <p:sp>
+        <p:nvSpPr>
+          <p:cNvPr id="10" name="Text Placeholder 9">
+            <a:extLst>
+              <a:ext uri="{FF2B5EF4-FFF2-40B4-BE49-F238E27FC236}">
+                <a16:creationId xmlns:a16="http://schemas.microsoft.com/office/drawing/2014/main" id="{5670C16D-9661-482A-986D-0D6CB98AB869}"/>
+              </a:ext>
+            </a:extLst>
+          </p:cNvPr>
+          <p:cNvSpPr>
+            <a:spLocks noGrp="1"/>
+          </p:cNvSpPr>
+          <p:nvPr>
+            <p:ph type="body" sz="quarter" idx="19"/>
           </p:nvPr>
         </p:nvSpPr>
         <p:spPr/>
@@ -12701,25 +12119,25 @@
           <a:p>
             <a:r>
               <a:rPr lang="en-US" dirty="0"/>
-              <a:t>MARKETING</a:t>
-            </a:r>
-          </a:p>
-        </p:txBody>
-      </p:sp>
-      <p:sp>
-        <p:nvSpPr>
-          <p:cNvPr id="24" name="Content Placeholder 23">
-            <a:extLst>
-              <a:ext uri="{FF2B5EF4-FFF2-40B4-BE49-F238E27FC236}">
-                <a16:creationId xmlns:a16="http://schemas.microsoft.com/office/drawing/2014/main" id="{61DE34F0-9D00-D163-584E-9738310DB6BC}"/>
-              </a:ext>
-            </a:extLst>
-          </p:cNvPr>
-          <p:cNvSpPr>
-            <a:spLocks noGrp="1"/>
-          </p:cNvSpPr>
-          <p:nvPr>
-            <p:ph sz="quarter" idx="4"/>
+              <a:t>MIRJAM NILSSON</a:t>
+            </a:r>
+          </a:p>
+        </p:txBody>
+      </p:sp>
+      <p:sp>
+        <p:nvSpPr>
+          <p:cNvPr id="11" name="Text Placeholder 10">
+            <a:extLst>
+              <a:ext uri="{FF2B5EF4-FFF2-40B4-BE49-F238E27FC236}">
+                <a16:creationId xmlns:a16="http://schemas.microsoft.com/office/drawing/2014/main" id="{22115526-AEC6-C024-712E-E6CC8FB60E4D}"/>
+              </a:ext>
+            </a:extLst>
+          </p:cNvPr>
+          <p:cNvSpPr>
+            <a:spLocks noGrp="1"/>
+          </p:cNvSpPr>
+          <p:nvPr>
+            <p:ph type="body" sz="quarter" idx="20"/>
           </p:nvPr>
         </p:nvSpPr>
         <p:spPr/>
@@ -12727,28 +12145,56 @@
           <a:bodyPr/>
           <a:lstStyle/>
           <a:p>
-            <a:pPr lvl="0"/>
             <a:r>
               <a:rPr lang="en-US" dirty="0"/>
-              <a:t>Disseminate standardized metrics</a:t>
-            </a:r>
-          </a:p>
-        </p:txBody>
-      </p:sp>
-      <p:sp>
-        <p:nvSpPr>
-          <p:cNvPr id="9" name="Text Placeholder 8">
-            <a:extLst>
-              <a:ext uri="{FF2B5EF4-FFF2-40B4-BE49-F238E27FC236}">
-                <a16:creationId xmlns:a16="http://schemas.microsoft.com/office/drawing/2014/main" id="{310ADB9E-1121-2450-35D1-8486C9BC3613}"/>
-              </a:ext>
-            </a:extLst>
-          </p:cNvPr>
-          <p:cNvSpPr>
-            <a:spLocks noGrp="1"/>
-          </p:cNvSpPr>
-          <p:nvPr>
-            <p:ph type="body" sz="quarter" idx="13"/>
+              <a:t>Chief Executive Officer​</a:t>
+            </a:r>
+          </a:p>
+        </p:txBody>
+      </p:sp>
+      <p:pic>
+        <p:nvPicPr>
+          <p:cNvPr id="22" name="Picture Placeholder 21" descr="Team member head shot&#10;">
+            <a:extLst>
+              <a:ext uri="{FF2B5EF4-FFF2-40B4-BE49-F238E27FC236}">
+                <a16:creationId xmlns:a16="http://schemas.microsoft.com/office/drawing/2014/main" id="{9517044C-59DB-C2E9-E5E2-0D8D29929762}"/>
+              </a:ext>
+            </a:extLst>
+          </p:cNvPr>
+          <p:cNvPicPr>
+            <a:picLocks noGrp="1" noChangeAspect="1"/>
+          </p:cNvPicPr>
+          <p:nvPr>
+            <p:ph type="pic" sz="quarter" idx="15"/>
+          </p:nvPr>
+        </p:nvPicPr>
+        <p:blipFill rotWithShape="1">
+          <a:blip r:embed="rId4" cstate="email">
+            <a:extLst>
+              <a:ext uri="{28A0092B-C50C-407E-A947-70E740481C1C}">
+                <a14:useLocalDpi xmlns:a14="http://schemas.microsoft.com/office/drawing/2010/main"/>
+              </a:ext>
+            </a:extLst>
+          </a:blip>
+          <a:srcRect/>
+          <a:stretch/>
+        </p:blipFill>
+        <p:spPr/>
+      </p:pic>
+      <p:sp>
+        <p:nvSpPr>
+          <p:cNvPr id="12" name="Text Placeholder 11">
+            <a:extLst>
+              <a:ext uri="{FF2B5EF4-FFF2-40B4-BE49-F238E27FC236}">
+                <a16:creationId xmlns:a16="http://schemas.microsoft.com/office/drawing/2014/main" id="{E26CB388-D0E5-9548-A57B-8A5352089E15}"/>
+              </a:ext>
+            </a:extLst>
+          </p:cNvPr>
+          <p:cNvSpPr>
+            <a:spLocks noGrp="1"/>
+          </p:cNvSpPr>
+          <p:nvPr>
+            <p:ph type="body" sz="quarter" idx="21"/>
           </p:nvPr>
         </p:nvSpPr>
         <p:spPr/>
@@ -12758,25 +12204,25 @@
           <a:p>
             <a:r>
               <a:rPr lang="en-US" dirty="0"/>
-              <a:t>DESIGN</a:t>
-            </a:r>
-          </a:p>
-        </p:txBody>
-      </p:sp>
-      <p:sp>
-        <p:nvSpPr>
-          <p:cNvPr id="25" name="Content Placeholder 24">
-            <a:extLst>
-              <a:ext uri="{FF2B5EF4-FFF2-40B4-BE49-F238E27FC236}">
-                <a16:creationId xmlns:a16="http://schemas.microsoft.com/office/drawing/2014/main" id="{3F1B077F-4F6F-1F99-B5B6-BF27786BBA9F}"/>
-              </a:ext>
-            </a:extLst>
-          </p:cNvPr>
-          <p:cNvSpPr>
-            <a:spLocks noGrp="1"/>
-          </p:cNvSpPr>
-          <p:nvPr>
-            <p:ph sz="quarter" idx="14"/>
+              <a:t>FLORA BERGGREN</a:t>
+            </a:r>
+          </a:p>
+        </p:txBody>
+      </p:sp>
+      <p:sp>
+        <p:nvSpPr>
+          <p:cNvPr id="13" name="Text Placeholder 12">
+            <a:extLst>
+              <a:ext uri="{FF2B5EF4-FFF2-40B4-BE49-F238E27FC236}">
+                <a16:creationId xmlns:a16="http://schemas.microsoft.com/office/drawing/2014/main" id="{7DA1EEF4-1C46-B9FD-302F-61FC0265F748}"/>
+              </a:ext>
+            </a:extLst>
+          </p:cNvPr>
+          <p:cNvSpPr>
+            <a:spLocks noGrp="1"/>
+          </p:cNvSpPr>
+          <p:nvPr>
+            <p:ph type="body" sz="quarter" idx="22"/>
           </p:nvPr>
         </p:nvSpPr>
         <p:spPr/>
@@ -12784,35 +12230,56 @@
           <a:bodyPr/>
           <a:lstStyle/>
           <a:p>
-            <a:pPr lvl="0"/>
             <a:r>
               <a:rPr lang="en-US" dirty="0"/>
-              <a:t>Coordinate </a:t>
-            </a:r>
-            <a:br>
-              <a:rPr lang="en-US" dirty="0"/>
-            </a:br>
-            <a:r>
-              <a:rPr lang="en-US" dirty="0"/>
-              <a:t>e-business applications</a:t>
-            </a:r>
-          </a:p>
-        </p:txBody>
-      </p:sp>
-      <p:sp>
-        <p:nvSpPr>
-          <p:cNvPr id="11" name="Text Placeholder 10">
-            <a:extLst>
-              <a:ext uri="{FF2B5EF4-FFF2-40B4-BE49-F238E27FC236}">
-                <a16:creationId xmlns:a16="http://schemas.microsoft.com/office/drawing/2014/main" id="{FAA4C0B8-3B41-049C-EA95-B5BC48C10C66}"/>
-              </a:ext>
-            </a:extLst>
-          </p:cNvPr>
-          <p:cNvSpPr>
-            <a:spLocks noGrp="1"/>
-          </p:cNvSpPr>
-          <p:nvPr>
-            <p:ph type="body" sz="quarter" idx="15"/>
+              <a:t>Chief Operations Officer​</a:t>
+            </a:r>
+          </a:p>
+        </p:txBody>
+      </p:sp>
+      <p:pic>
+        <p:nvPicPr>
+          <p:cNvPr id="24" name="Picture Placeholder 23" descr="Team member head shot&#10;">
+            <a:extLst>
+              <a:ext uri="{FF2B5EF4-FFF2-40B4-BE49-F238E27FC236}">
+                <a16:creationId xmlns:a16="http://schemas.microsoft.com/office/drawing/2014/main" id="{6112D1C1-243D-95D0-B45D-1BF79DC7E3B3}"/>
+              </a:ext>
+            </a:extLst>
+          </p:cNvPr>
+          <p:cNvPicPr>
+            <a:picLocks noGrp="1" noChangeAspect="1"/>
+          </p:cNvPicPr>
+          <p:nvPr>
+            <p:ph type="pic" sz="quarter" idx="16"/>
+          </p:nvPr>
+        </p:nvPicPr>
+        <p:blipFill rotWithShape="1">
+          <a:blip r:embed="rId5" cstate="email">
+            <a:extLst>
+              <a:ext uri="{28A0092B-C50C-407E-A947-70E740481C1C}">
+                <a14:useLocalDpi xmlns:a14="http://schemas.microsoft.com/office/drawing/2010/main"/>
+              </a:ext>
+            </a:extLst>
+          </a:blip>
+          <a:srcRect/>
+          <a:stretch/>
+        </p:blipFill>
+        <p:spPr/>
+      </p:pic>
+      <p:sp>
+        <p:nvSpPr>
+          <p:cNvPr id="14" name="Text Placeholder 13">
+            <a:extLst>
+              <a:ext uri="{FF2B5EF4-FFF2-40B4-BE49-F238E27FC236}">
+                <a16:creationId xmlns:a16="http://schemas.microsoft.com/office/drawing/2014/main" id="{519D9E81-2623-349E-904D-8BF6ECE353BA}"/>
+              </a:ext>
+            </a:extLst>
+          </p:cNvPr>
+          <p:cNvSpPr>
+            <a:spLocks noGrp="1"/>
+          </p:cNvSpPr>
+          <p:nvPr>
+            <p:ph type="body" sz="quarter" idx="23"/>
           </p:nvPr>
         </p:nvSpPr>
         <p:spPr/>
@@ -12822,25 +12289,25 @@
           <a:p>
             <a:r>
               <a:rPr lang="en-US" dirty="0"/>
-              <a:t>STRATEGY</a:t>
-            </a:r>
-          </a:p>
-        </p:txBody>
-      </p:sp>
-      <p:sp>
-        <p:nvSpPr>
-          <p:cNvPr id="26" name="Content Placeholder 25">
-            <a:extLst>
-              <a:ext uri="{FF2B5EF4-FFF2-40B4-BE49-F238E27FC236}">
-                <a16:creationId xmlns:a16="http://schemas.microsoft.com/office/drawing/2014/main" id="{6ACBEE98-EEED-F89F-8CC0-E8497F8E546E}"/>
-              </a:ext>
-            </a:extLst>
-          </p:cNvPr>
-          <p:cNvSpPr>
-            <a:spLocks noGrp="1"/>
-          </p:cNvSpPr>
-          <p:nvPr>
-            <p:ph sz="quarter" idx="16"/>
+              <a:t>RAJESH SANTOSHI</a:t>
+            </a:r>
+          </a:p>
+        </p:txBody>
+      </p:sp>
+      <p:sp>
+        <p:nvSpPr>
+          <p:cNvPr id="15" name="Text Placeholder 14">
+            <a:extLst>
+              <a:ext uri="{FF2B5EF4-FFF2-40B4-BE49-F238E27FC236}">
+                <a16:creationId xmlns:a16="http://schemas.microsoft.com/office/drawing/2014/main" id="{2FC00352-D201-B54A-FE76-985161F19FEC}"/>
+              </a:ext>
+            </a:extLst>
+          </p:cNvPr>
+          <p:cNvSpPr>
+            <a:spLocks noGrp="1"/>
+          </p:cNvSpPr>
+          <p:nvPr>
+            <p:ph type="body" sz="quarter" idx="24"/>
           </p:nvPr>
         </p:nvSpPr>
         <p:spPr/>
@@ -12848,84 +12315,19 @@
           <a:bodyPr/>
           <a:lstStyle/>
           <a:p>
-            <a:pPr lvl="0"/>
             <a:r>
               <a:rPr lang="en-US" dirty="0"/>
-              <a:t>Foster holistically superior methodologies</a:t>
-            </a:r>
-          </a:p>
-        </p:txBody>
-      </p:sp>
-      <p:sp>
-        <p:nvSpPr>
-          <p:cNvPr id="13" name="Text Placeholder 12">
-            <a:extLst>
-              <a:ext uri="{FF2B5EF4-FFF2-40B4-BE49-F238E27FC236}">
-                <a16:creationId xmlns:a16="http://schemas.microsoft.com/office/drawing/2014/main" id="{8850A56B-786B-E4E2-77AC-8193D264E2FE}"/>
-              </a:ext>
-            </a:extLst>
-          </p:cNvPr>
-          <p:cNvSpPr>
-            <a:spLocks noGrp="1"/>
-          </p:cNvSpPr>
-          <p:nvPr>
-            <p:ph type="body" sz="quarter" idx="17"/>
-          </p:nvPr>
-        </p:nvSpPr>
-        <p:spPr/>
-        <p:txBody>
-          <a:bodyPr/>
-          <a:lstStyle/>
-          <a:p>
-            <a:r>
-              <a:rPr lang="en-US" dirty="0"/>
-              <a:t>LAUNCH</a:t>
-            </a:r>
-          </a:p>
-        </p:txBody>
-      </p:sp>
-      <p:sp>
-        <p:nvSpPr>
-          <p:cNvPr id="27" name="Content Placeholder 26">
-            <a:extLst>
-              <a:ext uri="{FF2B5EF4-FFF2-40B4-BE49-F238E27FC236}">
-                <a16:creationId xmlns:a16="http://schemas.microsoft.com/office/drawing/2014/main" id="{5D63848E-7E38-C88A-D15E-40DF95AB07BB}"/>
-              </a:ext>
-            </a:extLst>
-          </p:cNvPr>
-          <p:cNvSpPr>
-            <a:spLocks noGrp="1"/>
-          </p:cNvSpPr>
-          <p:nvPr>
-            <p:ph sz="quarter" idx="18"/>
-          </p:nvPr>
-        </p:nvSpPr>
-        <p:spPr/>
-        <p:txBody>
-          <a:bodyPr/>
-          <a:lstStyle/>
-          <a:p>
-            <a:pPr lvl="0"/>
-            <a:r>
-              <a:rPr lang="en-US" dirty="0"/>
-              <a:t>Deploy strategic networks with compelling </a:t>
-            </a:r>
-            <a:br>
-              <a:rPr lang="en-US" dirty="0"/>
-            </a:br>
-            <a:r>
-              <a:rPr lang="en-US" dirty="0"/>
-              <a:t>e-business needs</a:t>
-            </a:r>
-          </a:p>
-        </p:txBody>
-      </p:sp>
-      <p:sp>
-        <p:nvSpPr>
-          <p:cNvPr id="8" name="Slide Number Placeholder 7">
-            <a:extLst>
-              <a:ext uri="{FF2B5EF4-FFF2-40B4-BE49-F238E27FC236}">
-                <a16:creationId xmlns:a16="http://schemas.microsoft.com/office/drawing/2014/main" id="{60DE4CC7-0F16-896F-1EBA-F387E12A24C3}"/>
+              <a:t>VP Marketing​</a:t>
+            </a:r>
+          </a:p>
+        </p:txBody>
+      </p:sp>
+      <p:sp>
+        <p:nvSpPr>
+          <p:cNvPr id="3" name="Slide Number Placeholder 2">
+            <a:extLst>
+              <a:ext uri="{FF2B5EF4-FFF2-40B4-BE49-F238E27FC236}">
+                <a16:creationId xmlns:a16="http://schemas.microsoft.com/office/drawing/2014/main" id="{C11CC6B6-E9D4-1736-ABF6-727D2464A975}"/>
               </a:ext>
             </a:extLst>
           </p:cNvPr>
@@ -12953,7 +12355,7 @@
     </p:spTree>
     <p:extLst>
       <p:ext uri="{BB962C8B-B14F-4D97-AF65-F5344CB8AC3E}">
-        <p14:creationId xmlns:p14="http://schemas.microsoft.com/office/powerpoint/2010/main" val="3008749983"/>
+        <p14:creationId xmlns:p14="http://schemas.microsoft.com/office/powerpoint/2010/main" val="4028410468"/>
       </p:ext>
     </p:extLst>
   </p:cSld>
@@ -12982,10 +12384,10 @@
       </p:grpSpPr>
       <p:sp>
         <p:nvSpPr>
-          <p:cNvPr id="43" name="Title 42">
-            <a:extLst>
-              <a:ext uri="{FF2B5EF4-FFF2-40B4-BE49-F238E27FC236}">
-                <a16:creationId xmlns:a16="http://schemas.microsoft.com/office/drawing/2014/main" id="{6F402D0D-1253-FDCF-200C-358D2373CCEA}"/>
+          <p:cNvPr id="16" name="Title 15">
+            <a:extLst>
+              <a:ext uri="{FF2B5EF4-FFF2-40B4-BE49-F238E27FC236}">
+                <a16:creationId xmlns:a16="http://schemas.microsoft.com/office/drawing/2014/main" id="{599B5F29-ED3B-9B44-DBBE-FD28EE7733A7}"/>
               </a:ext>
             </a:extLst>
           </p:cNvPr>
@@ -13003,17 +12405,17 @@
           <a:p>
             <a:r>
               <a:rPr lang="en-US" dirty="0"/>
-              <a:t>TIMELINE</a:t>
-            </a:r>
-          </a:p>
-        </p:txBody>
-      </p:sp>
-      <p:sp>
-        <p:nvSpPr>
-          <p:cNvPr id="8" name="Footer Placeholder 7">
-            <a:extLst>
-              <a:ext uri="{FF2B5EF4-FFF2-40B4-BE49-F238E27FC236}">
-                <a16:creationId xmlns:a16="http://schemas.microsoft.com/office/drawing/2014/main" id="{A82C041C-BA32-9DB5-9158-1264919F5376}"/>
+              <a:t>MEET OUR EXTENDED TEAM</a:t>
+            </a:r>
+          </a:p>
+        </p:txBody>
+      </p:sp>
+      <p:sp>
+        <p:nvSpPr>
+          <p:cNvPr id="2" name="Footer Placeholder 1">
+            <a:extLst>
+              <a:ext uri="{FF2B5EF4-FFF2-40B4-BE49-F238E27FC236}">
+                <a16:creationId xmlns:a16="http://schemas.microsoft.com/office/drawing/2014/main" id="{91A8AD5F-DCF2-F71C-E7E2-C2FD42878531}"/>
               </a:ext>
             </a:extLst>
           </p:cNvPr>
@@ -13038,18 +12440,18 @@
       </p:sp>
       <p:sp>
         <p:nvSpPr>
-          <p:cNvPr id="2" name="Text Placeholder 1">
-            <a:extLst>
-              <a:ext uri="{FF2B5EF4-FFF2-40B4-BE49-F238E27FC236}">
-                <a16:creationId xmlns:a16="http://schemas.microsoft.com/office/drawing/2014/main" id="{0649137D-2A6C-3A81-F639-FA3C26C76D3F}"/>
-              </a:ext>
-            </a:extLst>
-          </p:cNvPr>
-          <p:cNvSpPr>
-            <a:spLocks noGrp="1"/>
-          </p:cNvSpPr>
-          <p:nvPr>
-            <p:ph type="body" sz="quarter" idx="13"/>
+          <p:cNvPr id="8" name="Text Placeholder 7">
+            <a:extLst>
+              <a:ext uri="{FF2B5EF4-FFF2-40B4-BE49-F238E27FC236}">
+                <a16:creationId xmlns:a16="http://schemas.microsoft.com/office/drawing/2014/main" id="{F07ACA27-076A-FAA7-417C-5BC0A85F36AF}"/>
+              </a:ext>
+            </a:extLst>
+          </p:cNvPr>
+          <p:cNvSpPr>
+            <a:spLocks noGrp="1"/>
+          </p:cNvSpPr>
+          <p:nvPr>
+            <p:ph type="body" sz="quarter" idx="17"/>
           </p:nvPr>
         </p:nvSpPr>
         <p:spPr/>
@@ -13059,17 +12461,17 @@
           <a:p>
             <a:r>
               <a:rPr lang="en-US" dirty="0"/>
-              <a:t>SEP 20XX</a:t>
-            </a:r>
-          </a:p>
-        </p:txBody>
-      </p:sp>
-      <p:sp>
-        <p:nvSpPr>
-          <p:cNvPr id="10" name="Text Placeholder 9">
-            <a:extLst>
-              <a:ext uri="{FF2B5EF4-FFF2-40B4-BE49-F238E27FC236}">
-                <a16:creationId xmlns:a16="http://schemas.microsoft.com/office/drawing/2014/main" id="{483C06D0-E1DB-BF5B-0723-E86ECD593FA6}"/>
+              <a:t>TAKUMA HAYASHI​</a:t>
+            </a:r>
+          </a:p>
+        </p:txBody>
+      </p:sp>
+      <p:sp>
+        <p:nvSpPr>
+          <p:cNvPr id="9" name="Text Placeholder 8">
+            <a:extLst>
+              <a:ext uri="{FF2B5EF4-FFF2-40B4-BE49-F238E27FC236}">
+                <a16:creationId xmlns:a16="http://schemas.microsoft.com/office/drawing/2014/main" id="{D59ACCB8-2E44-8B01-9BCD-7AD37DA20F2E}"/>
               </a:ext>
             </a:extLst>
           </p:cNvPr>
@@ -13085,89 +12487,27 @@
           <a:bodyPr/>
           <a:lstStyle/>
           <a:p>
-            <a:pPr lvl="0"/>
             <a:r>
               <a:rPr lang="en-US" dirty="0"/>
-              <a:t>Synergize </a:t>
-            </a:r>
-          </a:p>
-          <a:p>
-            <a:pPr lvl="0"/>
-            <a:r>
-              <a:rPr lang="en-US" b="1" dirty="0"/>
-              <a:t>scalable </a:t>
-            </a:r>
-          </a:p>
-          <a:p>
-            <a:pPr lvl="0"/>
-            <a:r>
-              <a:rPr lang="en-US" b="1" dirty="0"/>
-              <a:t>e-commerce</a:t>
-            </a:r>
-          </a:p>
-        </p:txBody>
-      </p:sp>
-      <p:cxnSp>
-        <p:nvCxnSpPr>
-          <p:cNvPr id="47" name="Straight Arrow Connector 44" descr="Connecting arrow">
-            <a:extLst>
-              <a:ext uri="{FF2B5EF4-FFF2-40B4-BE49-F238E27FC236}">
-                <a16:creationId xmlns:a16="http://schemas.microsoft.com/office/drawing/2014/main" id="{BC3D7D22-1710-7586-51EC-807950387573}"/>
-              </a:ext>
-            </a:extLst>
-          </p:cNvPr>
-          <p:cNvCxnSpPr>
-            <a:cxnSpLocks/>
-            <a:stCxn id="5" idx="3"/>
-            <a:endCxn id="3" idx="0"/>
-          </p:cNvCxnSpPr>
-          <p:nvPr/>
-        </p:nvCxnSpPr>
-        <p:spPr>
-          <a:xfrm rot="5400000" flipH="1" flipV="1">
-            <a:off x="3791601" y="2620051"/>
-            <a:ext cx="558161" cy="1966011"/>
-          </a:xfrm>
-          <a:prstGeom prst="bentConnector2">
-            <a:avLst/>
-          </a:prstGeom>
-          <a:ln w="12700">
-            <a:solidFill>
-              <a:schemeClr val="tx1"/>
-            </a:solidFill>
-            <a:prstDash val="dash"/>
-            <a:tailEnd type="triangle" w="lg" len="lg"/>
-          </a:ln>
-        </p:spPr>
-        <p:style>
-          <a:lnRef idx="1">
-            <a:schemeClr val="accent1"/>
-          </a:lnRef>
-          <a:fillRef idx="0">
-            <a:schemeClr val="accent1"/>
-          </a:fillRef>
-          <a:effectRef idx="0">
-            <a:schemeClr val="accent1"/>
-          </a:effectRef>
-          <a:fontRef idx="minor">
-            <a:schemeClr val="tx1"/>
-          </a:fontRef>
-        </p:style>
-      </p:cxnSp>
-      <p:sp>
-        <p:nvSpPr>
-          <p:cNvPr id="3" name="Text Placeholder 2">
-            <a:extLst>
-              <a:ext uri="{FF2B5EF4-FFF2-40B4-BE49-F238E27FC236}">
-                <a16:creationId xmlns:a16="http://schemas.microsoft.com/office/drawing/2014/main" id="{3BAC312B-0248-777F-AEB1-4F76CAA95ABF}"/>
-              </a:ext>
-            </a:extLst>
-          </p:cNvPr>
-          <p:cNvSpPr>
-            <a:spLocks noGrp="1"/>
-          </p:cNvSpPr>
-          <p:nvPr>
-            <p:ph type="body" sz="quarter" idx="14"/>
+              <a:t>President</a:t>
+            </a:r>
+          </a:p>
+        </p:txBody>
+      </p:sp>
+      <p:sp>
+        <p:nvSpPr>
+          <p:cNvPr id="17" name="Text Placeholder 16">
+            <a:extLst>
+              <a:ext uri="{FF2B5EF4-FFF2-40B4-BE49-F238E27FC236}">
+                <a16:creationId xmlns:a16="http://schemas.microsoft.com/office/drawing/2014/main" id="{9802C12A-D232-CD35-1180-8544916BCE2B}"/>
+              </a:ext>
+            </a:extLst>
+          </p:cNvPr>
+          <p:cNvSpPr>
+            <a:spLocks noGrp="1"/>
+          </p:cNvSpPr>
+          <p:nvPr>
+            <p:ph type="body" sz="quarter" idx="29"/>
           </p:nvPr>
         </p:nvSpPr>
         <p:spPr/>
@@ -13177,25 +12517,25 @@
           <a:p>
             <a:r>
               <a:rPr lang="en-US" dirty="0"/>
-              <a:t>JAN 20XX</a:t>
-            </a:r>
-          </a:p>
-        </p:txBody>
-      </p:sp>
-      <p:sp>
-        <p:nvSpPr>
-          <p:cNvPr id="11" name="Text Placeholder 10">
-            <a:extLst>
-              <a:ext uri="{FF2B5EF4-FFF2-40B4-BE49-F238E27FC236}">
-                <a16:creationId xmlns:a16="http://schemas.microsoft.com/office/drawing/2014/main" id="{763E08B0-2334-33D6-E6CC-5D7120AD82A8}"/>
-              </a:ext>
-            </a:extLst>
-          </p:cNvPr>
-          <p:cNvSpPr>
-            <a:spLocks noGrp="1"/>
-          </p:cNvSpPr>
-          <p:nvPr>
-            <p:ph type="body" sz="quarter" idx="19"/>
+              <a:t>GRAHAM BARNES</a:t>
+            </a:r>
+          </a:p>
+        </p:txBody>
+      </p:sp>
+      <p:sp>
+        <p:nvSpPr>
+          <p:cNvPr id="19" name="Text Placeholder 18">
+            <a:extLst>
+              <a:ext uri="{FF2B5EF4-FFF2-40B4-BE49-F238E27FC236}">
+                <a16:creationId xmlns:a16="http://schemas.microsoft.com/office/drawing/2014/main" id="{29526A68-F582-4874-DA70-81D0841C1D1A}"/>
+              </a:ext>
+            </a:extLst>
+          </p:cNvPr>
+          <p:cNvSpPr>
+            <a:spLocks noGrp="1"/>
+          </p:cNvSpPr>
+          <p:nvPr>
+            <p:ph type="body" sz="quarter" idx="30"/>
           </p:nvPr>
         </p:nvSpPr>
         <p:spPr/>
@@ -13203,82 +12543,73 @@
           <a:bodyPr/>
           <a:lstStyle/>
           <a:p>
-            <a:pPr lvl="0"/>
             <a:r>
               <a:rPr lang="en-US" dirty="0"/>
-              <a:t>Coordinate </a:t>
-            </a:r>
-          </a:p>
-          <a:p>
-            <a:pPr lvl="0"/>
-            <a:r>
-              <a:rPr lang="en-US" b="1" dirty="0"/>
-              <a:t>e-business applications</a:t>
-            </a:r>
-          </a:p>
-        </p:txBody>
-      </p:sp>
-      <p:cxnSp>
-        <p:nvCxnSpPr>
-          <p:cNvPr id="51" name="Straight Arrow Connector 44" descr="Connecting arrow">
-            <a:extLst>
-              <a:ext uri="{FF2B5EF4-FFF2-40B4-BE49-F238E27FC236}">
-                <a16:creationId xmlns:a16="http://schemas.microsoft.com/office/drawing/2014/main" id="{48A4C37F-6D4C-F508-C28E-2170FC2A6D8F}"/>
-              </a:ext>
-            </a:extLst>
-          </p:cNvPr>
-          <p:cNvCxnSpPr>
-            <a:cxnSpLocks/>
-            <a:stCxn id="6" idx="3"/>
-            <a:endCxn id="4" idx="0"/>
-          </p:cNvCxnSpPr>
-          <p:nvPr/>
-        </p:nvCxnSpPr>
-        <p:spPr>
-          <a:xfrm rot="5400000" flipH="1" flipV="1">
-            <a:off x="8238067" y="2622431"/>
-            <a:ext cx="553400" cy="1966010"/>
-          </a:xfrm>
-          <a:prstGeom prst="bentConnector2">
-            <a:avLst/>
-          </a:prstGeom>
-          <a:ln w="12700">
-            <a:solidFill>
-              <a:schemeClr val="tx1"/>
-            </a:solidFill>
-            <a:prstDash val="dash"/>
-            <a:tailEnd type="triangle" w="lg" len="lg"/>
-          </a:ln>
-        </p:spPr>
-        <p:style>
-          <a:lnRef idx="1">
-            <a:schemeClr val="accent1"/>
-          </a:lnRef>
-          <a:fillRef idx="0">
-            <a:schemeClr val="accent1"/>
-          </a:fillRef>
-          <a:effectRef idx="0">
-            <a:schemeClr val="accent1"/>
-          </a:effectRef>
-          <a:fontRef idx="minor">
-            <a:schemeClr val="tx1"/>
-          </a:fontRef>
-        </p:style>
-      </p:cxnSp>
-      <p:sp>
-        <p:nvSpPr>
-          <p:cNvPr id="4" name="Text Placeholder 3">
-            <a:extLst>
-              <a:ext uri="{FF2B5EF4-FFF2-40B4-BE49-F238E27FC236}">
-                <a16:creationId xmlns:a16="http://schemas.microsoft.com/office/drawing/2014/main" id="{662F7B83-4957-3FDF-FCD7-670A863C20B2}"/>
-              </a:ext>
-            </a:extLst>
-          </p:cNvPr>
-          <p:cNvSpPr>
-            <a:spLocks noGrp="1"/>
-          </p:cNvSpPr>
-          <p:nvPr>
-            <p:ph type="body" sz="quarter" idx="15"/>
+              <a:t>VP Product</a:t>
+            </a:r>
+          </a:p>
+        </p:txBody>
+      </p:sp>
+      <p:pic>
+        <p:nvPicPr>
+          <p:cNvPr id="44" name="Picture Placeholder 43" descr="Team member head shot&#10;">
+            <a:extLst>
+              <a:ext uri="{FF2B5EF4-FFF2-40B4-BE49-F238E27FC236}">
+                <a16:creationId xmlns:a16="http://schemas.microsoft.com/office/drawing/2014/main" id="{8E4AE635-532E-6FC4-A155-AB3B0533A045}"/>
+              </a:ext>
+            </a:extLst>
+          </p:cNvPr>
+          <p:cNvPicPr>
+            <a:picLocks noGrp="1" noChangeAspect="1"/>
+          </p:cNvPicPr>
+          <p:nvPr>
+            <p:ph type="pic" sz="quarter" idx="13"/>
+          </p:nvPr>
+        </p:nvPicPr>
+        <p:blipFill rotWithShape="1">
+          <a:blip r:embed="rId2"/>
+          <a:srcRect/>
+          <a:stretch/>
+        </p:blipFill>
+        <p:spPr/>
+      </p:pic>
+      <p:pic>
+        <p:nvPicPr>
+          <p:cNvPr id="48" name="Picture Placeholder 47" descr="Team member head shot&#10;">
+            <a:extLst>
+              <a:ext uri="{FF2B5EF4-FFF2-40B4-BE49-F238E27FC236}">
+                <a16:creationId xmlns:a16="http://schemas.microsoft.com/office/drawing/2014/main" id="{3E5F6DD2-261B-76B8-29A7-384E2C07E182}"/>
+              </a:ext>
+            </a:extLst>
+          </p:cNvPr>
+          <p:cNvPicPr>
+            <a:picLocks noGrp="1" noChangeAspect="1"/>
+          </p:cNvPicPr>
+          <p:nvPr>
+            <p:ph type="pic" sz="quarter" idx="25"/>
+          </p:nvPr>
+        </p:nvPicPr>
+        <p:blipFill rotWithShape="1">
+          <a:blip r:embed="rId3"/>
+          <a:srcRect l="262" r="262"/>
+          <a:stretch/>
+        </p:blipFill>
+        <p:spPr/>
+      </p:pic>
+      <p:sp>
+        <p:nvSpPr>
+          <p:cNvPr id="10" name="Text Placeholder 9">
+            <a:extLst>
+              <a:ext uri="{FF2B5EF4-FFF2-40B4-BE49-F238E27FC236}">
+                <a16:creationId xmlns:a16="http://schemas.microsoft.com/office/drawing/2014/main" id="{5670C16D-9661-482A-986D-0D6CB98AB869}"/>
+              </a:ext>
+            </a:extLst>
+          </p:cNvPr>
+          <p:cNvSpPr>
+            <a:spLocks noGrp="1"/>
+          </p:cNvSpPr>
+          <p:nvPr>
+            <p:ph type="body" sz="quarter" idx="19"/>
           </p:nvPr>
         </p:nvSpPr>
         <p:spPr/>
@@ -13288,17 +12619,17 @@
           <a:p>
             <a:r>
               <a:rPr lang="en-US" dirty="0"/>
-              <a:t>May 20XX</a:t>
-            </a:r>
-          </a:p>
-        </p:txBody>
-      </p:sp>
-      <p:sp>
-        <p:nvSpPr>
-          <p:cNvPr id="12" name="Text Placeholder 11">
-            <a:extLst>
-              <a:ext uri="{FF2B5EF4-FFF2-40B4-BE49-F238E27FC236}">
-                <a16:creationId xmlns:a16="http://schemas.microsoft.com/office/drawing/2014/main" id="{B0661D74-2EFE-C693-BB74-D733AD13A861}"/>
+              <a:t>MIRJAM NILSSON</a:t>
+            </a:r>
+          </a:p>
+        </p:txBody>
+      </p:sp>
+      <p:sp>
+        <p:nvSpPr>
+          <p:cNvPr id="11" name="Text Placeholder 10">
+            <a:extLst>
+              <a:ext uri="{FF2B5EF4-FFF2-40B4-BE49-F238E27FC236}">
+                <a16:creationId xmlns:a16="http://schemas.microsoft.com/office/drawing/2014/main" id="{22115526-AEC6-C024-712E-E6CC8FB60E4D}"/>
               </a:ext>
             </a:extLst>
           </p:cNvPr>
@@ -13314,85 +12645,41 @@
           <a:bodyPr/>
           <a:lstStyle/>
           <a:p>
-            <a:pPr lvl="0"/>
             <a:r>
               <a:rPr lang="en-US" dirty="0"/>
-              <a:t>Deploy </a:t>
-            </a:r>
-            <a:r>
-              <a:rPr lang="en-US" b="1" dirty="0"/>
-              <a:t>strategic networks with compelling </a:t>
-            </a:r>
-          </a:p>
-          <a:p>
-            <a:pPr lvl="0"/>
-            <a:r>
-              <a:rPr lang="en-US" b="1" dirty="0"/>
-              <a:t>e-business needs</a:t>
-            </a:r>
-          </a:p>
-        </p:txBody>
-      </p:sp>
-      <p:cxnSp>
-        <p:nvCxnSpPr>
-          <p:cNvPr id="45" name="Straight Arrow Connector 44" descr="Connecting arrow">
-            <a:extLst>
-              <a:ext uri="{FF2B5EF4-FFF2-40B4-BE49-F238E27FC236}">
-                <a16:creationId xmlns:a16="http://schemas.microsoft.com/office/drawing/2014/main" id="{B8BFA6A1-385F-2847-59C6-213D0606710D}"/>
-              </a:ext>
-            </a:extLst>
-          </p:cNvPr>
-          <p:cNvCxnSpPr>
-            <a:stCxn id="2" idx="1"/>
-            <a:endCxn id="5" idx="0"/>
-          </p:cNvCxnSpPr>
-          <p:nvPr/>
-        </p:nvCxnSpPr>
-        <p:spPr>
-          <a:xfrm rot="16200000" flipH="1">
-            <a:off x="1571938" y="3513970"/>
-            <a:ext cx="553400" cy="1966011"/>
-          </a:xfrm>
-          <a:prstGeom prst="bentConnector2">
-            <a:avLst/>
-          </a:prstGeom>
-          <a:ln w="12700">
-            <a:solidFill>
-              <a:schemeClr val="tx1"/>
-            </a:solidFill>
-            <a:prstDash val="dash"/>
-            <a:tailEnd type="triangle" w="lg" len="lg"/>
-          </a:ln>
-        </p:spPr>
-        <p:style>
-          <a:lnRef idx="1">
-            <a:schemeClr val="accent1"/>
-          </a:lnRef>
-          <a:fillRef idx="0">
-            <a:schemeClr val="accent1"/>
-          </a:fillRef>
-          <a:effectRef idx="0">
-            <a:schemeClr val="accent1"/>
-          </a:effectRef>
-          <a:fontRef idx="minor">
-            <a:schemeClr val="tx1"/>
-          </a:fontRef>
-        </p:style>
-      </p:cxnSp>
-      <p:sp>
-        <p:nvSpPr>
-          <p:cNvPr id="5" name="Text Placeholder 4">
-            <a:extLst>
-              <a:ext uri="{FF2B5EF4-FFF2-40B4-BE49-F238E27FC236}">
-                <a16:creationId xmlns:a16="http://schemas.microsoft.com/office/drawing/2014/main" id="{568C0CFC-4DE9-71AA-6D3C-E8652D9BEBF5}"/>
-              </a:ext>
-            </a:extLst>
-          </p:cNvPr>
-          <p:cNvSpPr>
-            <a:spLocks noGrp="1"/>
-          </p:cNvSpPr>
-          <p:nvPr>
-            <p:ph type="body" sz="quarter" idx="16"/>
+              <a:t>Chief </a:t>
+            </a:r>
+            <a:br>
+              <a:rPr lang="en-US" dirty="0"/>
+            </a:br>
+            <a:r>
+              <a:rPr lang="en-US" dirty="0"/>
+              <a:t>Executive </a:t>
+            </a:r>
+            <a:br>
+              <a:rPr lang="en-US" dirty="0"/>
+            </a:br>
+            <a:r>
+              <a:rPr lang="en-US" dirty="0"/>
+              <a:t>Officer​</a:t>
+            </a:r>
+          </a:p>
+        </p:txBody>
+      </p:sp>
+      <p:sp>
+        <p:nvSpPr>
+          <p:cNvPr id="21" name="Text Placeholder 20">
+            <a:extLst>
+              <a:ext uri="{FF2B5EF4-FFF2-40B4-BE49-F238E27FC236}">
+                <a16:creationId xmlns:a16="http://schemas.microsoft.com/office/drawing/2014/main" id="{B2C6C37C-6141-B65E-91CC-6E6C4A9F6ECD}"/>
+              </a:ext>
+            </a:extLst>
+          </p:cNvPr>
+          <p:cNvSpPr>
+            <a:spLocks noGrp="1"/>
+          </p:cNvSpPr>
+          <p:nvPr>
+            <p:ph type="body" sz="quarter" idx="31"/>
           </p:nvPr>
         </p:nvSpPr>
         <p:spPr/>
@@ -13402,25 +12689,25 @@
           <a:p>
             <a:r>
               <a:rPr lang="en-US" dirty="0"/>
-              <a:t>NOV 20XX</a:t>
-            </a:r>
-          </a:p>
-        </p:txBody>
-      </p:sp>
-      <p:sp>
-        <p:nvSpPr>
-          <p:cNvPr id="14" name="Text Placeholder 13">
-            <a:extLst>
-              <a:ext uri="{FF2B5EF4-FFF2-40B4-BE49-F238E27FC236}">
-                <a16:creationId xmlns:a16="http://schemas.microsoft.com/office/drawing/2014/main" id="{43DFEEA6-4AAD-5436-17AA-56EFDA3E432C}"/>
-              </a:ext>
-            </a:extLst>
-          </p:cNvPr>
-          <p:cNvSpPr>
-            <a:spLocks noGrp="1"/>
-          </p:cNvSpPr>
-          <p:nvPr>
-            <p:ph type="body" sz="quarter" idx="22"/>
+              <a:t>ROWAN MURPHY</a:t>
+            </a:r>
+          </a:p>
+        </p:txBody>
+      </p:sp>
+      <p:sp>
+        <p:nvSpPr>
+          <p:cNvPr id="23" name="Text Placeholder 22">
+            <a:extLst>
+              <a:ext uri="{FF2B5EF4-FFF2-40B4-BE49-F238E27FC236}">
+                <a16:creationId xmlns:a16="http://schemas.microsoft.com/office/drawing/2014/main" id="{3C9D5E96-D043-255D-647E-931CF0782375}"/>
+              </a:ext>
+            </a:extLst>
+          </p:cNvPr>
+          <p:cNvSpPr>
+            <a:spLocks noGrp="1"/>
+          </p:cNvSpPr>
+          <p:nvPr>
+            <p:ph type="body" sz="quarter" idx="32"/>
           </p:nvPr>
         </p:nvSpPr>
         <p:spPr/>
@@ -13428,79 +12715,73 @@
           <a:bodyPr/>
           <a:lstStyle/>
           <a:p>
-            <a:pPr lvl="0"/>
             <a:r>
               <a:rPr lang="en-US" dirty="0"/>
-              <a:t>Disseminate standardized </a:t>
-            </a:r>
-            <a:r>
-              <a:rPr lang="en-US" b="1" dirty="0"/>
-              <a:t>metrics</a:t>
-            </a:r>
-          </a:p>
-        </p:txBody>
-      </p:sp>
-      <p:cxnSp>
-        <p:nvCxnSpPr>
-          <p:cNvPr id="49" name="Straight Arrow Connector 44" descr="Connecting arrow">
-            <a:extLst>
-              <a:ext uri="{FF2B5EF4-FFF2-40B4-BE49-F238E27FC236}">
-                <a16:creationId xmlns:a16="http://schemas.microsoft.com/office/drawing/2014/main" id="{900822B8-79FE-91B5-6738-C9AA0E33984E}"/>
-              </a:ext>
-            </a:extLst>
-          </p:cNvPr>
-          <p:cNvCxnSpPr>
-            <a:cxnSpLocks/>
-            <a:stCxn id="3" idx="1"/>
-            <a:endCxn id="6" idx="0"/>
-          </p:cNvCxnSpPr>
-          <p:nvPr/>
-        </p:nvCxnSpPr>
-        <p:spPr>
-          <a:xfrm rot="16200000" flipH="1">
-            <a:off x="6013644" y="3511589"/>
-            <a:ext cx="558161" cy="1966011"/>
-          </a:xfrm>
-          <a:prstGeom prst="bentConnector2">
-            <a:avLst/>
-          </a:prstGeom>
-          <a:ln w="12700">
-            <a:solidFill>
-              <a:schemeClr val="tx1"/>
-            </a:solidFill>
-            <a:prstDash val="dash"/>
-            <a:tailEnd type="triangle" w="lg" len="lg"/>
-          </a:ln>
-        </p:spPr>
-        <p:style>
-          <a:lnRef idx="1">
-            <a:schemeClr val="accent1"/>
-          </a:lnRef>
-          <a:fillRef idx="0">
-            <a:schemeClr val="accent1"/>
-          </a:fillRef>
-          <a:effectRef idx="0">
-            <a:schemeClr val="accent1"/>
-          </a:effectRef>
-          <a:fontRef idx="minor">
-            <a:schemeClr val="tx1"/>
-          </a:fontRef>
-        </p:style>
-      </p:cxnSp>
-      <p:sp>
-        <p:nvSpPr>
-          <p:cNvPr id="6" name="Text Placeholder 5">
-            <a:extLst>
-              <a:ext uri="{FF2B5EF4-FFF2-40B4-BE49-F238E27FC236}">
-                <a16:creationId xmlns:a16="http://schemas.microsoft.com/office/drawing/2014/main" id="{B68524C6-142C-4627-2305-AAB73C14EE1A}"/>
-              </a:ext>
-            </a:extLst>
-          </p:cNvPr>
-          <p:cNvSpPr>
-            <a:spLocks noGrp="1"/>
-          </p:cNvSpPr>
-          <p:nvPr>
-            <p:ph type="body" sz="quarter" idx="17"/>
+              <a:t>SEO Strategist</a:t>
+            </a:r>
+          </a:p>
+        </p:txBody>
+      </p:sp>
+      <p:pic>
+        <p:nvPicPr>
+          <p:cNvPr id="42" name="Picture Placeholder 41" descr="Team member head shot&#10;">
+            <a:extLst>
+              <a:ext uri="{FF2B5EF4-FFF2-40B4-BE49-F238E27FC236}">
+                <a16:creationId xmlns:a16="http://schemas.microsoft.com/office/drawing/2014/main" id="{C51CA361-456A-1016-DFBD-C344466DD963}"/>
+              </a:ext>
+            </a:extLst>
+          </p:cNvPr>
+          <p:cNvPicPr>
+            <a:picLocks noGrp="1" noChangeAspect="1"/>
+          </p:cNvPicPr>
+          <p:nvPr>
+            <p:ph type="pic" sz="quarter" idx="14"/>
+          </p:nvPr>
+        </p:nvPicPr>
+        <p:blipFill rotWithShape="1">
+          <a:blip r:embed="rId4"/>
+          <a:srcRect t="68" b="68"/>
+          <a:stretch/>
+        </p:blipFill>
+        <p:spPr/>
+      </p:pic>
+      <p:pic>
+        <p:nvPicPr>
+          <p:cNvPr id="50" name="Picture Placeholder 49" descr="Team member head shot&#10;">
+            <a:extLst>
+              <a:ext uri="{FF2B5EF4-FFF2-40B4-BE49-F238E27FC236}">
+                <a16:creationId xmlns:a16="http://schemas.microsoft.com/office/drawing/2014/main" id="{2D9499A9-08D8-46CA-F959-DE882648A668}"/>
+              </a:ext>
+            </a:extLst>
+          </p:cNvPr>
+          <p:cNvPicPr>
+            <a:picLocks noGrp="1" noChangeAspect="1"/>
+          </p:cNvPicPr>
+          <p:nvPr>
+            <p:ph type="pic" sz="quarter" idx="26"/>
+          </p:nvPr>
+        </p:nvPicPr>
+        <p:blipFill rotWithShape="1">
+          <a:blip r:embed="rId5"/>
+          <a:srcRect t="68" b="68"/>
+          <a:stretch/>
+        </p:blipFill>
+        <p:spPr/>
+      </p:pic>
+      <p:sp>
+        <p:nvSpPr>
+          <p:cNvPr id="12" name="Text Placeholder 11">
+            <a:extLst>
+              <a:ext uri="{FF2B5EF4-FFF2-40B4-BE49-F238E27FC236}">
+                <a16:creationId xmlns:a16="http://schemas.microsoft.com/office/drawing/2014/main" id="{E26CB388-D0E5-9548-A57B-8A5352089E15}"/>
+              </a:ext>
+            </a:extLst>
+          </p:cNvPr>
+          <p:cNvSpPr>
+            <a:spLocks noGrp="1"/>
+          </p:cNvSpPr>
+          <p:nvPr>
+            <p:ph type="body" sz="quarter" idx="21"/>
           </p:nvPr>
         </p:nvSpPr>
         <p:spPr/>
@@ -13510,7 +12791,7 @@
           <a:p>
             <a:r>
               <a:rPr lang="en-US" dirty="0"/>
-              <a:t>MAR 20XX</a:t>
+              <a:t>FLORA BERGGREN</a:t>
             </a:r>
           </a:p>
         </p:txBody>
@@ -13520,44 +12801,314 @@
           <p:cNvPr id="13" name="Text Placeholder 12">
             <a:extLst>
               <a:ext uri="{FF2B5EF4-FFF2-40B4-BE49-F238E27FC236}">
-                <a16:creationId xmlns:a16="http://schemas.microsoft.com/office/drawing/2014/main" id="{13F81BE4-398C-16CD-B300-25082227312B}"/>
-              </a:ext>
-            </a:extLst>
-          </p:cNvPr>
-          <p:cNvSpPr>
-            <a:spLocks noGrp="1"/>
-          </p:cNvSpPr>
-          <p:nvPr>
-            <p:ph type="body" sz="quarter" idx="21"/>
-          </p:nvPr>
-        </p:nvSpPr>
-        <p:spPr>
-          <a:xfrm>
-            <a:off x="7827392" y="3882136"/>
-            <a:ext cx="1796654" cy="1783080"/>
-          </a:xfrm>
-        </p:spPr>
+                <a16:creationId xmlns:a16="http://schemas.microsoft.com/office/drawing/2014/main" id="{7DA1EEF4-1C46-B9FD-302F-61FC0265F748}"/>
+              </a:ext>
+            </a:extLst>
+          </p:cNvPr>
+          <p:cNvSpPr>
+            <a:spLocks noGrp="1"/>
+          </p:cNvSpPr>
+          <p:nvPr>
+            <p:ph type="body" sz="quarter" idx="22"/>
+          </p:nvPr>
+        </p:nvSpPr>
+        <p:spPr/>
         <p:txBody>
           <a:bodyPr/>
           <a:lstStyle/>
           <a:p>
             <a:r>
               <a:rPr lang="en-US" dirty="0"/>
-              <a:t>Foster holistically superior </a:t>
-            </a:r>
-            <a:r>
-              <a:rPr lang="en-US" b="1" dirty="0"/>
-              <a:t>methodologies</a:t>
-            </a:r>
-          </a:p>
-        </p:txBody>
-      </p:sp>
-      <p:sp>
-        <p:nvSpPr>
-          <p:cNvPr id="9" name="Slide Number Placeholder 8">
-            <a:extLst>
-              <a:ext uri="{FF2B5EF4-FFF2-40B4-BE49-F238E27FC236}">
-                <a16:creationId xmlns:a16="http://schemas.microsoft.com/office/drawing/2014/main" id="{42D01FA3-0BE0-D543-3ABD-0B0771F30A19}"/>
+              <a:t>Chief </a:t>
+            </a:r>
+            <a:br>
+              <a:rPr lang="en-US" dirty="0"/>
+            </a:br>
+            <a:r>
+              <a:rPr lang="en-US" dirty="0"/>
+              <a:t>Operations Officer​</a:t>
+            </a:r>
+          </a:p>
+        </p:txBody>
+      </p:sp>
+      <p:sp>
+        <p:nvSpPr>
+          <p:cNvPr id="25" name="Text Placeholder 24">
+            <a:extLst>
+              <a:ext uri="{FF2B5EF4-FFF2-40B4-BE49-F238E27FC236}">
+                <a16:creationId xmlns:a16="http://schemas.microsoft.com/office/drawing/2014/main" id="{D3B414CD-2F59-EAB8-E6C8-D233BF953DC9}"/>
+              </a:ext>
+            </a:extLst>
+          </p:cNvPr>
+          <p:cNvSpPr>
+            <a:spLocks noGrp="1"/>
+          </p:cNvSpPr>
+          <p:nvPr>
+            <p:ph type="body" sz="quarter" idx="33"/>
+          </p:nvPr>
+        </p:nvSpPr>
+        <p:spPr/>
+        <p:txBody>
+          <a:bodyPr/>
+          <a:lstStyle/>
+          <a:p>
+            <a:r>
+              <a:rPr lang="en-US" dirty="0"/>
+              <a:t>ELIZABETH MOORE</a:t>
+            </a:r>
+          </a:p>
+        </p:txBody>
+      </p:sp>
+      <p:sp>
+        <p:nvSpPr>
+          <p:cNvPr id="26" name="Text Placeholder 25">
+            <a:extLst>
+              <a:ext uri="{FF2B5EF4-FFF2-40B4-BE49-F238E27FC236}">
+                <a16:creationId xmlns:a16="http://schemas.microsoft.com/office/drawing/2014/main" id="{98A87A1B-4C3D-5BB4-6449-1DB89F1926E3}"/>
+              </a:ext>
+            </a:extLst>
+          </p:cNvPr>
+          <p:cNvSpPr>
+            <a:spLocks noGrp="1"/>
+          </p:cNvSpPr>
+          <p:nvPr>
+            <p:ph type="body" sz="quarter" idx="34"/>
+          </p:nvPr>
+        </p:nvSpPr>
+        <p:spPr/>
+        <p:txBody>
+          <a:bodyPr/>
+          <a:lstStyle/>
+          <a:p>
+            <a:r>
+              <a:rPr lang="en-US" dirty="0"/>
+              <a:t>Product </a:t>
+            </a:r>
+          </a:p>
+          <a:p>
+            <a:r>
+              <a:rPr lang="en-US" dirty="0"/>
+              <a:t>Designer</a:t>
+            </a:r>
+          </a:p>
+        </p:txBody>
+      </p:sp>
+      <p:pic>
+        <p:nvPicPr>
+          <p:cNvPr id="40" name="Picture Placeholder 39" descr="Team member head shot&#10;">
+            <a:extLst>
+              <a:ext uri="{FF2B5EF4-FFF2-40B4-BE49-F238E27FC236}">
+                <a16:creationId xmlns:a16="http://schemas.microsoft.com/office/drawing/2014/main" id="{52D3D64F-21AD-0755-9EEF-13762D95D6E0}"/>
+              </a:ext>
+            </a:extLst>
+          </p:cNvPr>
+          <p:cNvPicPr>
+            <a:picLocks noGrp="1" noChangeAspect="1"/>
+          </p:cNvPicPr>
+          <p:nvPr>
+            <p:ph type="pic" sz="quarter" idx="15"/>
+          </p:nvPr>
+        </p:nvPicPr>
+        <p:blipFill rotWithShape="1">
+          <a:blip r:embed="rId6"/>
+          <a:srcRect t="2944" b="2944"/>
+          <a:stretch/>
+        </p:blipFill>
+        <p:spPr/>
+      </p:pic>
+      <p:pic>
+        <p:nvPicPr>
+          <p:cNvPr id="52" name="Picture Placeholder 51" descr="Team member head shot&#10;">
+            <a:extLst>
+              <a:ext uri="{FF2B5EF4-FFF2-40B4-BE49-F238E27FC236}">
+                <a16:creationId xmlns:a16="http://schemas.microsoft.com/office/drawing/2014/main" id="{22058AAC-5D9F-577D-B7B2-238391311514}"/>
+              </a:ext>
+            </a:extLst>
+          </p:cNvPr>
+          <p:cNvPicPr>
+            <a:picLocks noGrp="1" noChangeAspect="1"/>
+          </p:cNvPicPr>
+          <p:nvPr>
+            <p:ph type="pic" sz="quarter" idx="27"/>
+          </p:nvPr>
+        </p:nvPicPr>
+        <p:blipFill rotWithShape="1">
+          <a:blip r:embed="rId7"/>
+          <a:srcRect t="68" b="68"/>
+          <a:stretch/>
+        </p:blipFill>
+        <p:spPr/>
+      </p:pic>
+      <p:sp>
+        <p:nvSpPr>
+          <p:cNvPr id="14" name="Text Placeholder 13">
+            <a:extLst>
+              <a:ext uri="{FF2B5EF4-FFF2-40B4-BE49-F238E27FC236}">
+                <a16:creationId xmlns:a16="http://schemas.microsoft.com/office/drawing/2014/main" id="{519D9E81-2623-349E-904D-8BF6ECE353BA}"/>
+              </a:ext>
+            </a:extLst>
+          </p:cNvPr>
+          <p:cNvSpPr>
+            <a:spLocks noGrp="1"/>
+          </p:cNvSpPr>
+          <p:nvPr>
+            <p:ph type="body" sz="quarter" idx="23"/>
+          </p:nvPr>
+        </p:nvSpPr>
+        <p:spPr/>
+        <p:txBody>
+          <a:bodyPr/>
+          <a:lstStyle/>
+          <a:p>
+            <a:r>
+              <a:rPr lang="en-US" dirty="0"/>
+              <a:t>RAJESH SANTOSHI</a:t>
+            </a:r>
+          </a:p>
+        </p:txBody>
+      </p:sp>
+      <p:sp>
+        <p:nvSpPr>
+          <p:cNvPr id="15" name="Text Placeholder 14">
+            <a:extLst>
+              <a:ext uri="{FF2B5EF4-FFF2-40B4-BE49-F238E27FC236}">
+                <a16:creationId xmlns:a16="http://schemas.microsoft.com/office/drawing/2014/main" id="{2FC00352-D201-B54A-FE76-985161F19FEC}"/>
+              </a:ext>
+            </a:extLst>
+          </p:cNvPr>
+          <p:cNvSpPr>
+            <a:spLocks noGrp="1"/>
+          </p:cNvSpPr>
+          <p:nvPr>
+            <p:ph type="body" sz="quarter" idx="24"/>
+          </p:nvPr>
+        </p:nvSpPr>
+        <p:spPr/>
+        <p:txBody>
+          <a:bodyPr/>
+          <a:lstStyle/>
+          <a:p>
+            <a:r>
+              <a:rPr lang="en-US" dirty="0"/>
+              <a:t>VP Marketing​</a:t>
+            </a:r>
+          </a:p>
+        </p:txBody>
+      </p:sp>
+      <p:sp>
+        <p:nvSpPr>
+          <p:cNvPr id="27" name="Text Placeholder 26">
+            <a:extLst>
+              <a:ext uri="{FF2B5EF4-FFF2-40B4-BE49-F238E27FC236}">
+                <a16:creationId xmlns:a16="http://schemas.microsoft.com/office/drawing/2014/main" id="{C2D1179F-9CC5-E23D-37E2-BB999E68DE95}"/>
+              </a:ext>
+            </a:extLst>
+          </p:cNvPr>
+          <p:cNvSpPr>
+            <a:spLocks noGrp="1"/>
+          </p:cNvSpPr>
+          <p:nvPr>
+            <p:ph type="body" sz="quarter" idx="35"/>
+          </p:nvPr>
+        </p:nvSpPr>
+        <p:spPr/>
+        <p:txBody>
+          <a:bodyPr/>
+          <a:lstStyle/>
+          <a:p>
+            <a:r>
+              <a:rPr lang="en-US" dirty="0"/>
+              <a:t>ROBIN </a:t>
+            </a:r>
+          </a:p>
+          <a:p>
+            <a:r>
+              <a:rPr lang="en-US" dirty="0"/>
+              <a:t>KLINE</a:t>
+            </a:r>
+          </a:p>
+        </p:txBody>
+      </p:sp>
+      <p:sp>
+        <p:nvSpPr>
+          <p:cNvPr id="28" name="Text Placeholder 27">
+            <a:extLst>
+              <a:ext uri="{FF2B5EF4-FFF2-40B4-BE49-F238E27FC236}">
+                <a16:creationId xmlns:a16="http://schemas.microsoft.com/office/drawing/2014/main" id="{5D27B745-1B31-09CB-F001-4408E3D2F75A}"/>
+              </a:ext>
+            </a:extLst>
+          </p:cNvPr>
+          <p:cNvSpPr>
+            <a:spLocks noGrp="1"/>
+          </p:cNvSpPr>
+          <p:nvPr>
+            <p:ph type="body" sz="quarter" idx="36"/>
+          </p:nvPr>
+        </p:nvSpPr>
+        <p:spPr/>
+        <p:txBody>
+          <a:bodyPr/>
+          <a:lstStyle/>
+          <a:p>
+            <a:r>
+              <a:rPr lang="en-US" dirty="0"/>
+              <a:t>Content Developer</a:t>
+            </a:r>
+          </a:p>
+        </p:txBody>
+      </p:sp>
+      <p:pic>
+        <p:nvPicPr>
+          <p:cNvPr id="38" name="Picture Placeholder 37" descr="Team member head shot&#10;">
+            <a:extLst>
+              <a:ext uri="{FF2B5EF4-FFF2-40B4-BE49-F238E27FC236}">
+                <a16:creationId xmlns:a16="http://schemas.microsoft.com/office/drawing/2014/main" id="{E4C98BD3-8494-80AB-2E48-5F7B70FCDE48}"/>
+              </a:ext>
+            </a:extLst>
+          </p:cNvPr>
+          <p:cNvPicPr>
+            <a:picLocks noGrp="1" noChangeAspect="1"/>
+          </p:cNvPicPr>
+          <p:nvPr>
+            <p:ph type="pic" sz="quarter" idx="16"/>
+          </p:nvPr>
+        </p:nvPicPr>
+        <p:blipFill rotWithShape="1">
+          <a:blip r:embed="rId8"/>
+          <a:srcRect/>
+          <a:stretch/>
+        </p:blipFill>
+        <p:spPr/>
+      </p:pic>
+      <p:pic>
+        <p:nvPicPr>
+          <p:cNvPr id="54" name="Picture Placeholder 53" descr="Team member head shot&#10;">
+            <a:extLst>
+              <a:ext uri="{FF2B5EF4-FFF2-40B4-BE49-F238E27FC236}">
+                <a16:creationId xmlns:a16="http://schemas.microsoft.com/office/drawing/2014/main" id="{72EB0BF6-5AAA-BF98-00D4-C688D2CC92D1}"/>
+              </a:ext>
+            </a:extLst>
+          </p:cNvPr>
+          <p:cNvPicPr>
+            <a:picLocks noGrp="1" noChangeAspect="1"/>
+          </p:cNvPicPr>
+          <p:nvPr>
+            <p:ph type="pic" sz="quarter" idx="28"/>
+          </p:nvPr>
+        </p:nvPicPr>
+        <p:blipFill rotWithShape="1">
+          <a:blip r:embed="rId9"/>
+          <a:srcRect l="262" r="262"/>
+          <a:stretch/>
+        </p:blipFill>
+        <p:spPr/>
+      </p:pic>
+      <p:sp>
+        <p:nvSpPr>
+          <p:cNvPr id="3" name="Slide Number Placeholder 2">
+            <a:extLst>
+              <a:ext uri="{FF2B5EF4-FFF2-40B4-BE49-F238E27FC236}">
+                <a16:creationId xmlns:a16="http://schemas.microsoft.com/office/drawing/2014/main" id="{C11CC6B6-E9D4-1736-ABF6-727D2464A975}"/>
               </a:ext>
             </a:extLst>
           </p:cNvPr>
@@ -13585,7 +13136,7 @@
     </p:spTree>
     <p:extLst>
       <p:ext uri="{BB962C8B-B14F-4D97-AF65-F5344CB8AC3E}">
-        <p14:creationId xmlns:p14="http://schemas.microsoft.com/office/powerpoint/2010/main" val="312043735"/>
+        <p14:creationId xmlns:p14="http://schemas.microsoft.com/office/powerpoint/2010/main" val="1628771861"/>
       </p:ext>
     </p:extLst>
   </p:cSld>
@@ -13614,10 +13165,10 @@
       </p:grpSpPr>
       <p:sp>
         <p:nvSpPr>
-          <p:cNvPr id="41" name="Title 40">
-            <a:extLst>
-              <a:ext uri="{FF2B5EF4-FFF2-40B4-BE49-F238E27FC236}">
-                <a16:creationId xmlns:a16="http://schemas.microsoft.com/office/drawing/2014/main" id="{A49ABFAC-D966-9A7C-EFB9-4AA2A4BFCB3B}"/>
+          <p:cNvPr id="2" name="Title 1">
+            <a:extLst>
+              <a:ext uri="{FF2B5EF4-FFF2-40B4-BE49-F238E27FC236}">
+                <a16:creationId xmlns:a16="http://schemas.microsoft.com/office/drawing/2014/main" id="{08737D19-4D60-B5D0-74C9-46A5D81261BB}"/>
               </a:ext>
             </a:extLst>
           </p:cNvPr>
@@ -13635,7 +13186,7 @@
           <a:p>
             <a:r>
               <a:rPr lang="en-US" dirty="0"/>
-              <a:t>AREAS OF FOCUS</a:t>
+              <a:t>PLAN FOR PRODUCT LAUNCH</a:t>
             </a:r>
           </a:p>
         </p:txBody>
@@ -13645,7 +13196,7 @@
           <p:cNvPr id="7" name="Footer Placeholder 6">
             <a:extLst>
               <a:ext uri="{FF2B5EF4-FFF2-40B4-BE49-F238E27FC236}">
-                <a16:creationId xmlns:a16="http://schemas.microsoft.com/office/drawing/2014/main" id="{6C58156F-B502-2468-F7F7-7EF56BA44FBE}"/>
+                <a16:creationId xmlns:a16="http://schemas.microsoft.com/office/drawing/2014/main" id="{C9F924E8-B6E6-C266-842D-422148E57074}"/>
               </a:ext>
             </a:extLst>
           </p:cNvPr>
@@ -13670,10 +13221,10 @@
       </p:sp>
       <p:sp>
         <p:nvSpPr>
-          <p:cNvPr id="42" name="Text Placeholder 41">
-            <a:extLst>
-              <a:ext uri="{FF2B5EF4-FFF2-40B4-BE49-F238E27FC236}">
-                <a16:creationId xmlns:a16="http://schemas.microsoft.com/office/drawing/2014/main" id="{E7EE4D5B-87DD-4137-0625-40623A0E8A35}"/>
+          <p:cNvPr id="3" name="Text Placeholder 2">
+            <a:extLst>
+              <a:ext uri="{FF2B5EF4-FFF2-40B4-BE49-F238E27FC236}">
+                <a16:creationId xmlns:a16="http://schemas.microsoft.com/office/drawing/2014/main" id="{9B0814BF-E9DC-8615-1CF0-1112CBD60A66}"/>
               </a:ext>
             </a:extLst>
           </p:cNvPr>
@@ -13691,17 +13242,17 @@
           <a:p>
             <a:r>
               <a:rPr lang="en-US" dirty="0"/>
-              <a:t>B2B MARKET SCENARIOS</a:t>
-            </a:r>
-          </a:p>
-        </p:txBody>
-      </p:sp>
-      <p:sp>
-        <p:nvSpPr>
-          <p:cNvPr id="43" name="Content Placeholder 42">
-            <a:extLst>
-              <a:ext uri="{FF2B5EF4-FFF2-40B4-BE49-F238E27FC236}">
-                <a16:creationId xmlns:a16="http://schemas.microsoft.com/office/drawing/2014/main" id="{DDD88D28-D711-5AC9-E34C-3050A6413FB3}"/>
+              <a:t>PLANNING</a:t>
+            </a:r>
+          </a:p>
+        </p:txBody>
+      </p:sp>
+      <p:sp>
+        <p:nvSpPr>
+          <p:cNvPr id="23" name="Content Placeholder 22">
+            <a:extLst>
+              <a:ext uri="{FF2B5EF4-FFF2-40B4-BE49-F238E27FC236}">
+                <a16:creationId xmlns:a16="http://schemas.microsoft.com/office/drawing/2014/main" id="{2C051FD2-C541-D8EE-D263-DFD01AD1C602}"/>
               </a:ext>
             </a:extLst>
           </p:cNvPr>
@@ -13719,29 +13270,20 @@
           <a:p>
             <a:r>
               <a:rPr lang="en-US" dirty="0"/>
-              <a:t>Develop winning strategies to keep ahead of the competition​</a:t>
-            </a:r>
-          </a:p>
-          <a:p>
-            <a:r>
-              <a:rPr lang="en-US" dirty="0"/>
-              <a:t>Capitalize on low-hanging fruit to identify a ballpark value​</a:t>
-            </a:r>
-          </a:p>
-          <a:p>
-            <a:r>
-              <a:rPr lang="en-US" dirty="0"/>
-              <a:t>Visualize customer directed convergence</a:t>
-            </a:r>
-          </a:p>
-        </p:txBody>
-      </p:sp>
-      <p:sp>
-        <p:nvSpPr>
-          <p:cNvPr id="44" name="Text Placeholder 43">
-            <a:extLst>
-              <a:ext uri="{FF2B5EF4-FFF2-40B4-BE49-F238E27FC236}">
-                <a16:creationId xmlns:a16="http://schemas.microsoft.com/office/drawing/2014/main" id="{9A16E2DA-8782-EACD-C467-2BD2FC22391C}"/>
+              <a:t>Synergize scalable e-commerce</a:t>
+            </a:r>
+          </a:p>
+          <a:p>
+            <a:endParaRPr lang="en-US" dirty="0"/>
+          </a:p>
+        </p:txBody>
+      </p:sp>
+      <p:sp>
+        <p:nvSpPr>
+          <p:cNvPr id="5" name="Text Placeholder 4">
+            <a:extLst>
+              <a:ext uri="{FF2B5EF4-FFF2-40B4-BE49-F238E27FC236}">
+                <a16:creationId xmlns:a16="http://schemas.microsoft.com/office/drawing/2014/main" id="{4714EE7D-83C7-DE47-C100-0904BB907007}"/>
               </a:ext>
             </a:extLst>
           </p:cNvPr>
@@ -13759,17 +13301,17 @@
           <a:p>
             <a:r>
               <a:rPr lang="en-US" dirty="0"/>
-              <a:t>CLOUD-BASED OPPORTUNITIES</a:t>
-            </a:r>
-          </a:p>
-        </p:txBody>
-      </p:sp>
-      <p:sp>
-        <p:nvSpPr>
-          <p:cNvPr id="45" name="Content Placeholder 44">
-            <a:extLst>
-              <a:ext uri="{FF2B5EF4-FFF2-40B4-BE49-F238E27FC236}">
-                <a16:creationId xmlns:a16="http://schemas.microsoft.com/office/drawing/2014/main" id="{2A504466-AF6B-14A5-DBE7-37A09EC63EC7}"/>
+              <a:t>MARKETING</a:t>
+            </a:r>
+          </a:p>
+        </p:txBody>
+      </p:sp>
+      <p:sp>
+        <p:nvSpPr>
+          <p:cNvPr id="24" name="Content Placeholder 23">
+            <a:extLst>
+              <a:ext uri="{FF2B5EF4-FFF2-40B4-BE49-F238E27FC236}">
+                <a16:creationId xmlns:a16="http://schemas.microsoft.com/office/drawing/2014/main" id="{61DE34F0-9D00-D163-584E-9738310DB6BC}"/>
               </a:ext>
             </a:extLst>
           </p:cNvPr>
@@ -13785,19 +13327,196 @@
           <a:bodyPr/>
           <a:lstStyle/>
           <a:p>
+            <a:pPr lvl="0"/>
             <a:r>
               <a:rPr lang="en-US" dirty="0"/>
-              <a:t>Iterative approaches to corporate strategy</a:t>
-            </a:r>
-          </a:p>
+              <a:t>Disseminate standardized metrics</a:t>
+            </a:r>
+          </a:p>
+        </p:txBody>
+      </p:sp>
+      <p:sp>
+        <p:nvSpPr>
+          <p:cNvPr id="9" name="Text Placeholder 8">
+            <a:extLst>
+              <a:ext uri="{FF2B5EF4-FFF2-40B4-BE49-F238E27FC236}">
+                <a16:creationId xmlns:a16="http://schemas.microsoft.com/office/drawing/2014/main" id="{310ADB9E-1121-2450-35D1-8486C9BC3613}"/>
+              </a:ext>
+            </a:extLst>
+          </p:cNvPr>
+          <p:cNvSpPr>
+            <a:spLocks noGrp="1"/>
+          </p:cNvSpPr>
+          <p:nvPr>
+            <p:ph type="body" sz="quarter" idx="13"/>
+          </p:nvPr>
+        </p:nvSpPr>
+        <p:spPr/>
+        <p:txBody>
+          <a:bodyPr/>
+          <a:lstStyle/>
           <a:p>
             <a:r>
               <a:rPr lang="en-US" dirty="0"/>
-              <a:t>Establish a management framework from the inside</a:t>
-            </a:r>
-          </a:p>
-          <a:p>
-            <a:endParaRPr lang="en-US" dirty="0"/>
+              <a:t>DESIGN</a:t>
+            </a:r>
+          </a:p>
+        </p:txBody>
+      </p:sp>
+      <p:sp>
+        <p:nvSpPr>
+          <p:cNvPr id="25" name="Content Placeholder 24">
+            <a:extLst>
+              <a:ext uri="{FF2B5EF4-FFF2-40B4-BE49-F238E27FC236}">
+                <a16:creationId xmlns:a16="http://schemas.microsoft.com/office/drawing/2014/main" id="{3F1B077F-4F6F-1F99-B5B6-BF27786BBA9F}"/>
+              </a:ext>
+            </a:extLst>
+          </p:cNvPr>
+          <p:cNvSpPr>
+            <a:spLocks noGrp="1"/>
+          </p:cNvSpPr>
+          <p:nvPr>
+            <p:ph sz="quarter" idx="14"/>
+          </p:nvPr>
+        </p:nvSpPr>
+        <p:spPr/>
+        <p:txBody>
+          <a:bodyPr/>
+          <a:lstStyle/>
+          <a:p>
+            <a:pPr lvl="0"/>
+            <a:r>
+              <a:rPr lang="en-US" dirty="0"/>
+              <a:t>Coordinate </a:t>
+            </a:r>
+            <a:br>
+              <a:rPr lang="en-US" dirty="0"/>
+            </a:br>
+            <a:r>
+              <a:rPr lang="en-US" dirty="0"/>
+              <a:t>e-business applications</a:t>
+            </a:r>
+          </a:p>
+        </p:txBody>
+      </p:sp>
+      <p:sp>
+        <p:nvSpPr>
+          <p:cNvPr id="11" name="Text Placeholder 10">
+            <a:extLst>
+              <a:ext uri="{FF2B5EF4-FFF2-40B4-BE49-F238E27FC236}">
+                <a16:creationId xmlns:a16="http://schemas.microsoft.com/office/drawing/2014/main" id="{FAA4C0B8-3B41-049C-EA95-B5BC48C10C66}"/>
+              </a:ext>
+            </a:extLst>
+          </p:cNvPr>
+          <p:cNvSpPr>
+            <a:spLocks noGrp="1"/>
+          </p:cNvSpPr>
+          <p:nvPr>
+            <p:ph type="body" sz="quarter" idx="15"/>
+          </p:nvPr>
+        </p:nvSpPr>
+        <p:spPr/>
+        <p:txBody>
+          <a:bodyPr/>
+          <a:lstStyle/>
+          <a:p>
+            <a:r>
+              <a:rPr lang="en-US" dirty="0"/>
+              <a:t>STRATEGY</a:t>
+            </a:r>
+          </a:p>
+        </p:txBody>
+      </p:sp>
+      <p:sp>
+        <p:nvSpPr>
+          <p:cNvPr id="26" name="Content Placeholder 25">
+            <a:extLst>
+              <a:ext uri="{FF2B5EF4-FFF2-40B4-BE49-F238E27FC236}">
+                <a16:creationId xmlns:a16="http://schemas.microsoft.com/office/drawing/2014/main" id="{6ACBEE98-EEED-F89F-8CC0-E8497F8E546E}"/>
+              </a:ext>
+            </a:extLst>
+          </p:cNvPr>
+          <p:cNvSpPr>
+            <a:spLocks noGrp="1"/>
+          </p:cNvSpPr>
+          <p:nvPr>
+            <p:ph sz="quarter" idx="16"/>
+          </p:nvPr>
+        </p:nvSpPr>
+        <p:spPr/>
+        <p:txBody>
+          <a:bodyPr/>
+          <a:lstStyle/>
+          <a:p>
+            <a:pPr lvl="0"/>
+            <a:r>
+              <a:rPr lang="en-US" dirty="0"/>
+              <a:t>Foster holistically superior methodologies</a:t>
+            </a:r>
+          </a:p>
+        </p:txBody>
+      </p:sp>
+      <p:sp>
+        <p:nvSpPr>
+          <p:cNvPr id="13" name="Text Placeholder 12">
+            <a:extLst>
+              <a:ext uri="{FF2B5EF4-FFF2-40B4-BE49-F238E27FC236}">
+                <a16:creationId xmlns:a16="http://schemas.microsoft.com/office/drawing/2014/main" id="{8850A56B-786B-E4E2-77AC-8193D264E2FE}"/>
+              </a:ext>
+            </a:extLst>
+          </p:cNvPr>
+          <p:cNvSpPr>
+            <a:spLocks noGrp="1"/>
+          </p:cNvSpPr>
+          <p:nvPr>
+            <p:ph type="body" sz="quarter" idx="17"/>
+          </p:nvPr>
+        </p:nvSpPr>
+        <p:spPr/>
+        <p:txBody>
+          <a:bodyPr/>
+          <a:lstStyle/>
+          <a:p>
+            <a:r>
+              <a:rPr lang="en-US" dirty="0"/>
+              <a:t>LAUNCH</a:t>
+            </a:r>
+          </a:p>
+        </p:txBody>
+      </p:sp>
+      <p:sp>
+        <p:nvSpPr>
+          <p:cNvPr id="27" name="Content Placeholder 26">
+            <a:extLst>
+              <a:ext uri="{FF2B5EF4-FFF2-40B4-BE49-F238E27FC236}">
+                <a16:creationId xmlns:a16="http://schemas.microsoft.com/office/drawing/2014/main" id="{5D63848E-7E38-C88A-D15E-40DF95AB07BB}"/>
+              </a:ext>
+            </a:extLst>
+          </p:cNvPr>
+          <p:cNvSpPr>
+            <a:spLocks noGrp="1"/>
+          </p:cNvSpPr>
+          <p:nvPr>
+            <p:ph sz="quarter" idx="18"/>
+          </p:nvPr>
+        </p:nvSpPr>
+        <p:spPr/>
+        <p:txBody>
+          <a:bodyPr/>
+          <a:lstStyle/>
+          <a:p>
+            <a:pPr lvl="0"/>
+            <a:r>
+              <a:rPr lang="en-US" dirty="0"/>
+              <a:t>Deploy strategic networks with compelling </a:t>
+            </a:r>
+            <a:br>
+              <a:rPr lang="en-US" dirty="0"/>
+            </a:br>
+            <a:r>
+              <a:rPr lang="en-US" dirty="0"/>
+              <a:t>e-business needs</a:t>
+            </a:r>
           </a:p>
         </p:txBody>
       </p:sp>
@@ -13806,7 +13525,7 @@
           <p:cNvPr id="8" name="Slide Number Placeholder 7">
             <a:extLst>
               <a:ext uri="{FF2B5EF4-FFF2-40B4-BE49-F238E27FC236}">
-                <a16:creationId xmlns:a16="http://schemas.microsoft.com/office/drawing/2014/main" id="{151DE16D-6222-1703-D240-DA742BD7BEF9}"/>
+                <a16:creationId xmlns:a16="http://schemas.microsoft.com/office/drawing/2014/main" id="{60DE4CC7-0F16-896F-1EBA-F387E12A24C3}"/>
               </a:ext>
             </a:extLst>
           </p:cNvPr>
@@ -13834,7 +13553,7 @@
     </p:spTree>
     <p:extLst>
       <p:ext uri="{BB962C8B-B14F-4D97-AF65-F5344CB8AC3E}">
-        <p14:creationId xmlns:p14="http://schemas.microsoft.com/office/powerpoint/2010/main" val="2700317568"/>
+        <p14:creationId xmlns:p14="http://schemas.microsoft.com/office/powerpoint/2010/main" val="3008749983"/>
       </p:ext>
     </p:extLst>
   </p:cSld>
@@ -13863,10 +13582,10 @@
       </p:grpSpPr>
       <p:sp>
         <p:nvSpPr>
-          <p:cNvPr id="2" name="Title 1">
-            <a:extLst>
-              <a:ext uri="{FF2B5EF4-FFF2-40B4-BE49-F238E27FC236}">
-                <a16:creationId xmlns:a16="http://schemas.microsoft.com/office/drawing/2014/main" id="{38F5A0AD-52EA-8A3D-00F9-72C649D792FF}"/>
+          <p:cNvPr id="43" name="Title 42">
+            <a:extLst>
+              <a:ext uri="{FF2B5EF4-FFF2-40B4-BE49-F238E27FC236}">
+                <a16:creationId xmlns:a16="http://schemas.microsoft.com/office/drawing/2014/main" id="{6F402D0D-1253-FDCF-200C-358D2373CCEA}"/>
               </a:ext>
             </a:extLst>
           </p:cNvPr>
@@ -13884,25 +13603,25 @@
           <a:p>
             <a:r>
               <a:rPr lang="en-US" dirty="0"/>
-              <a:t>HOW WE GET HERE</a:t>
-            </a:r>
-          </a:p>
-        </p:txBody>
-      </p:sp>
-      <p:sp>
-        <p:nvSpPr>
-          <p:cNvPr id="3" name="Text Placeholder 2">
-            <a:extLst>
-              <a:ext uri="{FF2B5EF4-FFF2-40B4-BE49-F238E27FC236}">
-                <a16:creationId xmlns:a16="http://schemas.microsoft.com/office/drawing/2014/main" id="{90961576-ECF8-2387-1D6B-533B869103A2}"/>
-              </a:ext>
-            </a:extLst>
-          </p:cNvPr>
-          <p:cNvSpPr>
-            <a:spLocks noGrp="1"/>
-          </p:cNvSpPr>
-          <p:nvPr>
-            <p:ph type="body" idx="1"/>
+              <a:t>TIMELINE</a:t>
+            </a:r>
+          </a:p>
+        </p:txBody>
+      </p:sp>
+      <p:sp>
+        <p:nvSpPr>
+          <p:cNvPr id="8" name="Footer Placeholder 7">
+            <a:extLst>
+              <a:ext uri="{FF2B5EF4-FFF2-40B4-BE49-F238E27FC236}">
+                <a16:creationId xmlns:a16="http://schemas.microsoft.com/office/drawing/2014/main" id="{A82C041C-BA32-9DB5-9158-1264919F5376}"/>
+              </a:ext>
+            </a:extLst>
+          </p:cNvPr>
+          <p:cNvSpPr>
+            <a:spLocks noGrp="1"/>
+          </p:cNvSpPr>
+          <p:nvPr>
+            <p:ph type="ftr" sz="quarter" idx="11"/>
           </p:nvPr>
         </p:nvSpPr>
         <p:spPr/>
@@ -13912,25 +13631,25 @@
           <a:p>
             <a:r>
               <a:rPr lang="en-US" dirty="0"/>
-              <a:t>ROI</a:t>
-            </a:r>
-          </a:p>
-        </p:txBody>
-      </p:sp>
-      <p:sp>
-        <p:nvSpPr>
-          <p:cNvPr id="4" name="Content Placeholder 3">
-            <a:extLst>
-              <a:ext uri="{FF2B5EF4-FFF2-40B4-BE49-F238E27FC236}">
-                <a16:creationId xmlns:a16="http://schemas.microsoft.com/office/drawing/2014/main" id="{642609F2-7307-B671-065E-0168414672CB}"/>
-              </a:ext>
-            </a:extLst>
-          </p:cNvPr>
-          <p:cNvSpPr>
-            <a:spLocks noGrp="1"/>
-          </p:cNvSpPr>
-          <p:nvPr>
-            <p:ph sz="half" idx="2"/>
+              <a:t>PRESENTATION TITLE</a:t>
+            </a:r>
+          </a:p>
+        </p:txBody>
+      </p:sp>
+      <p:sp>
+        <p:nvSpPr>
+          <p:cNvPr id="2" name="Text Placeholder 1">
+            <a:extLst>
+              <a:ext uri="{FF2B5EF4-FFF2-40B4-BE49-F238E27FC236}">
+                <a16:creationId xmlns:a16="http://schemas.microsoft.com/office/drawing/2014/main" id="{0649137D-2A6C-3A81-F639-FA3C26C76D3F}"/>
+              </a:ext>
+            </a:extLst>
+          </p:cNvPr>
+          <p:cNvSpPr>
+            <a:spLocks noGrp="1"/>
+          </p:cNvSpPr>
+          <p:nvPr>
+            <p:ph type="body" sz="quarter" idx="13"/>
           </p:nvPr>
         </p:nvSpPr>
         <p:spPr/>
@@ -13940,40 +13659,25 @@
           <a:p>
             <a:r>
               <a:rPr lang="en-US" dirty="0"/>
-              <a:t>Envision multimedia-based expertise and cross-media growth strategies</a:t>
-            </a:r>
-          </a:p>
-          <a:p>
-            <a:r>
-              <a:rPr lang="en-US" dirty="0"/>
-              <a:t>Visualize quality intellectual capital</a:t>
-            </a:r>
-          </a:p>
-          <a:p>
-            <a:r>
-              <a:rPr lang="en-US" dirty="0"/>
-              <a:t>Engage worldwide methodologies with web-enabled technologies</a:t>
-            </a:r>
-          </a:p>
-          <a:p>
-            <a:endParaRPr lang="en-US" dirty="0"/>
-          </a:p>
-        </p:txBody>
-      </p:sp>
-      <p:sp>
-        <p:nvSpPr>
-          <p:cNvPr id="12" name="Text Placeholder 11">
-            <a:extLst>
-              <a:ext uri="{FF2B5EF4-FFF2-40B4-BE49-F238E27FC236}">
-                <a16:creationId xmlns:a16="http://schemas.microsoft.com/office/drawing/2014/main" id="{B1A869CC-7228-424F-689B-19D4CEA20FF0}"/>
-              </a:ext>
-            </a:extLst>
-          </p:cNvPr>
-          <p:cNvSpPr>
-            <a:spLocks noGrp="1"/>
-          </p:cNvSpPr>
-          <p:nvPr>
-            <p:ph type="body" sz="quarter" idx="3"/>
+              <a:t>SEP 20XX</a:t>
+            </a:r>
+          </a:p>
+        </p:txBody>
+      </p:sp>
+      <p:sp>
+        <p:nvSpPr>
+          <p:cNvPr id="10" name="Text Placeholder 9">
+            <a:extLst>
+              <a:ext uri="{FF2B5EF4-FFF2-40B4-BE49-F238E27FC236}">
+                <a16:creationId xmlns:a16="http://schemas.microsoft.com/office/drawing/2014/main" id="{483C06D0-E1DB-BF5B-0723-E86ECD593FA6}"/>
+              </a:ext>
+            </a:extLst>
+          </p:cNvPr>
+          <p:cNvSpPr>
+            <a:spLocks noGrp="1"/>
+          </p:cNvSpPr>
+          <p:nvPr>
+            <p:ph type="body" sz="quarter" idx="18"/>
           </p:nvPr>
         </p:nvSpPr>
         <p:spPr/>
@@ -13981,27 +13685,89 @@
           <a:bodyPr/>
           <a:lstStyle/>
           <a:p>
+            <a:pPr lvl="0"/>
             <a:r>
               <a:rPr lang="en-US" dirty="0"/>
-              <a:t>NICHE MARKETS</a:t>
-            </a:r>
-          </a:p>
-        </p:txBody>
-      </p:sp>
-      <p:sp>
-        <p:nvSpPr>
-          <p:cNvPr id="14" name="Content Placeholder 13">
-            <a:extLst>
-              <a:ext uri="{FF2B5EF4-FFF2-40B4-BE49-F238E27FC236}">
-                <a16:creationId xmlns:a16="http://schemas.microsoft.com/office/drawing/2014/main" id="{110B594D-EC9B-B552-2A8F-EE5113E8B143}"/>
-              </a:ext>
-            </a:extLst>
-          </p:cNvPr>
-          <p:cNvSpPr>
-            <a:spLocks noGrp="1"/>
-          </p:cNvSpPr>
-          <p:nvPr>
-            <p:ph sz="quarter" idx="4"/>
+              <a:t>Synergize </a:t>
+            </a:r>
+          </a:p>
+          <a:p>
+            <a:pPr lvl="0"/>
+            <a:r>
+              <a:rPr lang="en-US" b="1" dirty="0"/>
+              <a:t>scalable </a:t>
+            </a:r>
+          </a:p>
+          <a:p>
+            <a:pPr lvl="0"/>
+            <a:r>
+              <a:rPr lang="en-US" b="1" dirty="0"/>
+              <a:t>e-commerce</a:t>
+            </a:r>
+          </a:p>
+        </p:txBody>
+      </p:sp>
+      <p:cxnSp>
+        <p:nvCxnSpPr>
+          <p:cNvPr id="47" name="Straight Arrow Connector 44" descr="Connecting arrow">
+            <a:extLst>
+              <a:ext uri="{FF2B5EF4-FFF2-40B4-BE49-F238E27FC236}">
+                <a16:creationId xmlns:a16="http://schemas.microsoft.com/office/drawing/2014/main" id="{BC3D7D22-1710-7586-51EC-807950387573}"/>
+              </a:ext>
+            </a:extLst>
+          </p:cNvPr>
+          <p:cNvCxnSpPr>
+            <a:cxnSpLocks/>
+            <a:stCxn id="5" idx="3"/>
+            <a:endCxn id="3" idx="0"/>
+          </p:cNvCxnSpPr>
+          <p:nvPr/>
+        </p:nvCxnSpPr>
+        <p:spPr>
+          <a:xfrm rot="5400000" flipH="1" flipV="1">
+            <a:off x="3791601" y="2620051"/>
+            <a:ext cx="558161" cy="1966011"/>
+          </a:xfrm>
+          <a:prstGeom prst="bentConnector2">
+            <a:avLst/>
+          </a:prstGeom>
+          <a:ln w="12700">
+            <a:solidFill>
+              <a:schemeClr val="tx1"/>
+            </a:solidFill>
+            <a:prstDash val="dash"/>
+            <a:tailEnd type="triangle" w="lg" len="lg"/>
+          </a:ln>
+        </p:spPr>
+        <p:style>
+          <a:lnRef idx="1">
+            <a:schemeClr val="accent1"/>
+          </a:lnRef>
+          <a:fillRef idx="0">
+            <a:schemeClr val="accent1"/>
+          </a:fillRef>
+          <a:effectRef idx="0">
+            <a:schemeClr val="accent1"/>
+          </a:effectRef>
+          <a:fontRef idx="minor">
+            <a:schemeClr val="tx1"/>
+          </a:fontRef>
+        </p:style>
+      </p:cxnSp>
+      <p:sp>
+        <p:nvSpPr>
+          <p:cNvPr id="3" name="Text Placeholder 2">
+            <a:extLst>
+              <a:ext uri="{FF2B5EF4-FFF2-40B4-BE49-F238E27FC236}">
+                <a16:creationId xmlns:a16="http://schemas.microsoft.com/office/drawing/2014/main" id="{3BAC312B-0248-777F-AEB1-4F76CAA95ABF}"/>
+              </a:ext>
+            </a:extLst>
+          </p:cNvPr>
+          <p:cNvSpPr>
+            <a:spLocks noGrp="1"/>
+          </p:cNvSpPr>
+          <p:nvPr>
+            <p:ph type="body" sz="quarter" idx="14"/>
           </p:nvPr>
         </p:nvSpPr>
         <p:spPr/>
@@ -14011,41 +13777,25 @@
           <a:p>
             <a:r>
               <a:rPr lang="en-US" dirty="0"/>
-              <a:t>Pursue scalable customer service through sustainable strategies</a:t>
-            </a:r>
-          </a:p>
-          <a:p>
-            <a:r>
-              <a:rPr lang="en-US" dirty="0"/>
-              <a:t>Engage top-line web </a:t>
-            </a:r>
-            <a:br>
-              <a:rPr lang="en-US" dirty="0"/>
-            </a:br>
-            <a:r>
-              <a:rPr lang="en-US" dirty="0"/>
-              <a:t>services with cutting-edge deliverables</a:t>
-            </a:r>
-          </a:p>
-          <a:p>
-            <a:endParaRPr lang="en-US" dirty="0"/>
-          </a:p>
-        </p:txBody>
-      </p:sp>
-      <p:sp>
-        <p:nvSpPr>
-          <p:cNvPr id="9" name="Text Placeholder 8">
-            <a:extLst>
-              <a:ext uri="{FF2B5EF4-FFF2-40B4-BE49-F238E27FC236}">
-                <a16:creationId xmlns:a16="http://schemas.microsoft.com/office/drawing/2014/main" id="{EBAA58E7-F0D8-F39A-CEFD-71E5913073EF}"/>
-              </a:ext>
-            </a:extLst>
-          </p:cNvPr>
-          <p:cNvSpPr>
-            <a:spLocks noGrp="1"/>
-          </p:cNvSpPr>
-          <p:nvPr>
-            <p:ph type="body" sz="quarter" idx="13"/>
+              <a:t>JAN 20XX</a:t>
+            </a:r>
+          </a:p>
+        </p:txBody>
+      </p:sp>
+      <p:sp>
+        <p:nvSpPr>
+          <p:cNvPr id="11" name="Text Placeholder 10">
+            <a:extLst>
+              <a:ext uri="{FF2B5EF4-FFF2-40B4-BE49-F238E27FC236}">
+                <a16:creationId xmlns:a16="http://schemas.microsoft.com/office/drawing/2014/main" id="{763E08B0-2334-33D6-E6CC-5D7120AD82A8}"/>
+              </a:ext>
+            </a:extLst>
+          </p:cNvPr>
+          <p:cNvSpPr>
+            <a:spLocks noGrp="1"/>
+          </p:cNvSpPr>
+          <p:nvPr>
+            <p:ph type="body" sz="quarter" idx="19"/>
           </p:nvPr>
         </p:nvSpPr>
         <p:spPr/>
@@ -14053,27 +13803,82 @@
           <a:bodyPr/>
           <a:lstStyle/>
           <a:p>
+            <a:pPr lvl="0"/>
             <a:r>
               <a:rPr lang="en-US" dirty="0"/>
-              <a:t>Supply CHAINS</a:t>
-            </a:r>
-          </a:p>
-        </p:txBody>
-      </p:sp>
-      <p:sp>
-        <p:nvSpPr>
-          <p:cNvPr id="10" name="Content Placeholder 9">
-            <a:extLst>
-              <a:ext uri="{FF2B5EF4-FFF2-40B4-BE49-F238E27FC236}">
-                <a16:creationId xmlns:a16="http://schemas.microsoft.com/office/drawing/2014/main" id="{E54F306D-CD94-F11A-8633-26962EE68BF7}"/>
-              </a:ext>
-            </a:extLst>
-          </p:cNvPr>
-          <p:cNvSpPr>
-            <a:spLocks noGrp="1"/>
-          </p:cNvSpPr>
-          <p:nvPr>
-            <p:ph sz="quarter" idx="14"/>
+              <a:t>Coordinate </a:t>
+            </a:r>
+          </a:p>
+          <a:p>
+            <a:pPr lvl="0"/>
+            <a:r>
+              <a:rPr lang="en-US" b="1" dirty="0"/>
+              <a:t>e-business applications</a:t>
+            </a:r>
+          </a:p>
+        </p:txBody>
+      </p:sp>
+      <p:cxnSp>
+        <p:nvCxnSpPr>
+          <p:cNvPr id="51" name="Straight Arrow Connector 44" descr="Connecting arrow">
+            <a:extLst>
+              <a:ext uri="{FF2B5EF4-FFF2-40B4-BE49-F238E27FC236}">
+                <a16:creationId xmlns:a16="http://schemas.microsoft.com/office/drawing/2014/main" id="{48A4C37F-6D4C-F508-C28E-2170FC2A6D8F}"/>
+              </a:ext>
+            </a:extLst>
+          </p:cNvPr>
+          <p:cNvCxnSpPr>
+            <a:cxnSpLocks/>
+            <a:stCxn id="6" idx="3"/>
+            <a:endCxn id="4" idx="0"/>
+          </p:cNvCxnSpPr>
+          <p:nvPr/>
+        </p:nvCxnSpPr>
+        <p:spPr>
+          <a:xfrm rot="5400000" flipH="1" flipV="1">
+            <a:off x="8238067" y="2622431"/>
+            <a:ext cx="553400" cy="1966010"/>
+          </a:xfrm>
+          <a:prstGeom prst="bentConnector2">
+            <a:avLst/>
+          </a:prstGeom>
+          <a:ln w="12700">
+            <a:solidFill>
+              <a:schemeClr val="tx1"/>
+            </a:solidFill>
+            <a:prstDash val="dash"/>
+            <a:tailEnd type="triangle" w="lg" len="lg"/>
+          </a:ln>
+        </p:spPr>
+        <p:style>
+          <a:lnRef idx="1">
+            <a:schemeClr val="accent1"/>
+          </a:lnRef>
+          <a:fillRef idx="0">
+            <a:schemeClr val="accent1"/>
+          </a:fillRef>
+          <a:effectRef idx="0">
+            <a:schemeClr val="accent1"/>
+          </a:effectRef>
+          <a:fontRef idx="minor">
+            <a:schemeClr val="tx1"/>
+          </a:fontRef>
+        </p:style>
+      </p:cxnSp>
+      <p:sp>
+        <p:nvSpPr>
+          <p:cNvPr id="4" name="Text Placeholder 3">
+            <a:extLst>
+              <a:ext uri="{FF2B5EF4-FFF2-40B4-BE49-F238E27FC236}">
+                <a16:creationId xmlns:a16="http://schemas.microsoft.com/office/drawing/2014/main" id="{662F7B83-4957-3FDF-FCD7-670A863C20B2}"/>
+              </a:ext>
+            </a:extLst>
+          </p:cNvPr>
+          <p:cNvSpPr>
+            <a:spLocks noGrp="1"/>
+          </p:cNvSpPr>
+          <p:nvPr>
+            <p:ph type="body" sz="quarter" idx="15"/>
           </p:nvPr>
         </p:nvSpPr>
         <p:spPr/>
@@ -14083,31 +13888,25 @@
           <a:p>
             <a:r>
               <a:rPr lang="en-US" dirty="0"/>
-              <a:t>Cultivate one-to-one customer service with robust ideas</a:t>
-            </a:r>
-          </a:p>
-          <a:p>
-            <a:r>
-              <a:rPr lang="en-US" dirty="0"/>
-              <a:t>Maximize timely deliverables for real-time schemas</a:t>
-            </a:r>
-          </a:p>
-        </p:txBody>
-      </p:sp>
-      <p:sp>
-        <p:nvSpPr>
-          <p:cNvPr id="7" name="Footer Placeholder 6">
-            <a:extLst>
-              <a:ext uri="{FF2B5EF4-FFF2-40B4-BE49-F238E27FC236}">
-                <a16:creationId xmlns:a16="http://schemas.microsoft.com/office/drawing/2014/main" id="{0E08FD8E-3A0A-CCD4-5C2F-5B65BE73CBC5}"/>
-              </a:ext>
-            </a:extLst>
-          </p:cNvPr>
-          <p:cNvSpPr>
-            <a:spLocks noGrp="1"/>
-          </p:cNvSpPr>
-          <p:nvPr>
-            <p:ph type="ftr" sz="quarter" idx="11"/>
+              <a:t>May 20XX</a:t>
+            </a:r>
+          </a:p>
+        </p:txBody>
+      </p:sp>
+      <p:sp>
+        <p:nvSpPr>
+          <p:cNvPr id="12" name="Text Placeholder 11">
+            <a:extLst>
+              <a:ext uri="{FF2B5EF4-FFF2-40B4-BE49-F238E27FC236}">
+                <a16:creationId xmlns:a16="http://schemas.microsoft.com/office/drawing/2014/main" id="{B0661D74-2EFE-C693-BB74-D733AD13A861}"/>
+              </a:ext>
+            </a:extLst>
+          </p:cNvPr>
+          <p:cNvSpPr>
+            <a:spLocks noGrp="1"/>
+          </p:cNvSpPr>
+          <p:nvPr>
+            <p:ph type="body" sz="quarter" idx="20"/>
           </p:nvPr>
         </p:nvSpPr>
         <p:spPr/>
@@ -14115,19 +13914,250 @@
           <a:bodyPr/>
           <a:lstStyle/>
           <a:p>
+            <a:pPr lvl="0"/>
             <a:r>
               <a:rPr lang="en-US" dirty="0"/>
-              <a:t>PRESENTATION TITLE</a:t>
-            </a:r>
-          </a:p>
-        </p:txBody>
-      </p:sp>
-      <p:sp>
-        <p:nvSpPr>
-          <p:cNvPr id="8" name="Slide Number Placeholder 7">
-            <a:extLst>
-              <a:ext uri="{FF2B5EF4-FFF2-40B4-BE49-F238E27FC236}">
-                <a16:creationId xmlns:a16="http://schemas.microsoft.com/office/drawing/2014/main" id="{94786B75-8C5A-A01F-F202-D3CB14D3031F}"/>
+              <a:t>Deploy </a:t>
+            </a:r>
+            <a:r>
+              <a:rPr lang="en-US" b="1" dirty="0"/>
+              <a:t>strategic networks with compelling </a:t>
+            </a:r>
+          </a:p>
+          <a:p>
+            <a:pPr lvl="0"/>
+            <a:r>
+              <a:rPr lang="en-US" b="1" dirty="0"/>
+              <a:t>e-business needs</a:t>
+            </a:r>
+          </a:p>
+        </p:txBody>
+      </p:sp>
+      <p:cxnSp>
+        <p:nvCxnSpPr>
+          <p:cNvPr id="45" name="Straight Arrow Connector 44" descr="Connecting arrow">
+            <a:extLst>
+              <a:ext uri="{FF2B5EF4-FFF2-40B4-BE49-F238E27FC236}">
+                <a16:creationId xmlns:a16="http://schemas.microsoft.com/office/drawing/2014/main" id="{B8BFA6A1-385F-2847-59C6-213D0606710D}"/>
+              </a:ext>
+            </a:extLst>
+          </p:cNvPr>
+          <p:cNvCxnSpPr>
+            <a:stCxn id="2" idx="1"/>
+            <a:endCxn id="5" idx="0"/>
+          </p:cNvCxnSpPr>
+          <p:nvPr/>
+        </p:nvCxnSpPr>
+        <p:spPr>
+          <a:xfrm rot="16200000" flipH="1">
+            <a:off x="1571938" y="3513970"/>
+            <a:ext cx="553400" cy="1966011"/>
+          </a:xfrm>
+          <a:prstGeom prst="bentConnector2">
+            <a:avLst/>
+          </a:prstGeom>
+          <a:ln w="12700">
+            <a:solidFill>
+              <a:schemeClr val="tx1"/>
+            </a:solidFill>
+            <a:prstDash val="dash"/>
+            <a:tailEnd type="triangle" w="lg" len="lg"/>
+          </a:ln>
+        </p:spPr>
+        <p:style>
+          <a:lnRef idx="1">
+            <a:schemeClr val="accent1"/>
+          </a:lnRef>
+          <a:fillRef idx="0">
+            <a:schemeClr val="accent1"/>
+          </a:fillRef>
+          <a:effectRef idx="0">
+            <a:schemeClr val="accent1"/>
+          </a:effectRef>
+          <a:fontRef idx="minor">
+            <a:schemeClr val="tx1"/>
+          </a:fontRef>
+        </p:style>
+      </p:cxnSp>
+      <p:sp>
+        <p:nvSpPr>
+          <p:cNvPr id="5" name="Text Placeholder 4">
+            <a:extLst>
+              <a:ext uri="{FF2B5EF4-FFF2-40B4-BE49-F238E27FC236}">
+                <a16:creationId xmlns:a16="http://schemas.microsoft.com/office/drawing/2014/main" id="{568C0CFC-4DE9-71AA-6D3C-E8652D9BEBF5}"/>
+              </a:ext>
+            </a:extLst>
+          </p:cNvPr>
+          <p:cNvSpPr>
+            <a:spLocks noGrp="1"/>
+          </p:cNvSpPr>
+          <p:nvPr>
+            <p:ph type="body" sz="quarter" idx="16"/>
+          </p:nvPr>
+        </p:nvSpPr>
+        <p:spPr/>
+        <p:txBody>
+          <a:bodyPr/>
+          <a:lstStyle/>
+          <a:p>
+            <a:r>
+              <a:rPr lang="en-US" dirty="0"/>
+              <a:t>NOV 20XX</a:t>
+            </a:r>
+          </a:p>
+        </p:txBody>
+      </p:sp>
+      <p:sp>
+        <p:nvSpPr>
+          <p:cNvPr id="14" name="Text Placeholder 13">
+            <a:extLst>
+              <a:ext uri="{FF2B5EF4-FFF2-40B4-BE49-F238E27FC236}">
+                <a16:creationId xmlns:a16="http://schemas.microsoft.com/office/drawing/2014/main" id="{43DFEEA6-4AAD-5436-17AA-56EFDA3E432C}"/>
+              </a:ext>
+            </a:extLst>
+          </p:cNvPr>
+          <p:cNvSpPr>
+            <a:spLocks noGrp="1"/>
+          </p:cNvSpPr>
+          <p:nvPr>
+            <p:ph type="body" sz="quarter" idx="22"/>
+          </p:nvPr>
+        </p:nvSpPr>
+        <p:spPr/>
+        <p:txBody>
+          <a:bodyPr/>
+          <a:lstStyle/>
+          <a:p>
+            <a:pPr lvl="0"/>
+            <a:r>
+              <a:rPr lang="en-US" dirty="0"/>
+              <a:t>Disseminate standardized </a:t>
+            </a:r>
+            <a:r>
+              <a:rPr lang="en-US" b="1" dirty="0"/>
+              <a:t>metrics</a:t>
+            </a:r>
+          </a:p>
+        </p:txBody>
+      </p:sp>
+      <p:cxnSp>
+        <p:nvCxnSpPr>
+          <p:cNvPr id="49" name="Straight Arrow Connector 44" descr="Connecting arrow">
+            <a:extLst>
+              <a:ext uri="{FF2B5EF4-FFF2-40B4-BE49-F238E27FC236}">
+                <a16:creationId xmlns:a16="http://schemas.microsoft.com/office/drawing/2014/main" id="{900822B8-79FE-91B5-6738-C9AA0E33984E}"/>
+              </a:ext>
+            </a:extLst>
+          </p:cNvPr>
+          <p:cNvCxnSpPr>
+            <a:cxnSpLocks/>
+            <a:stCxn id="3" idx="1"/>
+            <a:endCxn id="6" idx="0"/>
+          </p:cNvCxnSpPr>
+          <p:nvPr/>
+        </p:nvCxnSpPr>
+        <p:spPr>
+          <a:xfrm rot="16200000" flipH="1">
+            <a:off x="6013644" y="3511589"/>
+            <a:ext cx="558161" cy="1966011"/>
+          </a:xfrm>
+          <a:prstGeom prst="bentConnector2">
+            <a:avLst/>
+          </a:prstGeom>
+          <a:ln w="12700">
+            <a:solidFill>
+              <a:schemeClr val="tx1"/>
+            </a:solidFill>
+            <a:prstDash val="dash"/>
+            <a:tailEnd type="triangle" w="lg" len="lg"/>
+          </a:ln>
+        </p:spPr>
+        <p:style>
+          <a:lnRef idx="1">
+            <a:schemeClr val="accent1"/>
+          </a:lnRef>
+          <a:fillRef idx="0">
+            <a:schemeClr val="accent1"/>
+          </a:fillRef>
+          <a:effectRef idx="0">
+            <a:schemeClr val="accent1"/>
+          </a:effectRef>
+          <a:fontRef idx="minor">
+            <a:schemeClr val="tx1"/>
+          </a:fontRef>
+        </p:style>
+      </p:cxnSp>
+      <p:sp>
+        <p:nvSpPr>
+          <p:cNvPr id="6" name="Text Placeholder 5">
+            <a:extLst>
+              <a:ext uri="{FF2B5EF4-FFF2-40B4-BE49-F238E27FC236}">
+                <a16:creationId xmlns:a16="http://schemas.microsoft.com/office/drawing/2014/main" id="{B68524C6-142C-4627-2305-AAB73C14EE1A}"/>
+              </a:ext>
+            </a:extLst>
+          </p:cNvPr>
+          <p:cNvSpPr>
+            <a:spLocks noGrp="1"/>
+          </p:cNvSpPr>
+          <p:nvPr>
+            <p:ph type="body" sz="quarter" idx="17"/>
+          </p:nvPr>
+        </p:nvSpPr>
+        <p:spPr/>
+        <p:txBody>
+          <a:bodyPr/>
+          <a:lstStyle/>
+          <a:p>
+            <a:r>
+              <a:rPr lang="en-US" dirty="0"/>
+              <a:t>MAR 20XX</a:t>
+            </a:r>
+          </a:p>
+        </p:txBody>
+      </p:sp>
+      <p:sp>
+        <p:nvSpPr>
+          <p:cNvPr id="13" name="Text Placeholder 12">
+            <a:extLst>
+              <a:ext uri="{FF2B5EF4-FFF2-40B4-BE49-F238E27FC236}">
+                <a16:creationId xmlns:a16="http://schemas.microsoft.com/office/drawing/2014/main" id="{13F81BE4-398C-16CD-B300-25082227312B}"/>
+              </a:ext>
+            </a:extLst>
+          </p:cNvPr>
+          <p:cNvSpPr>
+            <a:spLocks noGrp="1"/>
+          </p:cNvSpPr>
+          <p:nvPr>
+            <p:ph type="body" sz="quarter" idx="21"/>
+          </p:nvPr>
+        </p:nvSpPr>
+        <p:spPr>
+          <a:xfrm>
+            <a:off x="7827392" y="3882136"/>
+            <a:ext cx="1796654" cy="1783080"/>
+          </a:xfrm>
+        </p:spPr>
+        <p:txBody>
+          <a:bodyPr/>
+          <a:lstStyle/>
+          <a:p>
+            <a:r>
+              <a:rPr lang="en-US" dirty="0"/>
+              <a:t>Foster holistically superior </a:t>
+            </a:r>
+            <a:r>
+              <a:rPr lang="en-US" b="1" dirty="0"/>
+              <a:t>methodologies</a:t>
+            </a:r>
+          </a:p>
+        </p:txBody>
+      </p:sp>
+      <p:sp>
+        <p:nvSpPr>
+          <p:cNvPr id="9" name="Slide Number Placeholder 8">
+            <a:extLst>
+              <a:ext uri="{FF2B5EF4-FFF2-40B4-BE49-F238E27FC236}">
+                <a16:creationId xmlns:a16="http://schemas.microsoft.com/office/drawing/2014/main" id="{42D01FA3-0BE0-D543-3ABD-0B0771F30A19}"/>
               </a:ext>
             </a:extLst>
           </p:cNvPr>
@@ -14155,7 +14185,7 @@
     </p:spTree>
     <p:extLst>
       <p:ext uri="{BB962C8B-B14F-4D97-AF65-F5344CB8AC3E}">
-        <p14:creationId xmlns:p14="http://schemas.microsoft.com/office/powerpoint/2010/main" val="2352993737"/>
+        <p14:creationId xmlns:p14="http://schemas.microsoft.com/office/powerpoint/2010/main" val="312043735"/>
       </p:ext>
     </p:extLst>
   </p:cSld>
@@ -14184,10 +14214,10 @@
       </p:grpSpPr>
       <p:sp>
         <p:nvSpPr>
-          <p:cNvPr id="4" name="Title 3">
-            <a:extLst>
-              <a:ext uri="{FF2B5EF4-FFF2-40B4-BE49-F238E27FC236}">
-                <a16:creationId xmlns:a16="http://schemas.microsoft.com/office/drawing/2014/main" id="{224F687D-905D-5940-E92B-664E8ED07C88}"/>
+          <p:cNvPr id="41" name="Title 40">
+            <a:extLst>
+              <a:ext uri="{FF2B5EF4-FFF2-40B4-BE49-F238E27FC236}">
+                <a16:creationId xmlns:a16="http://schemas.microsoft.com/office/drawing/2014/main" id="{A49ABFAC-D966-9A7C-EFB9-4AA2A4BFCB3B}"/>
               </a:ext>
             </a:extLst>
           </p:cNvPr>
@@ -14205,17 +14235,17 @@
           <a:p>
             <a:r>
               <a:rPr lang="en-US" dirty="0"/>
-              <a:t>SUMMARY</a:t>
-            </a:r>
-          </a:p>
-        </p:txBody>
-      </p:sp>
-      <p:sp>
-        <p:nvSpPr>
-          <p:cNvPr id="2" name="Footer Placeholder 1">
-            <a:extLst>
-              <a:ext uri="{FF2B5EF4-FFF2-40B4-BE49-F238E27FC236}">
-                <a16:creationId xmlns:a16="http://schemas.microsoft.com/office/drawing/2014/main" id="{0EF1DD75-A4B1-D99B-2111-46A878B8EDA3}"/>
+              <a:t>AREAS OF FOCUS</a:t>
+            </a:r>
+          </a:p>
+        </p:txBody>
+      </p:sp>
+      <p:sp>
+        <p:nvSpPr>
+          <p:cNvPr id="7" name="Footer Placeholder 6">
+            <a:extLst>
+              <a:ext uri="{FF2B5EF4-FFF2-40B4-BE49-F238E27FC236}">
+                <a16:creationId xmlns:a16="http://schemas.microsoft.com/office/drawing/2014/main" id="{6C58156F-B502-2468-F7F7-7EF56BA44FBE}"/>
               </a:ext>
             </a:extLst>
           </p:cNvPr>
@@ -14240,18 +14270,18 @@
       </p:sp>
       <p:sp>
         <p:nvSpPr>
-          <p:cNvPr id="5" name="Content Placeholder 4">
-            <a:extLst>
-              <a:ext uri="{FF2B5EF4-FFF2-40B4-BE49-F238E27FC236}">
-                <a16:creationId xmlns:a16="http://schemas.microsoft.com/office/drawing/2014/main" id="{C4CDA331-68CA-C2AE-0A48-6F7117361A05}"/>
-              </a:ext>
-            </a:extLst>
-          </p:cNvPr>
-          <p:cNvSpPr>
-            <a:spLocks noGrp="1"/>
-          </p:cNvSpPr>
-          <p:nvPr>
-            <p:ph sz="quarter" idx="13"/>
+          <p:cNvPr id="42" name="Text Placeholder 41">
+            <a:extLst>
+              <a:ext uri="{FF2B5EF4-FFF2-40B4-BE49-F238E27FC236}">
+                <a16:creationId xmlns:a16="http://schemas.microsoft.com/office/drawing/2014/main" id="{E7EE4D5B-87DD-4137-0625-40623A0E8A35}"/>
+              </a:ext>
+            </a:extLst>
+          </p:cNvPr>
+          <p:cNvSpPr>
+            <a:spLocks noGrp="1"/>
+          </p:cNvSpPr>
+          <p:nvPr>
+            <p:ph type="body" idx="1"/>
           </p:nvPr>
         </p:nvSpPr>
         <p:spPr/>
@@ -14261,17 +14291,122 @@
           <a:p>
             <a:r>
               <a:rPr lang="en-US" dirty="0"/>
-              <a:t>At Contoso, we believe in giving 110%. By using our next-generation data architecture, we help organizations virtually manage agile workflows. We thrive because of our market knowledge and great team behind our product. As our CEO says, "Efficiencies will come from proactively transforming how we do business."</a:t>
-            </a:r>
-          </a:p>
-        </p:txBody>
-      </p:sp>
-      <p:sp>
-        <p:nvSpPr>
-          <p:cNvPr id="3" name="Slide Number Placeholder 2">
-            <a:extLst>
-              <a:ext uri="{FF2B5EF4-FFF2-40B4-BE49-F238E27FC236}">
-                <a16:creationId xmlns:a16="http://schemas.microsoft.com/office/drawing/2014/main" id="{F5FA6A62-8FBF-887D-0560-47FF98E22EF4}"/>
+              <a:t>B2B MARKET SCENARIOS</a:t>
+            </a:r>
+          </a:p>
+        </p:txBody>
+      </p:sp>
+      <p:sp>
+        <p:nvSpPr>
+          <p:cNvPr id="43" name="Content Placeholder 42">
+            <a:extLst>
+              <a:ext uri="{FF2B5EF4-FFF2-40B4-BE49-F238E27FC236}">
+                <a16:creationId xmlns:a16="http://schemas.microsoft.com/office/drawing/2014/main" id="{DDD88D28-D711-5AC9-E34C-3050A6413FB3}"/>
+              </a:ext>
+            </a:extLst>
+          </p:cNvPr>
+          <p:cNvSpPr>
+            <a:spLocks noGrp="1"/>
+          </p:cNvSpPr>
+          <p:nvPr>
+            <p:ph sz="half" idx="2"/>
+          </p:nvPr>
+        </p:nvSpPr>
+        <p:spPr/>
+        <p:txBody>
+          <a:bodyPr/>
+          <a:lstStyle/>
+          <a:p>
+            <a:r>
+              <a:rPr lang="en-US" dirty="0"/>
+              <a:t>Develop winning strategies to keep ahead of the competition​</a:t>
+            </a:r>
+          </a:p>
+          <a:p>
+            <a:r>
+              <a:rPr lang="en-US" dirty="0"/>
+              <a:t>Capitalize on low-hanging fruit to identify a ballpark value​</a:t>
+            </a:r>
+          </a:p>
+          <a:p>
+            <a:r>
+              <a:rPr lang="en-US" dirty="0"/>
+              <a:t>Visualize customer directed convergence</a:t>
+            </a:r>
+          </a:p>
+        </p:txBody>
+      </p:sp>
+      <p:sp>
+        <p:nvSpPr>
+          <p:cNvPr id="44" name="Text Placeholder 43">
+            <a:extLst>
+              <a:ext uri="{FF2B5EF4-FFF2-40B4-BE49-F238E27FC236}">
+                <a16:creationId xmlns:a16="http://schemas.microsoft.com/office/drawing/2014/main" id="{9A16E2DA-8782-EACD-C467-2BD2FC22391C}"/>
+              </a:ext>
+            </a:extLst>
+          </p:cNvPr>
+          <p:cNvSpPr>
+            <a:spLocks noGrp="1"/>
+          </p:cNvSpPr>
+          <p:nvPr>
+            <p:ph type="body" sz="quarter" idx="3"/>
+          </p:nvPr>
+        </p:nvSpPr>
+        <p:spPr/>
+        <p:txBody>
+          <a:bodyPr/>
+          <a:lstStyle/>
+          <a:p>
+            <a:r>
+              <a:rPr lang="en-US" dirty="0"/>
+              <a:t>CLOUD-BASED OPPORTUNITIES</a:t>
+            </a:r>
+          </a:p>
+        </p:txBody>
+      </p:sp>
+      <p:sp>
+        <p:nvSpPr>
+          <p:cNvPr id="45" name="Content Placeholder 44">
+            <a:extLst>
+              <a:ext uri="{FF2B5EF4-FFF2-40B4-BE49-F238E27FC236}">
+                <a16:creationId xmlns:a16="http://schemas.microsoft.com/office/drawing/2014/main" id="{2A504466-AF6B-14A5-DBE7-37A09EC63EC7}"/>
+              </a:ext>
+            </a:extLst>
+          </p:cNvPr>
+          <p:cNvSpPr>
+            <a:spLocks noGrp="1"/>
+          </p:cNvSpPr>
+          <p:nvPr>
+            <p:ph sz="quarter" idx="4"/>
+          </p:nvPr>
+        </p:nvSpPr>
+        <p:spPr/>
+        <p:txBody>
+          <a:bodyPr/>
+          <a:lstStyle/>
+          <a:p>
+            <a:r>
+              <a:rPr lang="en-US" dirty="0"/>
+              <a:t>Iterative approaches to corporate strategy</a:t>
+            </a:r>
+          </a:p>
+          <a:p>
+            <a:r>
+              <a:rPr lang="en-US" dirty="0"/>
+              <a:t>Establish a management framework from the inside</a:t>
+            </a:r>
+          </a:p>
+          <a:p>
+            <a:endParaRPr lang="en-US" dirty="0"/>
+          </a:p>
+        </p:txBody>
+      </p:sp>
+      <p:sp>
+        <p:nvSpPr>
+          <p:cNvPr id="8" name="Slide Number Placeholder 7">
+            <a:extLst>
+              <a:ext uri="{FF2B5EF4-FFF2-40B4-BE49-F238E27FC236}">
+                <a16:creationId xmlns:a16="http://schemas.microsoft.com/office/drawing/2014/main" id="{151DE16D-6222-1703-D240-DA742BD7BEF9}"/>
               </a:ext>
             </a:extLst>
           </p:cNvPr>
@@ -14291,6 +14426,471 @@
               <a:rPr lang="en-US" smtClean="0"/>
               <a:pPr/>
               <a:t>15</a:t>
+            </a:fld>
+            <a:endParaRPr lang="en-US" dirty="0"/>
+          </a:p>
+        </p:txBody>
+      </p:sp>
+    </p:spTree>
+    <p:extLst>
+      <p:ext uri="{BB962C8B-B14F-4D97-AF65-F5344CB8AC3E}">
+        <p14:creationId xmlns:p14="http://schemas.microsoft.com/office/powerpoint/2010/main" val="2700317568"/>
+      </p:ext>
+    </p:extLst>
+  </p:cSld>
+  <p:clrMapOvr>
+    <a:masterClrMapping/>
+  </p:clrMapOvr>
+</p:sld>
+</file>
+
+<file path=ppt/slides/slide16.xml><?xml version="1.0" encoding="utf-8"?>
+<p:sld xmlns:a="http://schemas.openxmlformats.org/drawingml/2006/main" xmlns:r="http://schemas.openxmlformats.org/officeDocument/2006/relationships" xmlns:p="http://schemas.openxmlformats.org/presentationml/2006/main">
+  <p:cSld>
+    <p:spTree>
+      <p:nvGrpSpPr>
+        <p:cNvPr id="1" name=""/>
+        <p:cNvGrpSpPr/>
+        <p:nvPr/>
+      </p:nvGrpSpPr>
+      <p:grpSpPr>
+        <a:xfrm>
+          <a:off x="0" y="0"/>
+          <a:ext cx="0" cy="0"/>
+          <a:chOff x="0" y="0"/>
+          <a:chExt cx="0" cy="0"/>
+        </a:xfrm>
+      </p:grpSpPr>
+      <p:sp>
+        <p:nvSpPr>
+          <p:cNvPr id="2" name="Title 1">
+            <a:extLst>
+              <a:ext uri="{FF2B5EF4-FFF2-40B4-BE49-F238E27FC236}">
+                <a16:creationId xmlns:a16="http://schemas.microsoft.com/office/drawing/2014/main" id="{38F5A0AD-52EA-8A3D-00F9-72C649D792FF}"/>
+              </a:ext>
+            </a:extLst>
+          </p:cNvPr>
+          <p:cNvSpPr>
+            <a:spLocks noGrp="1"/>
+          </p:cNvSpPr>
+          <p:nvPr>
+            <p:ph type="title"/>
+          </p:nvPr>
+        </p:nvSpPr>
+        <p:spPr/>
+        <p:txBody>
+          <a:bodyPr/>
+          <a:lstStyle/>
+          <a:p>
+            <a:r>
+              <a:rPr lang="en-US" dirty="0"/>
+              <a:t>HOW WE GET HERE</a:t>
+            </a:r>
+          </a:p>
+        </p:txBody>
+      </p:sp>
+      <p:sp>
+        <p:nvSpPr>
+          <p:cNvPr id="3" name="Text Placeholder 2">
+            <a:extLst>
+              <a:ext uri="{FF2B5EF4-FFF2-40B4-BE49-F238E27FC236}">
+                <a16:creationId xmlns:a16="http://schemas.microsoft.com/office/drawing/2014/main" id="{90961576-ECF8-2387-1D6B-533B869103A2}"/>
+              </a:ext>
+            </a:extLst>
+          </p:cNvPr>
+          <p:cNvSpPr>
+            <a:spLocks noGrp="1"/>
+          </p:cNvSpPr>
+          <p:nvPr>
+            <p:ph type="body" idx="1"/>
+          </p:nvPr>
+        </p:nvSpPr>
+        <p:spPr/>
+        <p:txBody>
+          <a:bodyPr/>
+          <a:lstStyle/>
+          <a:p>
+            <a:r>
+              <a:rPr lang="en-US" dirty="0"/>
+              <a:t>ROI</a:t>
+            </a:r>
+          </a:p>
+        </p:txBody>
+      </p:sp>
+      <p:sp>
+        <p:nvSpPr>
+          <p:cNvPr id="4" name="Content Placeholder 3">
+            <a:extLst>
+              <a:ext uri="{FF2B5EF4-FFF2-40B4-BE49-F238E27FC236}">
+                <a16:creationId xmlns:a16="http://schemas.microsoft.com/office/drawing/2014/main" id="{642609F2-7307-B671-065E-0168414672CB}"/>
+              </a:ext>
+            </a:extLst>
+          </p:cNvPr>
+          <p:cNvSpPr>
+            <a:spLocks noGrp="1"/>
+          </p:cNvSpPr>
+          <p:nvPr>
+            <p:ph sz="half" idx="2"/>
+          </p:nvPr>
+        </p:nvSpPr>
+        <p:spPr/>
+        <p:txBody>
+          <a:bodyPr/>
+          <a:lstStyle/>
+          <a:p>
+            <a:r>
+              <a:rPr lang="en-US" dirty="0"/>
+              <a:t>Envision multimedia-based expertise and cross-media growth strategies</a:t>
+            </a:r>
+          </a:p>
+          <a:p>
+            <a:r>
+              <a:rPr lang="en-US" dirty="0"/>
+              <a:t>Visualize quality intellectual capital</a:t>
+            </a:r>
+          </a:p>
+          <a:p>
+            <a:r>
+              <a:rPr lang="en-US" dirty="0"/>
+              <a:t>Engage worldwide methodologies with web-enabled technologies</a:t>
+            </a:r>
+          </a:p>
+          <a:p>
+            <a:endParaRPr lang="en-US" dirty="0"/>
+          </a:p>
+        </p:txBody>
+      </p:sp>
+      <p:sp>
+        <p:nvSpPr>
+          <p:cNvPr id="12" name="Text Placeholder 11">
+            <a:extLst>
+              <a:ext uri="{FF2B5EF4-FFF2-40B4-BE49-F238E27FC236}">
+                <a16:creationId xmlns:a16="http://schemas.microsoft.com/office/drawing/2014/main" id="{B1A869CC-7228-424F-689B-19D4CEA20FF0}"/>
+              </a:ext>
+            </a:extLst>
+          </p:cNvPr>
+          <p:cNvSpPr>
+            <a:spLocks noGrp="1"/>
+          </p:cNvSpPr>
+          <p:nvPr>
+            <p:ph type="body" sz="quarter" idx="3"/>
+          </p:nvPr>
+        </p:nvSpPr>
+        <p:spPr/>
+        <p:txBody>
+          <a:bodyPr/>
+          <a:lstStyle/>
+          <a:p>
+            <a:r>
+              <a:rPr lang="en-US" dirty="0"/>
+              <a:t>NICHE MARKETS</a:t>
+            </a:r>
+          </a:p>
+        </p:txBody>
+      </p:sp>
+      <p:sp>
+        <p:nvSpPr>
+          <p:cNvPr id="14" name="Content Placeholder 13">
+            <a:extLst>
+              <a:ext uri="{FF2B5EF4-FFF2-40B4-BE49-F238E27FC236}">
+                <a16:creationId xmlns:a16="http://schemas.microsoft.com/office/drawing/2014/main" id="{110B594D-EC9B-B552-2A8F-EE5113E8B143}"/>
+              </a:ext>
+            </a:extLst>
+          </p:cNvPr>
+          <p:cNvSpPr>
+            <a:spLocks noGrp="1"/>
+          </p:cNvSpPr>
+          <p:nvPr>
+            <p:ph sz="quarter" idx="4"/>
+          </p:nvPr>
+        </p:nvSpPr>
+        <p:spPr/>
+        <p:txBody>
+          <a:bodyPr/>
+          <a:lstStyle/>
+          <a:p>
+            <a:r>
+              <a:rPr lang="en-US" dirty="0"/>
+              <a:t>Pursue scalable customer service through sustainable strategies</a:t>
+            </a:r>
+          </a:p>
+          <a:p>
+            <a:r>
+              <a:rPr lang="en-US" dirty="0"/>
+              <a:t>Engage top-line web </a:t>
+            </a:r>
+            <a:br>
+              <a:rPr lang="en-US" dirty="0"/>
+            </a:br>
+            <a:r>
+              <a:rPr lang="en-US" dirty="0"/>
+              <a:t>services with cutting-edge deliverables</a:t>
+            </a:r>
+          </a:p>
+          <a:p>
+            <a:endParaRPr lang="en-US" dirty="0"/>
+          </a:p>
+        </p:txBody>
+      </p:sp>
+      <p:sp>
+        <p:nvSpPr>
+          <p:cNvPr id="9" name="Text Placeholder 8">
+            <a:extLst>
+              <a:ext uri="{FF2B5EF4-FFF2-40B4-BE49-F238E27FC236}">
+                <a16:creationId xmlns:a16="http://schemas.microsoft.com/office/drawing/2014/main" id="{EBAA58E7-F0D8-F39A-CEFD-71E5913073EF}"/>
+              </a:ext>
+            </a:extLst>
+          </p:cNvPr>
+          <p:cNvSpPr>
+            <a:spLocks noGrp="1"/>
+          </p:cNvSpPr>
+          <p:nvPr>
+            <p:ph type="body" sz="quarter" idx="13"/>
+          </p:nvPr>
+        </p:nvSpPr>
+        <p:spPr/>
+        <p:txBody>
+          <a:bodyPr/>
+          <a:lstStyle/>
+          <a:p>
+            <a:r>
+              <a:rPr lang="en-US" dirty="0"/>
+              <a:t>Supply CHAINS</a:t>
+            </a:r>
+          </a:p>
+        </p:txBody>
+      </p:sp>
+      <p:sp>
+        <p:nvSpPr>
+          <p:cNvPr id="10" name="Content Placeholder 9">
+            <a:extLst>
+              <a:ext uri="{FF2B5EF4-FFF2-40B4-BE49-F238E27FC236}">
+                <a16:creationId xmlns:a16="http://schemas.microsoft.com/office/drawing/2014/main" id="{E54F306D-CD94-F11A-8633-26962EE68BF7}"/>
+              </a:ext>
+            </a:extLst>
+          </p:cNvPr>
+          <p:cNvSpPr>
+            <a:spLocks noGrp="1"/>
+          </p:cNvSpPr>
+          <p:nvPr>
+            <p:ph sz="quarter" idx="14"/>
+          </p:nvPr>
+        </p:nvSpPr>
+        <p:spPr/>
+        <p:txBody>
+          <a:bodyPr/>
+          <a:lstStyle/>
+          <a:p>
+            <a:r>
+              <a:rPr lang="en-US" dirty="0"/>
+              <a:t>Cultivate one-to-one customer service with robust ideas</a:t>
+            </a:r>
+          </a:p>
+          <a:p>
+            <a:r>
+              <a:rPr lang="en-US" dirty="0"/>
+              <a:t>Maximize timely deliverables for real-time schemas</a:t>
+            </a:r>
+          </a:p>
+        </p:txBody>
+      </p:sp>
+      <p:sp>
+        <p:nvSpPr>
+          <p:cNvPr id="7" name="Footer Placeholder 6">
+            <a:extLst>
+              <a:ext uri="{FF2B5EF4-FFF2-40B4-BE49-F238E27FC236}">
+                <a16:creationId xmlns:a16="http://schemas.microsoft.com/office/drawing/2014/main" id="{0E08FD8E-3A0A-CCD4-5C2F-5B65BE73CBC5}"/>
+              </a:ext>
+            </a:extLst>
+          </p:cNvPr>
+          <p:cNvSpPr>
+            <a:spLocks noGrp="1"/>
+          </p:cNvSpPr>
+          <p:nvPr>
+            <p:ph type="ftr" sz="quarter" idx="11"/>
+          </p:nvPr>
+        </p:nvSpPr>
+        <p:spPr/>
+        <p:txBody>
+          <a:bodyPr/>
+          <a:lstStyle/>
+          <a:p>
+            <a:r>
+              <a:rPr lang="en-US" dirty="0"/>
+              <a:t>PRESENTATION TITLE</a:t>
+            </a:r>
+          </a:p>
+        </p:txBody>
+      </p:sp>
+      <p:sp>
+        <p:nvSpPr>
+          <p:cNvPr id="8" name="Slide Number Placeholder 7">
+            <a:extLst>
+              <a:ext uri="{FF2B5EF4-FFF2-40B4-BE49-F238E27FC236}">
+                <a16:creationId xmlns:a16="http://schemas.microsoft.com/office/drawing/2014/main" id="{94786B75-8C5A-A01F-F202-D3CB14D3031F}"/>
+              </a:ext>
+            </a:extLst>
+          </p:cNvPr>
+          <p:cNvSpPr>
+            <a:spLocks noGrp="1"/>
+          </p:cNvSpPr>
+          <p:nvPr>
+            <p:ph type="sldNum" sz="quarter" idx="12"/>
+          </p:nvPr>
+        </p:nvSpPr>
+        <p:spPr/>
+        <p:txBody>
+          <a:bodyPr/>
+          <a:lstStyle/>
+          <a:p>
+            <a:fld id="{294A09A9-5501-47C1-A89A-A340965A2BE2}" type="slidenum">
+              <a:rPr lang="en-US" smtClean="0"/>
+              <a:pPr/>
+              <a:t>16</a:t>
+            </a:fld>
+            <a:endParaRPr lang="en-US" dirty="0"/>
+          </a:p>
+        </p:txBody>
+      </p:sp>
+    </p:spTree>
+    <p:extLst>
+      <p:ext uri="{BB962C8B-B14F-4D97-AF65-F5344CB8AC3E}">
+        <p14:creationId xmlns:p14="http://schemas.microsoft.com/office/powerpoint/2010/main" val="2352993737"/>
+      </p:ext>
+    </p:extLst>
+  </p:cSld>
+  <p:clrMapOvr>
+    <a:masterClrMapping/>
+  </p:clrMapOvr>
+</p:sld>
+</file>
+
+<file path=ppt/slides/slide17.xml><?xml version="1.0" encoding="utf-8"?>
+<p:sld xmlns:a="http://schemas.openxmlformats.org/drawingml/2006/main" xmlns:r="http://schemas.openxmlformats.org/officeDocument/2006/relationships" xmlns:p="http://schemas.openxmlformats.org/presentationml/2006/main">
+  <p:cSld>
+    <p:spTree>
+      <p:nvGrpSpPr>
+        <p:cNvPr id="1" name=""/>
+        <p:cNvGrpSpPr/>
+        <p:nvPr/>
+      </p:nvGrpSpPr>
+      <p:grpSpPr>
+        <a:xfrm>
+          <a:off x="0" y="0"/>
+          <a:ext cx="0" cy="0"/>
+          <a:chOff x="0" y="0"/>
+          <a:chExt cx="0" cy="0"/>
+        </a:xfrm>
+      </p:grpSpPr>
+      <p:sp>
+        <p:nvSpPr>
+          <p:cNvPr id="4" name="Title 3">
+            <a:extLst>
+              <a:ext uri="{FF2B5EF4-FFF2-40B4-BE49-F238E27FC236}">
+                <a16:creationId xmlns:a16="http://schemas.microsoft.com/office/drawing/2014/main" id="{224F687D-905D-5940-E92B-664E8ED07C88}"/>
+              </a:ext>
+            </a:extLst>
+          </p:cNvPr>
+          <p:cNvSpPr>
+            <a:spLocks noGrp="1"/>
+          </p:cNvSpPr>
+          <p:nvPr>
+            <p:ph type="title"/>
+          </p:nvPr>
+        </p:nvSpPr>
+        <p:spPr/>
+        <p:txBody>
+          <a:bodyPr/>
+          <a:lstStyle/>
+          <a:p>
+            <a:r>
+              <a:rPr lang="en-US" dirty="0"/>
+              <a:t>SUMMARY</a:t>
+            </a:r>
+          </a:p>
+        </p:txBody>
+      </p:sp>
+      <p:sp>
+        <p:nvSpPr>
+          <p:cNvPr id="2" name="Footer Placeholder 1">
+            <a:extLst>
+              <a:ext uri="{FF2B5EF4-FFF2-40B4-BE49-F238E27FC236}">
+                <a16:creationId xmlns:a16="http://schemas.microsoft.com/office/drawing/2014/main" id="{0EF1DD75-A4B1-D99B-2111-46A878B8EDA3}"/>
+              </a:ext>
+            </a:extLst>
+          </p:cNvPr>
+          <p:cNvSpPr>
+            <a:spLocks noGrp="1"/>
+          </p:cNvSpPr>
+          <p:nvPr>
+            <p:ph type="ftr" sz="quarter" idx="11"/>
+          </p:nvPr>
+        </p:nvSpPr>
+        <p:spPr/>
+        <p:txBody>
+          <a:bodyPr/>
+          <a:lstStyle/>
+          <a:p>
+            <a:r>
+              <a:rPr lang="en-US" dirty="0"/>
+              <a:t>PRESENTATION TITLE</a:t>
+            </a:r>
+          </a:p>
+        </p:txBody>
+      </p:sp>
+      <p:sp>
+        <p:nvSpPr>
+          <p:cNvPr id="5" name="Content Placeholder 4">
+            <a:extLst>
+              <a:ext uri="{FF2B5EF4-FFF2-40B4-BE49-F238E27FC236}">
+                <a16:creationId xmlns:a16="http://schemas.microsoft.com/office/drawing/2014/main" id="{C4CDA331-68CA-C2AE-0A48-6F7117361A05}"/>
+              </a:ext>
+            </a:extLst>
+          </p:cNvPr>
+          <p:cNvSpPr>
+            <a:spLocks noGrp="1"/>
+          </p:cNvSpPr>
+          <p:nvPr>
+            <p:ph sz="quarter" idx="13"/>
+          </p:nvPr>
+        </p:nvSpPr>
+        <p:spPr/>
+        <p:txBody>
+          <a:bodyPr/>
+          <a:lstStyle/>
+          <a:p>
+            <a:r>
+              <a:rPr lang="en-US" dirty="0"/>
+              <a:t>At Contoso, we believe in giving 110%. By using our next-generation data architecture, we help organizations virtually manage agile workflows. We thrive because of our market knowledge and great team behind our product. As our CEO says, "Efficiencies will come from proactively transforming how we do business."</a:t>
+            </a:r>
+          </a:p>
+        </p:txBody>
+      </p:sp>
+      <p:sp>
+        <p:nvSpPr>
+          <p:cNvPr id="3" name="Slide Number Placeholder 2">
+            <a:extLst>
+              <a:ext uri="{FF2B5EF4-FFF2-40B4-BE49-F238E27FC236}">
+                <a16:creationId xmlns:a16="http://schemas.microsoft.com/office/drawing/2014/main" id="{F5FA6A62-8FBF-887D-0560-47FF98E22EF4}"/>
+              </a:ext>
+            </a:extLst>
+          </p:cNvPr>
+          <p:cNvSpPr>
+            <a:spLocks noGrp="1"/>
+          </p:cNvSpPr>
+          <p:nvPr>
+            <p:ph type="sldNum" sz="quarter" idx="12"/>
+          </p:nvPr>
+        </p:nvSpPr>
+        <p:spPr/>
+        <p:txBody>
+          <a:bodyPr/>
+          <a:lstStyle/>
+          <a:p>
+            <a:fld id="{294A09A9-5501-47C1-A89A-A340965A2BE2}" type="slidenum">
+              <a:rPr lang="en-US" smtClean="0"/>
+              <a:pPr/>
+              <a:t>17</a:t>
             </a:fld>
             <a:endParaRPr lang="en-US" dirty="0"/>
           </a:p>
@@ -14309,7 +14909,7 @@
 </p:sld>
 </file>
 
-<file path=ppt/slides/slide16.xml><?xml version="1.0" encoding="utf-8"?>
+<file path=ppt/slides/slide18.xml><?xml version="1.0" encoding="utf-8"?>
 <p:sld xmlns:a="http://schemas.openxmlformats.org/drawingml/2006/main" xmlns:r="http://schemas.openxmlformats.org/officeDocument/2006/relationships" xmlns:p="http://schemas.openxmlformats.org/presentationml/2006/main">
   <p:cSld>
     <p:spTree>
@@ -14548,6 +15148,16 @@
             </a:pPr>
             <a:r>
               <a:rPr lang="en-US" dirty="0"/>
+              <a:t>Legacy Issues</a:t>
+            </a:r>
+          </a:p>
+          <a:p>
+            <a:pPr marL="342900" indent="-342900">
+              <a:buFont typeface="Arial" panose="020B0604020202020204" pitchFamily="34" charset="0"/>
+              <a:buChar char="•"/>
+            </a:pPr>
+            <a:r>
+              <a:rPr lang="en-US" dirty="0"/>
               <a:t>Core Database Models</a:t>
             </a:r>
           </a:p>
@@ -14726,7 +15336,7 @@
           <a:lstStyle/>
           <a:p>
             <a:r>
-              <a:rPr lang="en-US" dirty="0"/>
+              <a:rPr lang="en-US" sz="1800" dirty="0"/>
               <a:t>The API Project was created to tackle a specific problem. That being to transitioning a fragile, unstructured legacy program that relied on unreliable text file for data storing/accessing, and turning that into a fast web-based API service.</a:t>
             </a:r>
           </a:p>
@@ -14900,13 +15510,8 @@
             </a:r>
             <a:r>
               <a:rPr lang="en-US" dirty="0"/>
-              <a:t> </a:t>
-            </a:r>
-            <a:r>
-              <a:rPr lang="en-US"/>
-              <a:t>Server Management Studio 21</a:t>
-            </a:r>
-            <a:endParaRPr lang="en-US" dirty="0"/>
+              <a:t> Server Management Studio 21</a:t>
+            </a:r>
           </a:p>
           <a:p>
             <a:pPr marL="342900" indent="-342900">
@@ -14942,10 +15547,9 @@
           <a:lstStyle/>
           <a:p>
             <a:r>
-              <a:rPr lang="en-US"/>
-              <a:t>PRESENTATION TITLE</a:t>
-            </a:r>
-            <a:endParaRPr lang="en-US" dirty="0"/>
+              <a:rPr lang="en-US" dirty="0"/>
+              <a:t>Library API</a:t>
+            </a:r>
           </a:p>
         </p:txBody>
       </p:sp>
@@ -15013,74 +15617,157 @@
           <p:cNvPr id="2" name="Title 1">
             <a:extLst>
               <a:ext uri="{FF2B5EF4-FFF2-40B4-BE49-F238E27FC236}">
-                <a16:creationId xmlns:a16="http://schemas.microsoft.com/office/drawing/2014/main" id="{51DF3D98-3C30-4CFC-8643-C81E829C8C25}"/>
-              </a:ext>
-            </a:extLst>
-          </p:cNvPr>
-          <p:cNvSpPr>
-            <a:spLocks noGrp="1"/>
-          </p:cNvSpPr>
-          <p:nvPr>
-            <p:ph type="ctrTitle"/>
+                <a16:creationId xmlns:a16="http://schemas.microsoft.com/office/drawing/2014/main" id="{175FAA9A-B7CA-7EA9-8A87-B7C6892FD302}"/>
+              </a:ext>
+            </a:extLst>
+          </p:cNvPr>
+          <p:cNvSpPr>
+            <a:spLocks noGrp="1"/>
+          </p:cNvSpPr>
+          <p:nvPr>
+            <p:ph type="title"/>
           </p:nvPr>
         </p:nvSpPr>
         <p:spPr/>
         <p:txBody>
-          <a:bodyPr anchor="t">
-            <a:noAutofit/>
-          </a:bodyPr>
+          <a:bodyPr/>
           <a:lstStyle/>
           <a:p>
-            <a:pPr algn="l"/>
-            <a:r>
-              <a:rPr lang="en-US" sz="9600" spc="300" dirty="0">
-                <a:ln w="28575">
-                  <a:solidFill>
-                    <a:schemeClr val="tx1"/>
-                  </a:solidFill>
-                </a:ln>
-                <a:noFill/>
-              </a:rPr>
-              <a:t>PRIMARY GOALS</a:t>
-            </a:r>
-          </a:p>
-        </p:txBody>
-      </p:sp>
-      <p:sp>
-        <p:nvSpPr>
-          <p:cNvPr id="3" name="Subtitle 2">
-            <a:extLst>
-              <a:ext uri="{FF2B5EF4-FFF2-40B4-BE49-F238E27FC236}">
-                <a16:creationId xmlns:a16="http://schemas.microsoft.com/office/drawing/2014/main" id="{A068D447-28D3-4F5F-B2DC-FD67E9015868}"/>
-              </a:ext>
-            </a:extLst>
-          </p:cNvPr>
-          <p:cNvSpPr>
-            <a:spLocks noGrp="1"/>
-          </p:cNvSpPr>
-          <p:nvPr>
-            <p:ph type="subTitle" idx="1"/>
+            <a:r>
+              <a:rPr lang="en-US" dirty="0"/>
+              <a:t>Legacy program issues</a:t>
+            </a:r>
+          </a:p>
+        </p:txBody>
+      </p:sp>
+      <p:sp>
+        <p:nvSpPr>
+          <p:cNvPr id="3" name="Content Placeholder 2">
+            <a:extLst>
+              <a:ext uri="{FF2B5EF4-FFF2-40B4-BE49-F238E27FC236}">
+                <a16:creationId xmlns:a16="http://schemas.microsoft.com/office/drawing/2014/main" id="{49E9AC57-433D-B98B-3AFF-57F16959DE24}"/>
+              </a:ext>
+            </a:extLst>
+          </p:cNvPr>
+          <p:cNvSpPr>
+            <a:spLocks noGrp="1"/>
+          </p:cNvSpPr>
+          <p:nvPr>
+            <p:ph sz="half" idx="2"/>
           </p:nvPr>
         </p:nvSpPr>
         <p:spPr/>
         <p:txBody>
-          <a:bodyPr anchor="t"/>
+          <a:bodyPr/>
           <a:lstStyle/>
           <a:p>
-            <a:pPr marL="0" indent="0" algn="l">
+            <a:r>
+              <a:rPr lang="en-US" b="1" dirty="0"/>
+              <a:t>Fragile file Based:</a:t>
+            </a:r>
+          </a:p>
+          <a:p>
+            <a:pPr marL="0" indent="0">
               <a:buNone/>
             </a:pPr>
             <a:r>
+              <a:rPr lang="en-US" dirty="0"/>
+              <a:t>The Legacy Program relied on flat .txt files, that lacked were on risk on corruption due disk, I/O, or format.</a:t>
+            </a:r>
+          </a:p>
+          <a:p>
+            <a:r>
               <a:rPr lang="en-US" b="1" dirty="0"/>
-              <a:t>Annual revenue growth</a:t>
-            </a:r>
+              <a:t>Scalability bottleneck:</a:t>
+            </a:r>
+          </a:p>
+          <a:p>
+            <a:pPr marL="0" indent="0">
+              <a:buNone/>
+            </a:pPr>
+            <a:r>
+              <a:rPr lang="en-US" dirty="0"/>
+              <a:t>The Linear searching through in memory failed to support complex filtering or pagination.</a:t>
+            </a:r>
+          </a:p>
+          <a:p>
+            <a:r>
+              <a:rPr lang="en-US" b="1" dirty="0"/>
+              <a:t>Security and Audits Flaw:</a:t>
+            </a:r>
+          </a:p>
+          <a:p>
+            <a:pPr marL="0" indent="0">
+              <a:buNone/>
+            </a:pPr>
+            <a:r>
+              <a:rPr lang="en-US" dirty="0"/>
+              <a:t>The hardcoded logic without centralized  database led to inconsistent tracking and missing trails.</a:t>
+            </a:r>
+          </a:p>
+        </p:txBody>
+      </p:sp>
+      <p:sp>
+        <p:nvSpPr>
+          <p:cNvPr id="4" name="Footer Placeholder 3">
+            <a:extLst>
+              <a:ext uri="{FF2B5EF4-FFF2-40B4-BE49-F238E27FC236}">
+                <a16:creationId xmlns:a16="http://schemas.microsoft.com/office/drawing/2014/main" id="{0538BD8C-4CD7-FB95-2FF7-0561403060C8}"/>
+              </a:ext>
+            </a:extLst>
+          </p:cNvPr>
+          <p:cNvSpPr>
+            <a:spLocks noGrp="1"/>
+          </p:cNvSpPr>
+          <p:nvPr>
+            <p:ph type="ftr" sz="quarter" idx="11"/>
+          </p:nvPr>
+        </p:nvSpPr>
+        <p:spPr/>
+        <p:txBody>
+          <a:bodyPr/>
+          <a:lstStyle/>
+          <a:p>
+            <a:r>
+              <a:rPr lang="en-US" dirty="0"/>
+              <a:t>Library API</a:t>
+            </a:r>
+          </a:p>
+        </p:txBody>
+      </p:sp>
+      <p:sp>
+        <p:nvSpPr>
+          <p:cNvPr id="5" name="Slide Number Placeholder 4">
+            <a:extLst>
+              <a:ext uri="{FF2B5EF4-FFF2-40B4-BE49-F238E27FC236}">
+                <a16:creationId xmlns:a16="http://schemas.microsoft.com/office/drawing/2014/main" id="{F9B2B99E-DA2E-6C7E-ADB3-9DC41999A843}"/>
+              </a:ext>
+            </a:extLst>
+          </p:cNvPr>
+          <p:cNvSpPr>
+            <a:spLocks noGrp="1"/>
+          </p:cNvSpPr>
+          <p:nvPr>
+            <p:ph type="sldNum" sz="quarter" idx="12"/>
+          </p:nvPr>
+        </p:nvSpPr>
+        <p:spPr/>
+        <p:txBody>
+          <a:bodyPr/>
+          <a:lstStyle/>
+          <a:p>
+            <a:fld id="{294A09A9-5501-47C1-A89A-A340965A2BE2}" type="slidenum">
+              <a:rPr lang="en-US" smtClean="0"/>
+              <a:t>5</a:t>
+            </a:fld>
+            <a:endParaRPr lang="en-US" dirty="0"/>
           </a:p>
         </p:txBody>
       </p:sp>
     </p:spTree>
     <p:extLst>
       <p:ext uri="{BB962C8B-B14F-4D97-AF65-F5344CB8AC3E}">
-        <p14:creationId xmlns:p14="http://schemas.microsoft.com/office/powerpoint/2010/main" val="3308071976"/>
+        <p14:creationId xmlns:p14="http://schemas.microsoft.com/office/powerpoint/2010/main" val="3232340603"/>
       </p:ext>
     </p:extLst>
   </p:cSld>
@@ -15109,6 +15796,286 @@
       </p:grpSpPr>
       <p:sp>
         <p:nvSpPr>
+          <p:cNvPr id="2" name="Title 1">
+            <a:extLst>
+              <a:ext uri="{FF2B5EF4-FFF2-40B4-BE49-F238E27FC236}">
+                <a16:creationId xmlns:a16="http://schemas.microsoft.com/office/drawing/2014/main" id="{670003EE-9CB6-3767-B49E-2F46BB6E87EB}"/>
+              </a:ext>
+            </a:extLst>
+          </p:cNvPr>
+          <p:cNvSpPr>
+            <a:spLocks noGrp="1"/>
+          </p:cNvSpPr>
+          <p:nvPr>
+            <p:ph type="title"/>
+          </p:nvPr>
+        </p:nvSpPr>
+        <p:spPr/>
+        <p:txBody>
+          <a:bodyPr/>
+          <a:lstStyle/>
+          <a:p>
+            <a:r>
+              <a:rPr lang="en-US" dirty="0"/>
+              <a:t>MORDEN SOLUTIONS</a:t>
+            </a:r>
+          </a:p>
+        </p:txBody>
+      </p:sp>
+      <p:sp>
+        <p:nvSpPr>
+          <p:cNvPr id="3" name="Content Placeholder 2">
+            <a:extLst>
+              <a:ext uri="{FF2B5EF4-FFF2-40B4-BE49-F238E27FC236}">
+                <a16:creationId xmlns:a16="http://schemas.microsoft.com/office/drawing/2014/main" id="{4D0C3D17-A4D7-1ADA-06E5-06704796F6AF}"/>
+              </a:ext>
+            </a:extLst>
+          </p:cNvPr>
+          <p:cNvSpPr>
+            <a:spLocks noGrp="1"/>
+          </p:cNvSpPr>
+          <p:nvPr>
+            <p:ph sz="half" idx="2"/>
+          </p:nvPr>
+        </p:nvSpPr>
+        <p:spPr/>
+        <p:txBody>
+          <a:bodyPr/>
+          <a:lstStyle/>
+          <a:p>
+            <a:r>
+              <a:rPr lang="en-US" dirty="0"/>
+              <a:t>Morden Technology Stack:</a:t>
+            </a:r>
+          </a:p>
+          <a:p>
+            <a:pPr marL="0" indent="0">
+              <a:buNone/>
+            </a:pPr>
+            <a:r>
+              <a:rPr lang="en-US" dirty="0"/>
+              <a:t>Built using ASP .NET Minimal API, Entity Framework Core and Microsoft SQL Server.</a:t>
+            </a:r>
+          </a:p>
+          <a:p>
+            <a:r>
+              <a:rPr lang="en-US" dirty="0"/>
+              <a:t>Departure From Concern:</a:t>
+            </a:r>
+          </a:p>
+          <a:p>
+            <a:pPr marL="0" indent="0">
+              <a:buNone/>
+            </a:pPr>
+            <a:r>
+              <a:rPr lang="en-US" dirty="0"/>
+              <a:t>Using clean architecture that uses portioning data entities, context configuration and REST endpoints.</a:t>
+            </a:r>
+          </a:p>
+          <a:p>
+            <a:r>
+              <a:rPr lang="en-US" dirty="0"/>
+              <a:t>Defensive </a:t>
+            </a:r>
+            <a:r>
+              <a:rPr lang="en-US" dirty="0" err="1"/>
+              <a:t>Enibneering</a:t>
+            </a:r>
+            <a:endParaRPr lang="en-US" dirty="0"/>
+          </a:p>
+          <a:p>
+            <a:endParaRPr lang="en-US" dirty="0"/>
+          </a:p>
+        </p:txBody>
+      </p:sp>
+      <p:sp>
+        <p:nvSpPr>
+          <p:cNvPr id="4" name="Footer Placeholder 3">
+            <a:extLst>
+              <a:ext uri="{FF2B5EF4-FFF2-40B4-BE49-F238E27FC236}">
+                <a16:creationId xmlns:a16="http://schemas.microsoft.com/office/drawing/2014/main" id="{49EBFEDB-6ADE-8CFF-4CEE-3931AD92B64A}"/>
+              </a:ext>
+            </a:extLst>
+          </p:cNvPr>
+          <p:cNvSpPr>
+            <a:spLocks noGrp="1"/>
+          </p:cNvSpPr>
+          <p:nvPr>
+            <p:ph type="ftr" sz="quarter" idx="11"/>
+          </p:nvPr>
+        </p:nvSpPr>
+        <p:spPr/>
+        <p:txBody>
+          <a:bodyPr/>
+          <a:lstStyle/>
+          <a:p>
+            <a:r>
+              <a:rPr lang="en-US" dirty="0"/>
+              <a:t>Library API</a:t>
+            </a:r>
+          </a:p>
+        </p:txBody>
+      </p:sp>
+      <p:sp>
+        <p:nvSpPr>
+          <p:cNvPr id="5" name="Slide Number Placeholder 4">
+            <a:extLst>
+              <a:ext uri="{FF2B5EF4-FFF2-40B4-BE49-F238E27FC236}">
+                <a16:creationId xmlns:a16="http://schemas.microsoft.com/office/drawing/2014/main" id="{0687D268-8140-5574-E47D-95F67F133816}"/>
+              </a:ext>
+            </a:extLst>
+          </p:cNvPr>
+          <p:cNvSpPr>
+            <a:spLocks noGrp="1"/>
+          </p:cNvSpPr>
+          <p:nvPr>
+            <p:ph type="sldNum" sz="quarter" idx="12"/>
+          </p:nvPr>
+        </p:nvSpPr>
+        <p:spPr/>
+        <p:txBody>
+          <a:bodyPr/>
+          <a:lstStyle/>
+          <a:p>
+            <a:fld id="{294A09A9-5501-47C1-A89A-A340965A2BE2}" type="slidenum">
+              <a:rPr lang="en-US" smtClean="0"/>
+              <a:t>6</a:t>
+            </a:fld>
+            <a:endParaRPr lang="en-US" dirty="0"/>
+          </a:p>
+        </p:txBody>
+      </p:sp>
+    </p:spTree>
+    <p:extLst>
+      <p:ext uri="{BB962C8B-B14F-4D97-AF65-F5344CB8AC3E}">
+        <p14:creationId xmlns:p14="http://schemas.microsoft.com/office/powerpoint/2010/main" val="1991453617"/>
+      </p:ext>
+    </p:extLst>
+  </p:cSld>
+  <p:clrMapOvr>
+    <a:masterClrMapping/>
+  </p:clrMapOvr>
+</p:sld>
+</file>
+
+<file path=ppt/slides/slide7.xml><?xml version="1.0" encoding="utf-8"?>
+<p:sld xmlns:a="http://schemas.openxmlformats.org/drawingml/2006/main" xmlns:r="http://schemas.openxmlformats.org/officeDocument/2006/relationships" xmlns:p="http://schemas.openxmlformats.org/presentationml/2006/main">
+  <p:cSld>
+    <p:spTree>
+      <p:nvGrpSpPr>
+        <p:cNvPr id="1" name=""/>
+        <p:cNvGrpSpPr/>
+        <p:nvPr/>
+      </p:nvGrpSpPr>
+      <p:grpSpPr>
+        <a:xfrm>
+          <a:off x="0" y="0"/>
+          <a:ext cx="0" cy="0"/>
+          <a:chOff x="0" y="0"/>
+          <a:chExt cx="0" cy="0"/>
+        </a:xfrm>
+      </p:grpSpPr>
+      <p:sp>
+        <p:nvSpPr>
+          <p:cNvPr id="2" name="Title 1">
+            <a:extLst>
+              <a:ext uri="{FF2B5EF4-FFF2-40B4-BE49-F238E27FC236}">
+                <a16:creationId xmlns:a16="http://schemas.microsoft.com/office/drawing/2014/main" id="{51DF3D98-3C30-4CFC-8643-C81E829C8C25}"/>
+              </a:ext>
+            </a:extLst>
+          </p:cNvPr>
+          <p:cNvSpPr>
+            <a:spLocks noGrp="1"/>
+          </p:cNvSpPr>
+          <p:nvPr>
+            <p:ph type="ctrTitle"/>
+          </p:nvPr>
+        </p:nvSpPr>
+        <p:spPr/>
+        <p:txBody>
+          <a:bodyPr anchor="t">
+            <a:noAutofit/>
+          </a:bodyPr>
+          <a:lstStyle/>
+          <a:p>
+            <a:pPr algn="l"/>
+            <a:r>
+              <a:rPr lang="en-US" sz="9600" spc="300" dirty="0">
+                <a:ln w="28575">
+                  <a:solidFill>
+                    <a:schemeClr val="tx1"/>
+                  </a:solidFill>
+                </a:ln>
+                <a:noFill/>
+              </a:rPr>
+              <a:t>PRIMARY GOALS</a:t>
+            </a:r>
+          </a:p>
+        </p:txBody>
+      </p:sp>
+      <p:sp>
+        <p:nvSpPr>
+          <p:cNvPr id="3" name="Subtitle 2">
+            <a:extLst>
+              <a:ext uri="{FF2B5EF4-FFF2-40B4-BE49-F238E27FC236}">
+                <a16:creationId xmlns:a16="http://schemas.microsoft.com/office/drawing/2014/main" id="{A068D447-28D3-4F5F-B2DC-FD67E9015868}"/>
+              </a:ext>
+            </a:extLst>
+          </p:cNvPr>
+          <p:cNvSpPr>
+            <a:spLocks noGrp="1"/>
+          </p:cNvSpPr>
+          <p:nvPr>
+            <p:ph type="subTitle" idx="1"/>
+          </p:nvPr>
+        </p:nvSpPr>
+        <p:spPr/>
+        <p:txBody>
+          <a:bodyPr anchor="t"/>
+          <a:lstStyle/>
+          <a:p>
+            <a:pPr marL="0" indent="0" algn="l">
+              <a:buNone/>
+            </a:pPr>
+            <a:r>
+              <a:rPr lang="en-US" b="1" dirty="0"/>
+              <a:t>Annual revenue growth</a:t>
+            </a:r>
+          </a:p>
+        </p:txBody>
+      </p:sp>
+    </p:spTree>
+    <p:extLst>
+      <p:ext uri="{BB962C8B-B14F-4D97-AF65-F5344CB8AC3E}">
+        <p14:creationId xmlns:p14="http://schemas.microsoft.com/office/powerpoint/2010/main" val="3308071976"/>
+      </p:ext>
+    </p:extLst>
+  </p:cSld>
+  <p:clrMapOvr>
+    <a:masterClrMapping/>
+  </p:clrMapOvr>
+</p:sld>
+</file>
+
+<file path=ppt/slides/slide8.xml><?xml version="1.0" encoding="utf-8"?>
+<p:sld xmlns:a="http://schemas.openxmlformats.org/drawingml/2006/main" xmlns:r="http://schemas.openxmlformats.org/officeDocument/2006/relationships" xmlns:p="http://schemas.openxmlformats.org/presentationml/2006/main">
+  <p:cSld>
+    <p:spTree>
+      <p:nvGrpSpPr>
+        <p:cNvPr id="1" name=""/>
+        <p:cNvGrpSpPr/>
+        <p:nvPr/>
+      </p:nvGrpSpPr>
+      <p:grpSpPr>
+        <a:xfrm>
+          <a:off x="0" y="0"/>
+          <a:ext cx="0" cy="0"/>
+          <a:chOff x="0" y="0"/>
+          <a:chExt cx="0" cy="0"/>
+        </a:xfrm>
+      </p:grpSpPr>
+      <p:sp>
+        <p:nvSpPr>
           <p:cNvPr id="4" name="Title 3">
             <a:extLst>
               <a:ext uri="{FF2B5EF4-FFF2-40B4-BE49-F238E27FC236}">
@@ -15218,7 +16185,7 @@
             <a:fld id="{294A09A9-5501-47C1-A89A-A340965A2BE2}" type="slidenum">
               <a:rPr lang="en-US" smtClean="0"/>
               <a:pPr/>
-              <a:t>6</a:t>
+              <a:t>8</a:t>
             </a:fld>
             <a:endParaRPr lang="en-US" dirty="0"/>
           </a:p>
@@ -15237,7 +16204,7 @@
 </p:sld>
 </file>
 
-<file path=ppt/slides/slide7.xml><?xml version="1.0" encoding="utf-8"?>
+<file path=ppt/slides/slide9.xml><?xml version="1.0" encoding="utf-8"?>
 <p:sld xmlns:a="http://schemas.openxmlformats.org/drawingml/2006/main" xmlns:r="http://schemas.openxmlformats.org/officeDocument/2006/relationships" xmlns:p="http://schemas.openxmlformats.org/presentationml/2006/main">
   <p:cSld>
     <p:spTree>
@@ -17006,7 +17973,7 @@
             <a:fld id="{294A09A9-5501-47C1-A89A-A340965A2BE2}" type="slidenum">
               <a:rPr lang="en-US" smtClean="0"/>
               <a:pPr/>
-              <a:t>7</a:t>
+              <a:t>9</a:t>
             </a:fld>
             <a:endParaRPr lang="en-US" dirty="0"/>
           </a:p>
@@ -17016,604 +17983,6 @@
     <p:extLst>
       <p:ext uri="{BB962C8B-B14F-4D97-AF65-F5344CB8AC3E}">
         <p14:creationId xmlns:p14="http://schemas.microsoft.com/office/powerpoint/2010/main" val="772267823"/>
-      </p:ext>
-    </p:extLst>
-  </p:cSld>
-  <p:clrMapOvr>
-    <a:masterClrMapping/>
-  </p:clrMapOvr>
-</p:sld>
-</file>
-
-<file path=ppt/slides/slide8.xml><?xml version="1.0" encoding="utf-8"?>
-<p:sld xmlns:a="http://schemas.openxmlformats.org/drawingml/2006/main" xmlns:r="http://schemas.openxmlformats.org/officeDocument/2006/relationships" xmlns:p="http://schemas.openxmlformats.org/presentationml/2006/main">
-  <p:cSld>
-    <p:spTree>
-      <p:nvGrpSpPr>
-        <p:cNvPr id="1" name=""/>
-        <p:cNvGrpSpPr/>
-        <p:nvPr/>
-      </p:nvGrpSpPr>
-      <p:grpSpPr>
-        <a:xfrm>
-          <a:off x="0" y="0"/>
-          <a:ext cx="0" cy="0"/>
-          <a:chOff x="0" y="0"/>
-          <a:chExt cx="0" cy="0"/>
-        </a:xfrm>
-      </p:grpSpPr>
-      <p:sp>
-        <p:nvSpPr>
-          <p:cNvPr id="6" name="Title 5">
-            <a:extLst>
-              <a:ext uri="{FF2B5EF4-FFF2-40B4-BE49-F238E27FC236}">
-                <a16:creationId xmlns:a16="http://schemas.microsoft.com/office/drawing/2014/main" id="{19B727DE-9C16-360C-F34F-96B63BA5504C}"/>
-              </a:ext>
-            </a:extLst>
-          </p:cNvPr>
-          <p:cNvSpPr>
-            <a:spLocks noGrp="1"/>
-          </p:cNvSpPr>
-          <p:nvPr>
-            <p:ph type="title"/>
-          </p:nvPr>
-        </p:nvSpPr>
-        <p:spPr/>
-        <p:txBody>
-          <a:bodyPr/>
-          <a:lstStyle/>
-          <a:p>
-            <a:r>
-              <a:rPr lang="en-US" dirty="0"/>
-              <a:t>Business opportunities are like buses. There's always another one coming.</a:t>
-            </a:r>
-          </a:p>
-        </p:txBody>
-      </p:sp>
-      <p:sp>
-        <p:nvSpPr>
-          <p:cNvPr id="7" name="Text Placeholder 6">
-            <a:extLst>
-              <a:ext uri="{FF2B5EF4-FFF2-40B4-BE49-F238E27FC236}">
-                <a16:creationId xmlns:a16="http://schemas.microsoft.com/office/drawing/2014/main" id="{4067AB90-919C-547C-EA0C-C5763E0BC234}"/>
-              </a:ext>
-            </a:extLst>
-          </p:cNvPr>
-          <p:cNvSpPr>
-            <a:spLocks noGrp="1"/>
-          </p:cNvSpPr>
-          <p:nvPr>
-            <p:ph type="body" sz="quarter" idx="13"/>
-          </p:nvPr>
-        </p:nvSpPr>
-        <p:spPr/>
-        <p:txBody>
-          <a:bodyPr/>
-          <a:lstStyle/>
-          <a:p>
-            <a:r>
-              <a:rPr lang="en-US" dirty="0"/>
-              <a:t>Richard Branson</a:t>
-            </a:r>
-          </a:p>
-        </p:txBody>
-      </p:sp>
-      <p:sp>
-        <p:nvSpPr>
-          <p:cNvPr id="11" name="Text Placeholder 10">
-            <a:extLst>
-              <a:ext uri="{FF2B5EF4-FFF2-40B4-BE49-F238E27FC236}">
-                <a16:creationId xmlns:a16="http://schemas.microsoft.com/office/drawing/2014/main" id="{838F1D27-7C00-ADDA-3E62-FDBF008D5DDE}"/>
-              </a:ext>
-            </a:extLst>
-          </p:cNvPr>
-          <p:cNvSpPr>
-            <a:spLocks noGrp="1"/>
-          </p:cNvSpPr>
-          <p:nvPr>
-            <p:ph type="body" sz="quarter" idx="15"/>
-          </p:nvPr>
-        </p:nvSpPr>
-        <p:spPr/>
-        <p:txBody>
-          <a:bodyPr/>
-          <a:lstStyle/>
-          <a:p>
-            <a:r>
-              <a:rPr lang="en-US" dirty="0"/>
-              <a:t>”</a:t>
-            </a:r>
-          </a:p>
-        </p:txBody>
-      </p:sp>
-      <p:sp>
-        <p:nvSpPr>
-          <p:cNvPr id="10" name="Text Placeholder 9">
-            <a:extLst>
-              <a:ext uri="{FF2B5EF4-FFF2-40B4-BE49-F238E27FC236}">
-                <a16:creationId xmlns:a16="http://schemas.microsoft.com/office/drawing/2014/main" id="{65E24183-EEFA-02B9-BFB3-2C57E0B5A3FD}"/>
-              </a:ext>
-            </a:extLst>
-          </p:cNvPr>
-          <p:cNvSpPr>
-            <a:spLocks noGrp="1"/>
-          </p:cNvSpPr>
-          <p:nvPr>
-            <p:ph type="body" sz="quarter" idx="14"/>
-          </p:nvPr>
-        </p:nvSpPr>
-        <p:spPr/>
-        <p:txBody>
-          <a:bodyPr/>
-          <a:lstStyle/>
-          <a:p>
-            <a:r>
-              <a:rPr lang="en-US" dirty="0"/>
-              <a:t>“</a:t>
-            </a:r>
-          </a:p>
-        </p:txBody>
-      </p:sp>
-    </p:spTree>
-    <p:extLst>
-      <p:ext uri="{BB962C8B-B14F-4D97-AF65-F5344CB8AC3E}">
-        <p14:creationId xmlns:p14="http://schemas.microsoft.com/office/powerpoint/2010/main" val="2113713740"/>
-      </p:ext>
-    </p:extLst>
-  </p:cSld>
-  <p:clrMapOvr>
-    <a:masterClrMapping/>
-  </p:clrMapOvr>
-</p:sld>
-</file>
-
-<file path=ppt/slides/slide9.xml><?xml version="1.0" encoding="utf-8"?>
-<p:sld xmlns:a="http://schemas.openxmlformats.org/drawingml/2006/main" xmlns:r="http://schemas.openxmlformats.org/officeDocument/2006/relationships" xmlns:p="http://schemas.openxmlformats.org/presentationml/2006/main">
-  <p:cSld>
-    <p:spTree>
-      <p:nvGrpSpPr>
-        <p:cNvPr id="1" name=""/>
-        <p:cNvGrpSpPr/>
-        <p:nvPr/>
-      </p:nvGrpSpPr>
-      <p:grpSpPr>
-        <a:xfrm>
-          <a:off x="0" y="0"/>
-          <a:ext cx="0" cy="0"/>
-          <a:chOff x="0" y="0"/>
-          <a:chExt cx="0" cy="0"/>
-        </a:xfrm>
-      </p:grpSpPr>
-      <p:sp>
-        <p:nvSpPr>
-          <p:cNvPr id="16" name="Title 15">
-            <a:extLst>
-              <a:ext uri="{FF2B5EF4-FFF2-40B4-BE49-F238E27FC236}">
-                <a16:creationId xmlns:a16="http://schemas.microsoft.com/office/drawing/2014/main" id="{599B5F29-ED3B-9B44-DBBE-FD28EE7733A7}"/>
-              </a:ext>
-            </a:extLst>
-          </p:cNvPr>
-          <p:cNvSpPr>
-            <a:spLocks noGrp="1"/>
-          </p:cNvSpPr>
-          <p:nvPr>
-            <p:ph type="title"/>
-          </p:nvPr>
-        </p:nvSpPr>
-        <p:spPr/>
-        <p:txBody>
-          <a:bodyPr/>
-          <a:lstStyle/>
-          <a:p>
-            <a:r>
-              <a:rPr lang="en-US" dirty="0"/>
-              <a:t>MEET OUR TEAM</a:t>
-            </a:r>
-          </a:p>
-        </p:txBody>
-      </p:sp>
-      <p:sp>
-        <p:nvSpPr>
-          <p:cNvPr id="2" name="Footer Placeholder 1">
-            <a:extLst>
-              <a:ext uri="{FF2B5EF4-FFF2-40B4-BE49-F238E27FC236}">
-                <a16:creationId xmlns:a16="http://schemas.microsoft.com/office/drawing/2014/main" id="{91A8AD5F-DCF2-F71C-E7E2-C2FD42878531}"/>
-              </a:ext>
-            </a:extLst>
-          </p:cNvPr>
-          <p:cNvSpPr>
-            <a:spLocks noGrp="1"/>
-          </p:cNvSpPr>
-          <p:nvPr>
-            <p:ph type="ftr" sz="quarter" idx="11"/>
-          </p:nvPr>
-        </p:nvSpPr>
-        <p:spPr/>
-        <p:txBody>
-          <a:bodyPr/>
-          <a:lstStyle/>
-          <a:p>
-            <a:r>
-              <a:rPr lang="en-US" dirty="0"/>
-              <a:t>PRESENTATION TITLE</a:t>
-            </a:r>
-          </a:p>
-        </p:txBody>
-      </p:sp>
-      <p:pic>
-        <p:nvPicPr>
-          <p:cNvPr id="18" name="Picture Placeholder 17" descr="Team member head shot&#10;">
-            <a:extLst>
-              <a:ext uri="{FF2B5EF4-FFF2-40B4-BE49-F238E27FC236}">
-                <a16:creationId xmlns:a16="http://schemas.microsoft.com/office/drawing/2014/main" id="{0ECDCC4E-4E7F-362D-521D-CE5203600261}"/>
-              </a:ext>
-            </a:extLst>
-          </p:cNvPr>
-          <p:cNvPicPr>
-            <a:picLocks noGrp="1" noChangeAspect="1"/>
-          </p:cNvPicPr>
-          <p:nvPr>
-            <p:ph type="pic" sz="quarter" idx="13"/>
-          </p:nvPr>
-        </p:nvPicPr>
-        <p:blipFill rotWithShape="1">
-          <a:blip r:embed="rId2" cstate="email">
-            <a:extLst>
-              <a:ext uri="{28A0092B-C50C-407E-A947-70E740481C1C}">
-                <a14:useLocalDpi xmlns:a14="http://schemas.microsoft.com/office/drawing/2010/main"/>
-              </a:ext>
-            </a:extLst>
-          </a:blip>
-          <a:srcRect/>
-          <a:stretch/>
-        </p:blipFill>
-        <p:spPr/>
-      </p:pic>
-      <p:sp>
-        <p:nvSpPr>
-          <p:cNvPr id="8" name="Text Placeholder 7">
-            <a:extLst>
-              <a:ext uri="{FF2B5EF4-FFF2-40B4-BE49-F238E27FC236}">
-                <a16:creationId xmlns:a16="http://schemas.microsoft.com/office/drawing/2014/main" id="{F07ACA27-076A-FAA7-417C-5BC0A85F36AF}"/>
-              </a:ext>
-            </a:extLst>
-          </p:cNvPr>
-          <p:cNvSpPr>
-            <a:spLocks noGrp="1"/>
-          </p:cNvSpPr>
-          <p:nvPr>
-            <p:ph type="body" sz="quarter" idx="17"/>
-          </p:nvPr>
-        </p:nvSpPr>
-        <p:spPr/>
-        <p:txBody>
-          <a:bodyPr/>
-          <a:lstStyle/>
-          <a:p>
-            <a:r>
-              <a:rPr lang="en-US" dirty="0"/>
-              <a:t>TAKUMA HAYASHI​</a:t>
-            </a:r>
-          </a:p>
-        </p:txBody>
-      </p:sp>
-      <p:sp>
-        <p:nvSpPr>
-          <p:cNvPr id="9" name="Text Placeholder 8">
-            <a:extLst>
-              <a:ext uri="{FF2B5EF4-FFF2-40B4-BE49-F238E27FC236}">
-                <a16:creationId xmlns:a16="http://schemas.microsoft.com/office/drawing/2014/main" id="{D59ACCB8-2E44-8B01-9BCD-7AD37DA20F2E}"/>
-              </a:ext>
-            </a:extLst>
-          </p:cNvPr>
-          <p:cNvSpPr>
-            <a:spLocks noGrp="1"/>
-          </p:cNvSpPr>
-          <p:nvPr>
-            <p:ph type="body" sz="quarter" idx="18"/>
-          </p:nvPr>
-        </p:nvSpPr>
-        <p:spPr/>
-        <p:txBody>
-          <a:bodyPr/>
-          <a:lstStyle/>
-          <a:p>
-            <a:r>
-              <a:rPr lang="en-US" dirty="0"/>
-              <a:t>President</a:t>
-            </a:r>
-          </a:p>
-        </p:txBody>
-      </p:sp>
-      <p:pic>
-        <p:nvPicPr>
-          <p:cNvPr id="20" name="Picture Placeholder 19" descr="Team member head shot&#10;">
-            <a:extLst>
-              <a:ext uri="{FF2B5EF4-FFF2-40B4-BE49-F238E27FC236}">
-                <a16:creationId xmlns:a16="http://schemas.microsoft.com/office/drawing/2014/main" id="{FB9E1045-489B-E8C3-F476-6AF4ED23D929}"/>
-              </a:ext>
-            </a:extLst>
-          </p:cNvPr>
-          <p:cNvPicPr>
-            <a:picLocks noGrp="1" noChangeAspect="1"/>
-          </p:cNvPicPr>
-          <p:nvPr>
-            <p:ph type="pic" sz="quarter" idx="14"/>
-          </p:nvPr>
-        </p:nvPicPr>
-        <p:blipFill rotWithShape="1">
-          <a:blip r:embed="rId3" cstate="email">
-            <a:extLst>
-              <a:ext uri="{28A0092B-C50C-407E-A947-70E740481C1C}">
-                <a14:useLocalDpi xmlns:a14="http://schemas.microsoft.com/office/drawing/2010/main"/>
-              </a:ext>
-            </a:extLst>
-          </a:blip>
-          <a:srcRect/>
-          <a:stretch/>
-        </p:blipFill>
-        <p:spPr/>
-      </p:pic>
-      <p:sp>
-        <p:nvSpPr>
-          <p:cNvPr id="10" name="Text Placeholder 9">
-            <a:extLst>
-              <a:ext uri="{FF2B5EF4-FFF2-40B4-BE49-F238E27FC236}">
-                <a16:creationId xmlns:a16="http://schemas.microsoft.com/office/drawing/2014/main" id="{5670C16D-9661-482A-986D-0D6CB98AB869}"/>
-              </a:ext>
-            </a:extLst>
-          </p:cNvPr>
-          <p:cNvSpPr>
-            <a:spLocks noGrp="1"/>
-          </p:cNvSpPr>
-          <p:nvPr>
-            <p:ph type="body" sz="quarter" idx="19"/>
-          </p:nvPr>
-        </p:nvSpPr>
-        <p:spPr/>
-        <p:txBody>
-          <a:bodyPr/>
-          <a:lstStyle/>
-          <a:p>
-            <a:r>
-              <a:rPr lang="en-US" dirty="0"/>
-              <a:t>MIRJAM NILSSON</a:t>
-            </a:r>
-          </a:p>
-        </p:txBody>
-      </p:sp>
-      <p:sp>
-        <p:nvSpPr>
-          <p:cNvPr id="11" name="Text Placeholder 10">
-            <a:extLst>
-              <a:ext uri="{FF2B5EF4-FFF2-40B4-BE49-F238E27FC236}">
-                <a16:creationId xmlns:a16="http://schemas.microsoft.com/office/drawing/2014/main" id="{22115526-AEC6-C024-712E-E6CC8FB60E4D}"/>
-              </a:ext>
-            </a:extLst>
-          </p:cNvPr>
-          <p:cNvSpPr>
-            <a:spLocks noGrp="1"/>
-          </p:cNvSpPr>
-          <p:nvPr>
-            <p:ph type="body" sz="quarter" idx="20"/>
-          </p:nvPr>
-        </p:nvSpPr>
-        <p:spPr/>
-        <p:txBody>
-          <a:bodyPr/>
-          <a:lstStyle/>
-          <a:p>
-            <a:r>
-              <a:rPr lang="en-US" dirty="0"/>
-              <a:t>Chief Executive Officer​</a:t>
-            </a:r>
-          </a:p>
-        </p:txBody>
-      </p:sp>
-      <p:pic>
-        <p:nvPicPr>
-          <p:cNvPr id="22" name="Picture Placeholder 21" descr="Team member head shot&#10;">
-            <a:extLst>
-              <a:ext uri="{FF2B5EF4-FFF2-40B4-BE49-F238E27FC236}">
-                <a16:creationId xmlns:a16="http://schemas.microsoft.com/office/drawing/2014/main" id="{9517044C-59DB-C2E9-E5E2-0D8D29929762}"/>
-              </a:ext>
-            </a:extLst>
-          </p:cNvPr>
-          <p:cNvPicPr>
-            <a:picLocks noGrp="1" noChangeAspect="1"/>
-          </p:cNvPicPr>
-          <p:nvPr>
-            <p:ph type="pic" sz="quarter" idx="15"/>
-          </p:nvPr>
-        </p:nvPicPr>
-        <p:blipFill rotWithShape="1">
-          <a:blip r:embed="rId4" cstate="email">
-            <a:extLst>
-              <a:ext uri="{28A0092B-C50C-407E-A947-70E740481C1C}">
-                <a14:useLocalDpi xmlns:a14="http://schemas.microsoft.com/office/drawing/2010/main"/>
-              </a:ext>
-            </a:extLst>
-          </a:blip>
-          <a:srcRect/>
-          <a:stretch/>
-        </p:blipFill>
-        <p:spPr/>
-      </p:pic>
-      <p:sp>
-        <p:nvSpPr>
-          <p:cNvPr id="12" name="Text Placeholder 11">
-            <a:extLst>
-              <a:ext uri="{FF2B5EF4-FFF2-40B4-BE49-F238E27FC236}">
-                <a16:creationId xmlns:a16="http://schemas.microsoft.com/office/drawing/2014/main" id="{E26CB388-D0E5-9548-A57B-8A5352089E15}"/>
-              </a:ext>
-            </a:extLst>
-          </p:cNvPr>
-          <p:cNvSpPr>
-            <a:spLocks noGrp="1"/>
-          </p:cNvSpPr>
-          <p:nvPr>
-            <p:ph type="body" sz="quarter" idx="21"/>
-          </p:nvPr>
-        </p:nvSpPr>
-        <p:spPr/>
-        <p:txBody>
-          <a:bodyPr/>
-          <a:lstStyle/>
-          <a:p>
-            <a:r>
-              <a:rPr lang="en-US" dirty="0"/>
-              <a:t>FLORA BERGGREN</a:t>
-            </a:r>
-          </a:p>
-        </p:txBody>
-      </p:sp>
-      <p:sp>
-        <p:nvSpPr>
-          <p:cNvPr id="13" name="Text Placeholder 12">
-            <a:extLst>
-              <a:ext uri="{FF2B5EF4-FFF2-40B4-BE49-F238E27FC236}">
-                <a16:creationId xmlns:a16="http://schemas.microsoft.com/office/drawing/2014/main" id="{7DA1EEF4-1C46-B9FD-302F-61FC0265F748}"/>
-              </a:ext>
-            </a:extLst>
-          </p:cNvPr>
-          <p:cNvSpPr>
-            <a:spLocks noGrp="1"/>
-          </p:cNvSpPr>
-          <p:nvPr>
-            <p:ph type="body" sz="quarter" idx="22"/>
-          </p:nvPr>
-        </p:nvSpPr>
-        <p:spPr/>
-        <p:txBody>
-          <a:bodyPr/>
-          <a:lstStyle/>
-          <a:p>
-            <a:r>
-              <a:rPr lang="en-US" dirty="0"/>
-              <a:t>Chief Operations Officer​</a:t>
-            </a:r>
-          </a:p>
-        </p:txBody>
-      </p:sp>
-      <p:pic>
-        <p:nvPicPr>
-          <p:cNvPr id="24" name="Picture Placeholder 23" descr="Team member head shot&#10;">
-            <a:extLst>
-              <a:ext uri="{FF2B5EF4-FFF2-40B4-BE49-F238E27FC236}">
-                <a16:creationId xmlns:a16="http://schemas.microsoft.com/office/drawing/2014/main" id="{6112D1C1-243D-95D0-B45D-1BF79DC7E3B3}"/>
-              </a:ext>
-            </a:extLst>
-          </p:cNvPr>
-          <p:cNvPicPr>
-            <a:picLocks noGrp="1" noChangeAspect="1"/>
-          </p:cNvPicPr>
-          <p:nvPr>
-            <p:ph type="pic" sz="quarter" idx="16"/>
-          </p:nvPr>
-        </p:nvPicPr>
-        <p:blipFill rotWithShape="1">
-          <a:blip r:embed="rId5" cstate="email">
-            <a:extLst>
-              <a:ext uri="{28A0092B-C50C-407E-A947-70E740481C1C}">
-                <a14:useLocalDpi xmlns:a14="http://schemas.microsoft.com/office/drawing/2010/main"/>
-              </a:ext>
-            </a:extLst>
-          </a:blip>
-          <a:srcRect/>
-          <a:stretch/>
-        </p:blipFill>
-        <p:spPr/>
-      </p:pic>
-      <p:sp>
-        <p:nvSpPr>
-          <p:cNvPr id="14" name="Text Placeholder 13">
-            <a:extLst>
-              <a:ext uri="{FF2B5EF4-FFF2-40B4-BE49-F238E27FC236}">
-                <a16:creationId xmlns:a16="http://schemas.microsoft.com/office/drawing/2014/main" id="{519D9E81-2623-349E-904D-8BF6ECE353BA}"/>
-              </a:ext>
-            </a:extLst>
-          </p:cNvPr>
-          <p:cNvSpPr>
-            <a:spLocks noGrp="1"/>
-          </p:cNvSpPr>
-          <p:nvPr>
-            <p:ph type="body" sz="quarter" idx="23"/>
-          </p:nvPr>
-        </p:nvSpPr>
-        <p:spPr/>
-        <p:txBody>
-          <a:bodyPr/>
-          <a:lstStyle/>
-          <a:p>
-            <a:r>
-              <a:rPr lang="en-US" dirty="0"/>
-              <a:t>RAJESH SANTOSHI</a:t>
-            </a:r>
-          </a:p>
-        </p:txBody>
-      </p:sp>
-      <p:sp>
-        <p:nvSpPr>
-          <p:cNvPr id="15" name="Text Placeholder 14">
-            <a:extLst>
-              <a:ext uri="{FF2B5EF4-FFF2-40B4-BE49-F238E27FC236}">
-                <a16:creationId xmlns:a16="http://schemas.microsoft.com/office/drawing/2014/main" id="{2FC00352-D201-B54A-FE76-985161F19FEC}"/>
-              </a:ext>
-            </a:extLst>
-          </p:cNvPr>
-          <p:cNvSpPr>
-            <a:spLocks noGrp="1"/>
-          </p:cNvSpPr>
-          <p:nvPr>
-            <p:ph type="body" sz="quarter" idx="24"/>
-          </p:nvPr>
-        </p:nvSpPr>
-        <p:spPr/>
-        <p:txBody>
-          <a:bodyPr/>
-          <a:lstStyle/>
-          <a:p>
-            <a:r>
-              <a:rPr lang="en-US" dirty="0"/>
-              <a:t>VP Marketing​</a:t>
-            </a:r>
-          </a:p>
-        </p:txBody>
-      </p:sp>
-      <p:sp>
-        <p:nvSpPr>
-          <p:cNvPr id="3" name="Slide Number Placeholder 2">
-            <a:extLst>
-              <a:ext uri="{FF2B5EF4-FFF2-40B4-BE49-F238E27FC236}">
-                <a16:creationId xmlns:a16="http://schemas.microsoft.com/office/drawing/2014/main" id="{C11CC6B6-E9D4-1736-ABF6-727D2464A975}"/>
-              </a:ext>
-            </a:extLst>
-          </p:cNvPr>
-          <p:cNvSpPr>
-            <a:spLocks noGrp="1"/>
-          </p:cNvSpPr>
-          <p:nvPr>
-            <p:ph type="sldNum" sz="quarter" idx="12"/>
-          </p:nvPr>
-        </p:nvSpPr>
-        <p:spPr/>
-        <p:txBody>
-          <a:bodyPr/>
-          <a:lstStyle/>
-          <a:p>
-            <a:fld id="{294A09A9-5501-47C1-A89A-A340965A2BE2}" type="slidenum">
-              <a:rPr lang="en-US" smtClean="0"/>
-              <a:pPr/>
-              <a:t>9</a:t>
-            </a:fld>
-            <a:endParaRPr lang="en-US" dirty="0"/>
-          </a:p>
-        </p:txBody>
-      </p:sp>
-    </p:spTree>
-    <p:extLst>
-      <p:ext uri="{BB962C8B-B14F-4D97-AF65-F5344CB8AC3E}">
-        <p14:creationId xmlns:p14="http://schemas.microsoft.com/office/powerpoint/2010/main" val="4028410468"/>
       </p:ext>
     </p:extLst>
   </p:cSld>
@@ -18120,6 +18489,35 @@
 </file>
 
 <file path=customXml/item1.xml><?xml version="1.0" encoding="utf-8"?>
+<?mso-contentType ?>
+<FormTemplates xmlns="http://schemas.microsoft.com/sharepoint/v3/contenttype/forms">
+  <Display>DocumentLibraryForm</Display>
+  <Edit>DocumentLibraryForm</Edit>
+  <New>DocumentLibraryForm</New>
+</FormTemplates>
+</file>
+
+<file path=customXml/item2.xml><?xml version="1.0" encoding="utf-8"?>
+<p:properties xmlns:p="http://schemas.microsoft.com/office/2006/metadata/properties" xmlns:xsi="http://www.w3.org/2001/XMLSchema-instance" xmlns:pc="http://schemas.microsoft.com/office/infopath/2007/PartnerControls">
+  <documentManagement>
+    <_ip_UnifiedCompliancePolicyUIAction xmlns="http://schemas.microsoft.com/sharepoint/v3" xsi:nil="true"/>
+    <Image xmlns="71af3243-3dd4-4a8d-8c0d-dd76da1f02a5">
+      <Url xsi:nil="true"/>
+      <Description xsi:nil="true"/>
+    </Image>
+    <Status xmlns="71af3243-3dd4-4a8d-8c0d-dd76da1f02a5">Not started</Status>
+    <Background xmlns="71af3243-3dd4-4a8d-8c0d-dd76da1f02a5">false</Background>
+    <_ip_UnifiedCompliancePolicyProperties xmlns="http://schemas.microsoft.com/sharepoint/v3" xsi:nil="true"/>
+    <ImageTagsTaxHTField xmlns="71af3243-3dd4-4a8d-8c0d-dd76da1f02a5">
+      <Terms xmlns="http://schemas.microsoft.com/office/infopath/2007/PartnerControls"/>
+    </ImageTagsTaxHTField>
+    <TaxCatchAll xmlns="230e9df3-be65-4c73-a93b-d1236ebd677e" xsi:nil="true"/>
+    <MediaServiceKeyPoints xmlns="71af3243-3dd4-4a8d-8c0d-dd76da1f02a5" xsi:nil="true"/>
+  </documentManagement>
+</p:properties>
+</file>
+
+<file path=customXml/item3.xml><?xml version="1.0" encoding="utf-8"?>
 <ct:contentTypeSchema xmlns:ct="http://schemas.microsoft.com/office/2006/metadata/contentType" xmlns:ma="http://schemas.microsoft.com/office/2006/metadata/properties/metaAttributes" ct:_="" ma:_="" ma:contentTypeName="Document" ma:contentTypeID="0x01010079F111ED35F8CC479449609E8A0923A6" ma:contentTypeVersion="24" ma:contentTypeDescription="Create a new document." ma:contentTypeScope="" ma:versionID="2d714a3296df14eba7a100bb665443ca">
   <xsd:schema xmlns:xsd="http://www.w3.org/2001/XMLSchema" xmlns:xs="http://www.w3.org/2001/XMLSchema" xmlns:p="http://schemas.microsoft.com/office/2006/metadata/properties" xmlns:ns1="http://schemas.microsoft.com/sharepoint/v3" xmlns:ns2="71af3243-3dd4-4a8d-8c0d-dd76da1f02a5" xmlns:ns3="16c05727-aa75-4e4a-9b5f-8a80a1165891" xmlns:ns4="230e9df3-be65-4c73-a93b-d1236ebd677e" targetNamespace="http://schemas.microsoft.com/office/2006/metadata/properties" ma:root="true" ma:fieldsID="49549bf45bfbbfb6cffed527380e77e1" ns1:_="" ns2:_="" ns3:_="" ns4:_="">
     <xsd:import namespace="http://schemas.microsoft.com/sharepoint/v3"/>
@@ -18407,36 +18805,27 @@
 </ct:contentTypeSchema>
 </file>
 
-<file path=customXml/item2.xml><?xml version="1.0" encoding="utf-8"?>
-<p:properties xmlns:p="http://schemas.microsoft.com/office/2006/metadata/properties" xmlns:xsi="http://www.w3.org/2001/XMLSchema-instance" xmlns:pc="http://schemas.microsoft.com/office/infopath/2007/PartnerControls">
-  <documentManagement>
-    <_ip_UnifiedCompliancePolicyUIAction xmlns="http://schemas.microsoft.com/sharepoint/v3" xsi:nil="true"/>
-    <Image xmlns="71af3243-3dd4-4a8d-8c0d-dd76da1f02a5">
-      <Url xsi:nil="true"/>
-      <Description xsi:nil="true"/>
-    </Image>
-    <Status xmlns="71af3243-3dd4-4a8d-8c0d-dd76da1f02a5">Not started</Status>
-    <Background xmlns="71af3243-3dd4-4a8d-8c0d-dd76da1f02a5">false</Background>
-    <_ip_UnifiedCompliancePolicyProperties xmlns="http://schemas.microsoft.com/sharepoint/v3" xsi:nil="true"/>
-    <ImageTagsTaxHTField xmlns="71af3243-3dd4-4a8d-8c0d-dd76da1f02a5">
-      <Terms xmlns="http://schemas.microsoft.com/office/infopath/2007/PartnerControls"/>
-    </ImageTagsTaxHTField>
-    <TaxCatchAll xmlns="230e9df3-be65-4c73-a93b-d1236ebd677e" xsi:nil="true"/>
-    <MediaServiceKeyPoints xmlns="71af3243-3dd4-4a8d-8c0d-dd76da1f02a5" xsi:nil="true"/>
-  </documentManagement>
-</p:properties>
+<file path=customXml/itemProps1.xml><?xml version="1.0" encoding="utf-8"?>
+<ds:datastoreItem xmlns:ds="http://schemas.openxmlformats.org/officeDocument/2006/customXml" ds:itemID="{2421B937-7172-47A3-B8EF-010B04CBBB90}">
+  <ds:schemaRefs>
+    <ds:schemaRef ds:uri="http://schemas.microsoft.com/sharepoint/v3/contenttype/forms"/>
+  </ds:schemaRefs>
+</ds:datastoreItem>
 </file>
 
-<file path=customXml/item3.xml><?xml version="1.0" encoding="utf-8"?>
-<?mso-contentType ?>
-<FormTemplates xmlns="http://schemas.microsoft.com/sharepoint/v3/contenttype/forms">
-  <Display>DocumentLibraryForm</Display>
-  <Edit>DocumentLibraryForm</Edit>
-  <New>DocumentLibraryForm</New>
-</FormTemplates>
+<file path=customXml/itemProps2.xml><?xml version="1.0" encoding="utf-8"?>
+<ds:datastoreItem xmlns:ds="http://schemas.openxmlformats.org/officeDocument/2006/customXml" ds:itemID="{B14FA603-F875-4A03-93C9-402691CFAD8E}">
+  <ds:schemaRefs>
+    <ds:schemaRef ds:uri="http://schemas.microsoft.com/office/2006/metadata/properties"/>
+    <ds:schemaRef ds:uri="http://schemas.microsoft.com/office/infopath/2007/PartnerControls"/>
+    <ds:schemaRef ds:uri="http://schemas.microsoft.com/sharepoint/v3"/>
+    <ds:schemaRef ds:uri="71af3243-3dd4-4a8d-8c0d-dd76da1f02a5"/>
+    <ds:schemaRef ds:uri="230e9df3-be65-4c73-a93b-d1236ebd677e"/>
+  </ds:schemaRefs>
+</ds:datastoreItem>
 </file>
 
-<file path=customXml/itemProps1.xml><?xml version="1.0" encoding="utf-8"?>
+<file path=customXml/itemProps3.xml><?xml version="1.0" encoding="utf-8"?>
 <ds:datastoreItem xmlns:ds="http://schemas.openxmlformats.org/officeDocument/2006/customXml" ds:itemID="{6BCCC5ED-FDC5-47FC-8E7E-D334979F148A}">
   <ds:schemaRefs>
     <ds:schemaRef ds:uri="http://schemas.microsoft.com/office/2006/metadata/contentType"/>
@@ -18457,26 +18846,6 @@
 </ds:datastoreItem>
 </file>
 
-<file path=customXml/itemProps2.xml><?xml version="1.0" encoding="utf-8"?>
-<ds:datastoreItem xmlns:ds="http://schemas.openxmlformats.org/officeDocument/2006/customXml" ds:itemID="{B14FA603-F875-4A03-93C9-402691CFAD8E}">
-  <ds:schemaRefs>
-    <ds:schemaRef ds:uri="http://schemas.microsoft.com/office/2006/metadata/properties"/>
-    <ds:schemaRef ds:uri="http://schemas.microsoft.com/office/infopath/2007/PartnerControls"/>
-    <ds:schemaRef ds:uri="http://schemas.microsoft.com/sharepoint/v3"/>
-    <ds:schemaRef ds:uri="71af3243-3dd4-4a8d-8c0d-dd76da1f02a5"/>
-    <ds:schemaRef ds:uri="230e9df3-be65-4c73-a93b-d1236ebd677e"/>
-  </ds:schemaRefs>
-</ds:datastoreItem>
-</file>
-
-<file path=customXml/itemProps3.xml><?xml version="1.0" encoding="utf-8"?>
-<ds:datastoreItem xmlns:ds="http://schemas.openxmlformats.org/officeDocument/2006/customXml" ds:itemID="{2421B937-7172-47A3-B8EF-010B04CBBB90}">
-  <ds:schemaRefs>
-    <ds:schemaRef ds:uri="http://schemas.microsoft.com/sharepoint/v3/contenttype/forms"/>
-  </ds:schemaRefs>
-</ds:datastoreItem>
-</file>
-
 <file path=docMetadata/LabelInfo.xml><?xml version="1.0" encoding="utf-8"?>
 <clbl:labelList xmlns:clbl="http://schemas.microsoft.com/office/2020/mipLabelMetadata"/>
 </file>